--- a/material/[SeSAC_YDP_6] 23_React_Component_JSX.pptx
+++ b/material/[SeSAC_YDP_6] 23_React_Component_JSX.pptx
@@ -2,7 +2,7 @@
 <file path=ppt/presentation.xml><?xml version="1.0" encoding="utf-8"?>
 <p:presentation xmlns:a="http://schemas.openxmlformats.org/drawingml/2006/main" xmlns:r="http://schemas.openxmlformats.org/officeDocument/2006/relationships" xmlns:p="http://schemas.openxmlformats.org/presentationml/2006/main" saveSubsetFonts="1">
   <p:sldMasterIdLst>
-    <p:sldMasterId id="2147483673" r:id="rId1"/>
+    <p:sldMasterId id="2147483686" r:id="rId1"/>
   </p:sldMasterIdLst>
   <p:notesMasterIdLst>
     <p:notesMasterId r:id="rId22"/>
@@ -219,7 +219,7 @@
           <a:p>
             <a:fld id="{2EF3F159-7250-4DD4-91C2-13B35D56E1AF}" type="datetimeFigureOut">
               <a:rPr lang="ko-KR" altLang="en-US" smtClean="0"/>
-              <a:t>2023-09-19</a:t>
+              <a:t>2024-07-29</a:t>
             </a:fld>
             <a:endParaRPr lang="ko-KR" altLang="en-US"/>
           </a:p>
@@ -614,146 +614,6 @@
           <a:bodyPr/>
           <a:lstStyle/>
           <a:p>
-            <a:r>
-              <a:rPr lang="en-US" altLang="ko-KR" dirty="0"/>
-              <a:t>html</a:t>
-            </a:r>
-            <a:r>
-              <a:rPr lang="en-US" altLang="ko-KR" baseline="0" dirty="0"/>
-              <a:t> </a:t>
-            </a:r>
-            <a:r>
-              <a:rPr lang="ko-KR" altLang="en-US" baseline="0" dirty="0"/>
-              <a:t>쓰다가 변수를 넣는다거나</a:t>
-            </a:r>
-            <a:r>
-              <a:rPr lang="en-US" altLang="ko-KR" baseline="0" dirty="0"/>
-              <a:t>, </a:t>
-            </a:r>
-            <a:r>
-              <a:rPr lang="ko-KR" altLang="en-US" baseline="0" dirty="0"/>
-              <a:t>연산을 하고 싶을 때는 중괄호 쓰고</a:t>
-            </a:r>
-            <a:r>
-              <a:rPr lang="en-US" altLang="ko-KR" baseline="0" dirty="0"/>
-              <a:t>,</a:t>
-            </a:r>
-          </a:p>
-          <a:p>
-            <a:r>
-              <a:rPr lang="ko-KR" altLang="en-US" dirty="0"/>
-              <a:t>중괄호안에서 자바스크립트 문법을 쓰다가 </a:t>
-            </a:r>
-            <a:r>
-              <a:rPr lang="en-US" altLang="ko-KR" dirty="0"/>
-              <a:t>html </a:t>
-            </a:r>
-            <a:r>
-              <a:rPr lang="ko-KR" altLang="en-US" dirty="0"/>
-              <a:t>요소를 쓰고 싶으면 </a:t>
-            </a:r>
-            <a:r>
-              <a:rPr lang="ko-KR" altLang="en-US" dirty="0" err="1"/>
-              <a:t>소괄호안에다가</a:t>
-            </a:r>
-            <a:r>
-              <a:rPr lang="ko-KR" altLang="en-US" dirty="0"/>
-              <a:t> </a:t>
-            </a:r>
-            <a:r>
-              <a:rPr lang="en-US" altLang="ko-KR" dirty="0"/>
-              <a:t>html</a:t>
-            </a:r>
-            <a:r>
-              <a:rPr lang="en-US" altLang="ko-KR" baseline="0" dirty="0"/>
-              <a:t> </a:t>
-            </a:r>
-            <a:r>
-              <a:rPr lang="ko-KR" altLang="en-US" baseline="0" dirty="0"/>
-              <a:t>요소 쓰기</a:t>
-            </a:r>
-            <a:r>
-              <a:rPr lang="en-US" altLang="ko-KR" baseline="0" dirty="0"/>
-              <a:t>.</a:t>
-            </a:r>
-          </a:p>
-          <a:p>
-            <a:r>
-              <a:rPr lang="en-US" altLang="ko-KR" baseline="0" dirty="0"/>
-              <a:t>(return </a:t>
-            </a:r>
-            <a:r>
-              <a:rPr lang="ko-KR" altLang="en-US" baseline="0" dirty="0"/>
-              <a:t>과 마찬가지로 하나의 태그만 </a:t>
-            </a:r>
-            <a:r>
-              <a:rPr lang="ko-KR" altLang="en-US" baseline="0" dirty="0" err="1"/>
-              <a:t>쓸때는</a:t>
-            </a:r>
-            <a:r>
-              <a:rPr lang="ko-KR" altLang="en-US" baseline="0" dirty="0"/>
-              <a:t> 소괄호로 감싸지 않아도 됨</a:t>
-            </a:r>
-            <a:r>
-              <a:rPr lang="en-US" altLang="ko-KR" baseline="0" dirty="0"/>
-              <a:t>. </a:t>
-            </a:r>
-          </a:p>
-          <a:p>
-            <a:r>
-              <a:rPr lang="en-US" altLang="ko-KR" baseline="0" dirty="0"/>
-              <a:t>div&gt;h2 </a:t>
-            </a:r>
-            <a:r>
-              <a:rPr lang="ko-KR" altLang="en-US" baseline="0" dirty="0"/>
-              <a:t>가 아닌 </a:t>
-            </a:r>
-            <a:r>
-              <a:rPr lang="en-US" altLang="ko-KR" baseline="0" dirty="0"/>
-              <a:t>h2</a:t>
-            </a:r>
-            <a:r>
-              <a:rPr lang="ko-KR" altLang="en-US" baseline="0" dirty="0"/>
-              <a:t>만 쓰고 싶었다면</a:t>
-            </a:r>
-            <a:r>
-              <a:rPr lang="en-US" altLang="ko-KR" baseline="0" dirty="0"/>
-              <a:t>, </a:t>
-            </a:r>
-            <a:r>
-              <a:rPr lang="ko-KR" altLang="en-US" baseline="0" dirty="0"/>
-              <a:t>소괄호 굳이 필요 없고</a:t>
-            </a:r>
-            <a:r>
-              <a:rPr lang="en-US" altLang="ko-KR" baseline="0" dirty="0"/>
-              <a:t>,  </a:t>
-            </a:r>
-          </a:p>
-          <a:p>
-            <a:r>
-              <a:rPr lang="ko-KR" altLang="en-US" baseline="0" dirty="0"/>
-              <a:t>중괄호 내부에서 </a:t>
-            </a:r>
-            <a:r>
-              <a:rPr lang="en-US" altLang="ko-KR" baseline="0" dirty="0"/>
-              <a:t>html</a:t>
-            </a:r>
-            <a:r>
-              <a:rPr lang="ko-KR" altLang="en-US" baseline="0" dirty="0"/>
-              <a:t>을 작성할 때도 마찬가지로 하나의 전체 태그가 </a:t>
-            </a:r>
-            <a:r>
-              <a:rPr lang="ko-KR" altLang="en-US" baseline="0" dirty="0" err="1"/>
-              <a:t>모든것을</a:t>
-            </a:r>
-            <a:r>
-              <a:rPr lang="ko-KR" altLang="en-US" baseline="0" dirty="0"/>
-              <a:t> 감싸야 함</a:t>
-            </a:r>
-            <a:r>
-              <a:rPr lang="en-US" altLang="ko-KR" baseline="0" dirty="0"/>
-              <a:t>)</a:t>
-            </a:r>
             <a:endParaRPr lang="ko-KR" altLang="en-US" dirty="0"/>
           </a:p>
         </p:txBody>
@@ -775,7 +635,7 @@
           <a:p>
             <a:fld id="{BF7660BF-9D8A-4D9B-A2EE-C667F9509E93}" type="slidenum">
               <a:rPr lang="ko-KR" altLang="en-US" smtClean="0"/>
-              <a:t>13</a:t>
+              <a:t>12</a:t>
             </a:fld>
             <a:endParaRPr lang="ko-KR" altLang="en-US" dirty="0"/>
           </a:p>
@@ -784,7 +644,7 @@
     </p:spTree>
     <p:extLst>
       <p:ext uri="{BB962C8B-B14F-4D97-AF65-F5344CB8AC3E}">
-        <p14:creationId xmlns:p14="http://schemas.microsoft.com/office/powerpoint/2010/main" val="3384232329"/>
+        <p14:creationId xmlns:p14="http://schemas.microsoft.com/office/powerpoint/2010/main" val="1945367991"/>
       </p:ext>
     </p:extLst>
   </p:cSld>
@@ -839,69 +699,208 @@
           <a:lstStyle/>
           <a:p>
             <a:r>
-              <a:rPr lang="en-US" altLang="ko-KR" dirty="0" err="1"/>
-              <a:t>str</a:t>
-            </a:r>
+              <a:rPr lang="en-US" altLang="ko-KR" dirty="0"/>
+              <a:t>html</a:t>
+            </a:r>
+            <a:r>
+              <a:rPr lang="en-US" altLang="ko-KR" baseline="0" dirty="0"/>
+              <a:t> </a:t>
+            </a:r>
+            <a:r>
+              <a:rPr lang="ko-KR" altLang="en-US" baseline="0" dirty="0"/>
+              <a:t>쓰다가 변수를 넣는다거나</a:t>
+            </a:r>
+            <a:r>
+              <a:rPr lang="en-US" altLang="ko-KR" baseline="0" dirty="0"/>
+              <a:t>, </a:t>
+            </a:r>
+            <a:r>
+              <a:rPr lang="ko-KR" altLang="en-US" baseline="0" dirty="0"/>
+              <a:t>연산을 하고 싶을 때는 중괄호 쓰고</a:t>
+            </a:r>
+            <a:r>
+              <a:rPr lang="en-US" altLang="ko-KR" baseline="0" dirty="0"/>
+              <a:t>,</a:t>
+            </a:r>
+          </a:p>
+          <a:p>
             <a:r>
               <a:rPr lang="ko-KR" altLang="en-US" dirty="0"/>
-              <a:t>이 </a:t>
+              <a:t>중괄호안에서 자바스크립트 문법을 쓰다가 </a:t>
             </a:r>
             <a:r>
               <a:rPr lang="en-US" altLang="ko-KR" dirty="0"/>
-              <a:t>‘hello,’ </a:t>
+              <a:t>html </a:t>
             </a:r>
             <a:r>
               <a:rPr lang="ko-KR" altLang="en-US" dirty="0"/>
-              <a:t>였기 때문에 </a:t>
+              <a:t>요소를 쓰고 싶으면 </a:t>
             </a:r>
             <a:r>
               <a:rPr lang="ko-KR" altLang="en-US" dirty="0" err="1"/>
-              <a:t>결과화면</a:t>
+              <a:t>소괄호안에다가</a:t>
             </a:r>
             <a:r>
               <a:rPr lang="ko-KR" altLang="en-US" dirty="0"/>
-              <a:t> 저렇게 나타남</a:t>
-            </a:r>
-            <a:endParaRPr lang="en-US" altLang="ko-KR" dirty="0"/>
-          </a:p>
-          <a:p>
+              <a:t> </a:t>
+            </a:r>
             <a:r>
               <a:rPr lang="en-US" altLang="ko-KR" dirty="0"/>
-              <a:t>+ </a:t>
-            </a:r>
-            <a:r>
-              <a:rPr lang="ko-KR" altLang="en-US" dirty="0"/>
-              <a:t>우리는 </a:t>
-            </a:r>
-            <a:r>
-              <a:rPr lang="en-US" altLang="ko-KR" dirty="0"/>
-              <a:t>JSX </a:t>
-            </a:r>
-            <a:r>
-              <a:rPr lang="ko-KR" altLang="en-US" dirty="0"/>
-              <a:t>형태로 썼지만 실제 브라우저는 </a:t>
-            </a:r>
-            <a:r>
-              <a:rPr lang="en-US" altLang="ko-KR" dirty="0" err="1"/>
-              <a:t>js</a:t>
-            </a:r>
-            <a:r>
-              <a:rPr lang="ko-KR" altLang="en-US" dirty="0"/>
-              <a:t>로 받아서 봄</a:t>
-            </a:r>
-            <a:r>
-              <a:rPr lang="en-US" altLang="ko-KR" dirty="0"/>
+              <a:t>html</a:t>
+            </a:r>
+            <a:r>
+              <a:rPr lang="en-US" altLang="ko-KR" baseline="0" dirty="0"/>
+              <a:t> </a:t>
+            </a:r>
+            <a:r>
+              <a:rPr lang="ko-KR" altLang="en-US" baseline="0" dirty="0"/>
+              <a:t>요소 쓰기</a:t>
+            </a:r>
+            <a:r>
+              <a:rPr lang="en-US" altLang="ko-KR" baseline="0" dirty="0"/>
+              <a:t>.</a:t>
+            </a:r>
+          </a:p>
+          <a:p>
+            <a:r>
+              <a:rPr lang="en-US" altLang="ko-KR" baseline="0" dirty="0"/>
+              <a:t>(return </a:t>
+            </a:r>
+            <a:r>
+              <a:rPr lang="ko-KR" altLang="en-US" baseline="0" dirty="0"/>
+              <a:t>과 마찬가지로 하나의 태그만 </a:t>
+            </a:r>
+            <a:r>
+              <a:rPr lang="ko-KR" altLang="en-US" baseline="0" dirty="0" err="1"/>
+              <a:t>쓸때는</a:t>
+            </a:r>
+            <a:r>
+              <a:rPr lang="ko-KR" altLang="en-US" baseline="0" dirty="0"/>
+              <a:t> 소괄호로 감싸지 않아도 됨</a:t>
+            </a:r>
+            <a:r>
+              <a:rPr lang="en-US" altLang="ko-KR" baseline="0" dirty="0"/>
               <a:t>. </a:t>
             </a:r>
-            <a:r>
-              <a:rPr lang="ko-KR" altLang="en-US" dirty="0"/>
-              <a:t>바벨이 번역해서 전달해주니까</a:t>
-            </a:r>
-            <a:r>
-              <a:rPr lang="en-US" altLang="ko-KR" dirty="0"/>
-              <a:t>!!</a:t>
-            </a:r>
-            <a:endParaRPr lang="ko-KR" altLang="en-US" dirty="0"/>
+          </a:p>
+          <a:p>
+            <a:r>
+              <a:rPr lang="en-US" altLang="ko-KR" baseline="0" dirty="0"/>
+              <a:t>div&gt;h2 </a:t>
+            </a:r>
+            <a:r>
+              <a:rPr lang="ko-KR" altLang="en-US" baseline="0" dirty="0"/>
+              <a:t>가 아닌 </a:t>
+            </a:r>
+            <a:r>
+              <a:rPr lang="en-US" altLang="ko-KR" baseline="0" dirty="0"/>
+              <a:t>h2</a:t>
+            </a:r>
+            <a:r>
+              <a:rPr lang="ko-KR" altLang="en-US" baseline="0" dirty="0"/>
+              <a:t>만 쓰고 싶었다면</a:t>
+            </a:r>
+            <a:r>
+              <a:rPr lang="en-US" altLang="ko-KR" baseline="0" dirty="0"/>
+              <a:t>, </a:t>
+            </a:r>
+            <a:r>
+              <a:rPr lang="ko-KR" altLang="en-US" baseline="0" dirty="0"/>
+              <a:t>소괄호 굳이 필요 없고</a:t>
+            </a:r>
+            <a:r>
+              <a:rPr lang="en-US" altLang="ko-KR" baseline="0" dirty="0"/>
+              <a:t>,  </a:t>
+            </a:r>
+          </a:p>
+          <a:p>
+            <a:r>
+              <a:rPr lang="ko-KR" altLang="en-US" baseline="0" dirty="0"/>
+              <a:t>중괄호 내부에서 </a:t>
+            </a:r>
+            <a:r>
+              <a:rPr lang="en-US" altLang="ko-KR" baseline="0" dirty="0"/>
+              <a:t>html</a:t>
+            </a:r>
+            <a:r>
+              <a:rPr lang="ko-KR" altLang="en-US" baseline="0" dirty="0"/>
+              <a:t>을 작성할 때도 마찬가지로 하나의 전체 태그가 </a:t>
+            </a:r>
+            <a:r>
+              <a:rPr lang="ko-KR" altLang="en-US" baseline="0" dirty="0" err="1"/>
+              <a:t>모든것을</a:t>
+            </a:r>
+            <a:r>
+              <a:rPr lang="ko-KR" altLang="en-US" baseline="0" dirty="0"/>
+              <a:t> 감싸야 함</a:t>
+            </a:r>
+            <a:r>
+              <a:rPr lang="en-US" altLang="ko-KR" baseline="0" dirty="0" smtClean="0"/>
+              <a:t>)</a:t>
+            </a:r>
+          </a:p>
+          <a:p>
+            <a:endParaRPr lang="en-US" altLang="ko-KR" baseline="0" dirty="0" smtClean="0"/>
+          </a:p>
+          <a:p>
+            <a:r>
+              <a:rPr lang="en-US" altLang="ko-KR" baseline="0" dirty="0" smtClean="0"/>
+              <a:t>{</a:t>
+            </a:r>
+            <a:r>
+              <a:rPr lang="ko-KR" altLang="en-US" baseline="0" dirty="0" smtClean="0"/>
+              <a:t>중괄호</a:t>
+            </a:r>
+            <a:r>
+              <a:rPr lang="en-US" altLang="ko-KR" baseline="0" dirty="0" smtClean="0"/>
+              <a:t>}</a:t>
+            </a:r>
+            <a:r>
+              <a:rPr lang="ko-KR" altLang="en-US" baseline="0" dirty="0" smtClean="0"/>
+              <a:t>는 </a:t>
+            </a:r>
+            <a:r>
+              <a:rPr lang="en-US" altLang="ko-KR" baseline="0" dirty="0" smtClean="0"/>
+              <a:t>id </a:t>
+            </a:r>
+            <a:r>
+              <a:rPr lang="ko-KR" altLang="en-US" baseline="0" dirty="0" smtClean="0"/>
+              <a:t>속성에도 가능</a:t>
+            </a:r>
+            <a:r>
+              <a:rPr lang="en-US" altLang="ko-KR" baseline="0" dirty="0" smtClean="0"/>
+              <a:t>, </a:t>
+            </a:r>
+            <a:r>
+              <a:rPr lang="en-US" altLang="ko-KR" baseline="0" dirty="0" err="1" smtClean="0"/>
+              <a:t>className</a:t>
+            </a:r>
+            <a:r>
+              <a:rPr lang="ko-KR" altLang="en-US" baseline="0" dirty="0" smtClean="0"/>
+              <a:t> 등등 왠만한 모든 곳에 가능하다</a:t>
+            </a:r>
+            <a:r>
+              <a:rPr lang="en-US" altLang="ko-KR" baseline="0" dirty="0" smtClean="0"/>
+              <a:t>.</a:t>
+            </a:r>
+          </a:p>
+          <a:p>
+            <a:r>
+              <a:rPr lang="ko-KR" altLang="en-US" baseline="0" dirty="0" smtClean="0"/>
+              <a:t>이런걸 </a:t>
+            </a:r>
+            <a:r>
+              <a:rPr lang="en-US" altLang="ko-KR" baseline="0" dirty="0" smtClean="0"/>
+              <a:t>– </a:t>
+            </a:r>
+            <a:r>
+              <a:rPr lang="ko-KR" altLang="en-US" baseline="0" dirty="0" smtClean="0"/>
+              <a:t>데이터 바인딩이라고 합니다</a:t>
+            </a:r>
+            <a:r>
+              <a:rPr lang="en-US" altLang="ko-KR" baseline="0" dirty="0" smtClean="0"/>
+              <a:t>.</a:t>
+            </a:r>
           </a:p>
         </p:txBody>
       </p:sp>
@@ -922,7 +921,7 @@
           <a:p>
             <a:fld id="{BF7660BF-9D8A-4D9B-A2EE-C667F9509E93}" type="slidenum">
               <a:rPr lang="ko-KR" altLang="en-US" smtClean="0"/>
-              <a:t>14</a:t>
+              <a:t>13</a:t>
             </a:fld>
             <a:endParaRPr lang="ko-KR" altLang="en-US" dirty="0"/>
           </a:p>
@@ -931,7 +930,7 @@
     </p:spTree>
     <p:extLst>
       <p:ext uri="{BB962C8B-B14F-4D97-AF65-F5344CB8AC3E}">
-        <p14:creationId xmlns:p14="http://schemas.microsoft.com/office/powerpoint/2010/main" val="1201277831"/>
+        <p14:creationId xmlns:p14="http://schemas.microsoft.com/office/powerpoint/2010/main" val="3384232329"/>
       </p:ext>
     </p:extLst>
   </p:cSld>
@@ -986,36 +985,67 @@
           <a:lstStyle/>
           <a:p>
             <a:r>
+              <a:rPr lang="en-US" altLang="ko-KR" dirty="0" err="1"/>
+              <a:t>str</a:t>
+            </a:r>
+            <a:r>
+              <a:rPr lang="ko-KR" altLang="en-US" dirty="0"/>
+              <a:t>이 </a:t>
+            </a:r>
+            <a:r>
+              <a:rPr lang="en-US" altLang="ko-KR" dirty="0"/>
+              <a:t>‘hello,’ </a:t>
+            </a:r>
+            <a:r>
+              <a:rPr lang="ko-KR" altLang="en-US" dirty="0"/>
+              <a:t>였기 때문에 </a:t>
+            </a:r>
+            <a:r>
               <a:rPr lang="ko-KR" altLang="en-US" dirty="0" err="1"/>
-              <a:t>밑줄쳐진</a:t>
+              <a:t>결과화면</a:t>
             </a:r>
             <a:r>
               <a:rPr lang="ko-KR" altLang="en-US" dirty="0"/>
-              <a:t> </a:t>
-            </a:r>
-            <a:r>
-              <a:rPr lang="ko-KR" altLang="en-US" dirty="0" err="1"/>
-              <a:t>삼항연산자</a:t>
+              <a:t> 저렇게 나타남</a:t>
+            </a:r>
+            <a:endParaRPr lang="en-US" altLang="ko-KR" dirty="0"/>
+          </a:p>
+          <a:p>
+            <a:r>
+              <a:rPr lang="en-US" altLang="ko-KR" dirty="0"/>
+              <a:t>+ </a:t>
             </a:r>
             <a:r>
               <a:rPr lang="ko-KR" altLang="en-US" dirty="0"/>
-              <a:t> 대신 </a:t>
+              <a:t>우리는 </a:t>
             </a:r>
             <a:r>
               <a:rPr lang="en-US" altLang="ko-KR" dirty="0"/>
-              <a:t>if</a:t>
-            </a:r>
-            <a:r>
-              <a:rPr lang="en-US" altLang="ko-KR" baseline="0" dirty="0"/>
-              <a:t> ~ else </a:t>
-            </a:r>
-            <a:r>
-              <a:rPr lang="ko-KR" altLang="en-US" baseline="0" dirty="0"/>
-              <a:t>문이 올 수 </a:t>
-            </a:r>
-            <a:r>
-              <a:rPr lang="ko-KR" altLang="en-US" baseline="0" dirty="0" err="1"/>
-              <a:t>없ㅇ므</a:t>
+              <a:t>JSX </a:t>
+            </a:r>
+            <a:r>
+              <a:rPr lang="ko-KR" altLang="en-US" dirty="0"/>
+              <a:t>형태로 썼지만 실제 브라우저는 </a:t>
+            </a:r>
+            <a:r>
+              <a:rPr lang="en-US" altLang="ko-KR" dirty="0" err="1"/>
+              <a:t>js</a:t>
+            </a:r>
+            <a:r>
+              <a:rPr lang="ko-KR" altLang="en-US" dirty="0"/>
+              <a:t>로 받아서 봄</a:t>
+            </a:r>
+            <a:r>
+              <a:rPr lang="en-US" altLang="ko-KR" dirty="0"/>
+              <a:t>. </a:t>
+            </a:r>
+            <a:r>
+              <a:rPr lang="ko-KR" altLang="en-US" dirty="0"/>
+              <a:t>바벨이 번역해서 전달해주니까</a:t>
+            </a:r>
+            <a:r>
+              <a:rPr lang="en-US" altLang="ko-KR" dirty="0"/>
+              <a:t>!!</a:t>
             </a:r>
             <a:endParaRPr lang="ko-KR" altLang="en-US" dirty="0"/>
           </a:p>
@@ -1038,7 +1068,7 @@
           <a:p>
             <a:fld id="{BF7660BF-9D8A-4D9B-A2EE-C667F9509E93}" type="slidenum">
               <a:rPr lang="ko-KR" altLang="en-US" smtClean="0"/>
-              <a:t>15</a:t>
+              <a:t>14</a:t>
             </a:fld>
             <a:endParaRPr lang="ko-KR" altLang="en-US" dirty="0"/>
           </a:p>
@@ -1047,7 +1077,7 @@
     </p:spTree>
     <p:extLst>
       <p:ext uri="{BB962C8B-B14F-4D97-AF65-F5344CB8AC3E}">
-        <p14:creationId xmlns:p14="http://schemas.microsoft.com/office/powerpoint/2010/main" val="3064030260"/>
+        <p14:creationId xmlns:p14="http://schemas.microsoft.com/office/powerpoint/2010/main" val="1201277831"/>
       </p:ext>
     </p:extLst>
   </p:cSld>
@@ -1102,108 +1132,89 @@
           <a:lstStyle/>
           <a:p>
             <a:r>
+              <a:rPr lang="ko-KR" altLang="en-US" dirty="0" err="1"/>
+              <a:t>밑줄쳐진</a:t>
+            </a:r>
+            <a:r>
+              <a:rPr lang="ko-KR" altLang="en-US" dirty="0"/>
+              <a:t> </a:t>
+            </a:r>
+            <a:r>
+              <a:rPr lang="ko-KR" altLang="en-US" dirty="0" err="1"/>
+              <a:t>삼항연산자</a:t>
+            </a:r>
+            <a:r>
+              <a:rPr lang="ko-KR" altLang="en-US" dirty="0"/>
+              <a:t> 대신 </a:t>
+            </a:r>
+            <a:r>
               <a:rPr lang="en-US" altLang="ko-KR" dirty="0"/>
-              <a:t>dash-case(kebab-case</a:t>
-            </a:r>
-            <a:r>
-              <a:rPr lang="ko-KR" altLang="en-US" dirty="0"/>
-              <a:t>라고도 함</a:t>
-            </a:r>
-            <a:r>
-              <a:rPr lang="en-US" altLang="ko-KR" dirty="0"/>
-              <a:t>): </a:t>
-            </a:r>
-            <a:r>
-              <a:rPr lang="en-US" altLang="ko-KR" dirty="0" err="1"/>
-              <a:t>dashcase</a:t>
-            </a:r>
-            <a:r>
-              <a:rPr lang="en-US" altLang="ko-KR" dirty="0"/>
-              <a:t>?</a:t>
+              <a:t>if</a:t>
             </a:r>
             <a:r>
               <a:rPr lang="en-US" altLang="ko-KR" baseline="0" dirty="0"/>
-              <a:t> </a:t>
-            </a:r>
-            <a:r>
-              <a:rPr lang="en-US" altLang="ko-KR" baseline="0" dirty="0" err="1"/>
-              <a:t>js</a:t>
+              <a:t> ~ else </a:t>
             </a:r>
             <a:r>
               <a:rPr lang="ko-KR" altLang="en-US" baseline="0" dirty="0"/>
-              <a:t>가 </a:t>
-            </a:r>
-            <a:r>
-              <a:rPr lang="ko-KR" altLang="en-US" baseline="0" dirty="0" err="1"/>
-              <a:t>볼때</a:t>
-            </a:r>
-            <a:r>
-              <a:rPr lang="ko-KR" altLang="en-US" baseline="0" dirty="0"/>
-              <a:t> </a:t>
-            </a:r>
-            <a:r>
-              <a:rPr lang="en-US" altLang="ko-KR" baseline="0" dirty="0"/>
-              <a:t>-</a:t>
-            </a:r>
-            <a:r>
-              <a:rPr lang="ko-KR" altLang="en-US" baseline="0" dirty="0"/>
-              <a:t>는 </a:t>
-            </a:r>
-            <a:r>
-              <a:rPr lang="ko-KR" altLang="en-US" baseline="0" dirty="0" err="1"/>
-              <a:t>빼기라고</a:t>
-            </a:r>
-            <a:r>
-              <a:rPr lang="ko-KR" altLang="en-US" baseline="0" dirty="0"/>
-              <a:t> 생각할 수 있기 </a:t>
-            </a:r>
-            <a:r>
-              <a:rPr lang="ko-KR" altLang="en-US" baseline="0" dirty="0" err="1"/>
-              <a:t>떄문에</a:t>
-            </a:r>
-            <a:r>
-              <a:rPr lang="en-US" altLang="ko-KR" baseline="0" dirty="0"/>
+              <a:t>문이 올 수 </a:t>
+            </a:r>
+            <a:r>
+              <a:rPr lang="ko-KR" altLang="en-US" baseline="0" dirty="0" smtClean="0"/>
+              <a:t>없음</a:t>
+            </a:r>
+            <a:r>
+              <a:rPr lang="en-US" altLang="ko-KR" baseline="0" dirty="0" smtClean="0"/>
               <a:t>.</a:t>
             </a:r>
           </a:p>
           <a:p>
-            <a:endParaRPr lang="en-US" altLang="ko-KR" baseline="0" dirty="0"/>
-          </a:p>
-          <a:p>
-            <a:r>
-              <a:rPr lang="ko-KR" altLang="en-US" dirty="0"/>
-              <a:t>객체를 담는 방식을 </a:t>
-            </a:r>
-            <a:r>
-              <a:rPr lang="en-US" altLang="ko-KR" dirty="0" err="1"/>
-              <a:t>jsx</a:t>
-            </a:r>
-            <a:r>
-              <a:rPr lang="en-US" altLang="ko-KR" dirty="0"/>
-              <a:t> </a:t>
-            </a:r>
-            <a:r>
-              <a:rPr lang="ko-KR" altLang="en-US" dirty="0"/>
-              <a:t>문법을 통해서 </a:t>
-            </a:r>
-            <a:r>
-              <a:rPr lang="ko-KR" altLang="en-US" dirty="0" err="1"/>
-              <a:t>쓴것이기</a:t>
-            </a:r>
-            <a:r>
-              <a:rPr lang="ko-KR" altLang="en-US" dirty="0"/>
-              <a:t> 때문에 스타일 적용 시에는 두번의 중괄호가 필요</a:t>
-            </a:r>
-            <a:r>
-              <a:rPr lang="en-US" altLang="ko-KR" dirty="0"/>
-              <a:t>,</a:t>
-            </a:r>
-          </a:p>
-          <a:p>
-            <a:r>
-              <a:rPr lang="ko-KR" altLang="en-US" dirty="0"/>
-              <a:t>오브젝트를 따로 변수에 선언해서 사용할 수도 있음</a:t>
-            </a:r>
+            <a:endParaRPr lang="en-US" altLang="ko-KR" baseline="0" dirty="0" smtClean="0"/>
+          </a:p>
+          <a:p>
+            <a:r>
+              <a:rPr lang="en-US" altLang="ko-KR" baseline="0" dirty="0" smtClean="0"/>
+              <a:t>JSX </a:t>
+            </a:r>
+            <a:r>
+              <a:rPr lang="ko-KR" altLang="en-US" baseline="0" dirty="0" smtClean="0"/>
+              <a:t>외부에서 </a:t>
+            </a:r>
+            <a:r>
+              <a:rPr lang="ko-KR" altLang="en-US" baseline="0" dirty="0" err="1" smtClean="0"/>
+              <a:t>로직처리</a:t>
+            </a:r>
+            <a:r>
+              <a:rPr lang="en-US" altLang="ko-KR" baseline="0" dirty="0" smtClean="0"/>
+              <a:t>!</a:t>
+            </a:r>
+          </a:p>
+          <a:p>
+            <a:r>
+              <a:rPr lang="ko-KR" altLang="en-US" baseline="0" dirty="0" smtClean="0"/>
+              <a:t>렌더링할 요소를 결정한 후</a:t>
+            </a:r>
+            <a:r>
+              <a:rPr lang="en-US" altLang="ko-KR" baseline="0" dirty="0" smtClean="0"/>
+              <a:t>, </a:t>
+            </a:r>
+            <a:r>
+              <a:rPr lang="ko-KR" altLang="en-US" baseline="0" dirty="0" smtClean="0"/>
+              <a:t>해당 요소를 </a:t>
+            </a:r>
+            <a:r>
+              <a:rPr lang="en-US" altLang="ko-KR" baseline="0" dirty="0" smtClean="0"/>
+              <a:t>JSX</a:t>
+            </a:r>
+            <a:r>
+              <a:rPr lang="ko-KR" altLang="en-US" baseline="0" dirty="0" smtClean="0"/>
+              <a:t>에 </a:t>
+            </a:r>
+            <a:r>
+              <a:rPr lang="ko-KR" altLang="en-US" baseline="0" smtClean="0"/>
+              <a:t>포함하는 방식</a:t>
+            </a:r>
+            <a:endParaRPr lang="ko-KR" altLang="en-US" dirty="0"/>
           </a:p>
         </p:txBody>
       </p:sp>
@@ -1224,7 +1235,7 @@
           <a:p>
             <a:fld id="{BF7660BF-9D8A-4D9B-A2EE-C667F9509E93}" type="slidenum">
               <a:rPr lang="ko-KR" altLang="en-US" smtClean="0"/>
-              <a:t>16</a:t>
+              <a:t>15</a:t>
             </a:fld>
             <a:endParaRPr lang="ko-KR" altLang="en-US" dirty="0"/>
           </a:p>
@@ -1233,7 +1244,7 @@
     </p:spTree>
     <p:extLst>
       <p:ext uri="{BB962C8B-B14F-4D97-AF65-F5344CB8AC3E}">
-        <p14:creationId xmlns:p14="http://schemas.microsoft.com/office/powerpoint/2010/main" val="2420792965"/>
+        <p14:creationId xmlns:p14="http://schemas.microsoft.com/office/powerpoint/2010/main" val="3064030260"/>
       </p:ext>
     </p:extLst>
   </p:cSld>
@@ -1288,12 +1299,40 @@
           <a:lstStyle/>
           <a:p>
             <a:r>
+              <a:rPr lang="en-US" altLang="ko-KR" dirty="0"/>
+              <a:t>dash-case(kebab-case</a:t>
+            </a:r>
+            <a:r>
+              <a:rPr lang="ko-KR" altLang="en-US" dirty="0"/>
+              <a:t>라고도 함</a:t>
+            </a:r>
+            <a:r>
+              <a:rPr lang="en-US" altLang="ko-KR" dirty="0"/>
+              <a:t>): </a:t>
+            </a:r>
+            <a:r>
               <a:rPr lang="en-US" altLang="ko-KR" dirty="0" err="1"/>
+              <a:t>dashcase</a:t>
+            </a:r>
+            <a:r>
+              <a:rPr lang="en-US" altLang="ko-KR" dirty="0"/>
+              <a:t>?</a:t>
+            </a:r>
+            <a:r>
+              <a:rPr lang="en-US" altLang="ko-KR" baseline="0" dirty="0"/>
+              <a:t> </a:t>
+            </a:r>
+            <a:r>
+              <a:rPr lang="en-US" altLang="ko-KR" baseline="0" dirty="0" err="1"/>
               <a:t>js</a:t>
             </a:r>
             <a:r>
-              <a:rPr lang="ko-KR" altLang="en-US" dirty="0"/>
-              <a:t>에서</a:t>
+              <a:rPr lang="ko-KR" altLang="en-US" baseline="0" dirty="0"/>
+              <a:t>가 </a:t>
+            </a:r>
+            <a:r>
+              <a:rPr lang="ko-KR" altLang="en-US" baseline="0" dirty="0" err="1"/>
+              <a:t>볼때</a:t>
             </a:r>
             <a:r>
               <a:rPr lang="ko-KR" altLang="en-US" baseline="0" dirty="0"/>
@@ -1301,39 +1340,200 @@
             </a:r>
             <a:r>
               <a:rPr lang="en-US" altLang="ko-KR" baseline="0" dirty="0"/>
-              <a:t>class </a:t>
+              <a:t>-</a:t>
             </a:r>
             <a:r>
               <a:rPr lang="ko-KR" altLang="en-US" baseline="0" dirty="0"/>
               <a:t>는 </a:t>
             </a:r>
             <a:r>
+              <a:rPr lang="ko-KR" altLang="en-US" baseline="0" dirty="0" err="1"/>
+              <a:t>빼기라고</a:t>
+            </a:r>
+            <a:r>
+              <a:rPr lang="ko-KR" altLang="en-US" baseline="0" dirty="0"/>
+              <a:t> 생각할 수 있기 </a:t>
+            </a:r>
+            <a:r>
+              <a:rPr lang="ko-KR" altLang="en-US" baseline="0" dirty="0" err="1"/>
+              <a:t>떄문에</a:t>
+            </a:r>
+            <a:r>
               <a:rPr lang="en-US" altLang="ko-KR" baseline="0" dirty="0"/>
-              <a:t>? </a:t>
-            </a:r>
-            <a:r>
-              <a:rPr lang="ko-KR" altLang="en-US" baseline="0" dirty="0"/>
-              <a:t>다른 기능이 있으니 </a:t>
-            </a:r>
-            <a:r>
-              <a:rPr lang="en-US" altLang="ko-KR" baseline="0" dirty="0"/>
-              <a:t>CSS </a:t>
-            </a:r>
-            <a:r>
-              <a:rPr lang="ko-KR" altLang="en-US" baseline="0" dirty="0"/>
-              <a:t>에서의 클래스를 구분하기 위해서 </a:t>
-            </a:r>
-            <a:r>
-              <a:rPr lang="en-US" altLang="ko-KR" baseline="0" dirty="0" err="1"/>
-              <a:t>className</a:t>
-            </a:r>
-            <a:r>
-              <a:rPr lang="ko-KR" altLang="en-US" baseline="0" dirty="0"/>
-              <a:t>사용</a:t>
-            </a:r>
+              <a:t>.</a:t>
+            </a:r>
+          </a:p>
+          <a:p>
             <a:endParaRPr lang="en-US" altLang="ko-KR" baseline="0" dirty="0"/>
           </a:p>
           <a:p>
+            <a:r>
+              <a:rPr lang="ko-KR" altLang="en-US" dirty="0"/>
+              <a:t>객체를 담는 방식을 </a:t>
+            </a:r>
+            <a:r>
+              <a:rPr lang="en-US" altLang="ko-KR" dirty="0" err="1"/>
+              <a:t>jsx</a:t>
+            </a:r>
+            <a:r>
+              <a:rPr lang="en-US" altLang="ko-KR" dirty="0"/>
+              <a:t> </a:t>
+            </a:r>
+            <a:r>
+              <a:rPr lang="ko-KR" altLang="en-US" dirty="0"/>
+              <a:t>문법을 통해서 </a:t>
+            </a:r>
+            <a:r>
+              <a:rPr lang="ko-KR" altLang="en-US" dirty="0" err="1"/>
+              <a:t>쓴것이기</a:t>
+            </a:r>
+            <a:r>
+              <a:rPr lang="ko-KR" altLang="en-US" dirty="0"/>
+              <a:t> 때문에 스타일 적용 시에는 두번의 중괄호가 필요</a:t>
+            </a:r>
+            <a:r>
+              <a:rPr lang="en-US" altLang="ko-KR" dirty="0"/>
+              <a:t>,</a:t>
+            </a:r>
+          </a:p>
+          <a:p>
+            <a:r>
+              <a:rPr lang="ko-KR" altLang="en-US" dirty="0"/>
+              <a:t>오브젝트를 따로 변수에 선언해서 사용할 수도 </a:t>
+            </a:r>
+            <a:r>
+              <a:rPr lang="ko-KR" altLang="en-US" dirty="0" smtClean="0"/>
+              <a:t>있음</a:t>
+            </a:r>
+            <a:endParaRPr lang="en-US" altLang="ko-KR" dirty="0" smtClean="0"/>
+          </a:p>
+          <a:p>
+            <a:endParaRPr lang="en-US" altLang="ko-KR" dirty="0" smtClean="0"/>
+          </a:p>
+          <a:p>
+            <a:pPr marL="171450" indent="-171450">
+              <a:buFontTx/>
+              <a:buChar char="-"/>
+            </a:pPr>
+            <a:r>
+              <a:rPr lang="en-US" altLang="ko-KR" dirty="0" smtClean="0"/>
+              <a:t>style </a:t>
+            </a:r>
+            <a:r>
+              <a:rPr lang="ko-KR" altLang="en-US" dirty="0" smtClean="0"/>
+              <a:t>넣을 땐 </a:t>
+            </a:r>
+            <a:r>
+              <a:rPr lang="en-US" altLang="ko-KR" dirty="0" smtClean="0"/>
+              <a:t>style = { }</a:t>
+            </a:r>
+          </a:p>
+          <a:p>
+            <a:pPr marL="171450" indent="-171450">
+              <a:buFontTx/>
+              <a:buChar char="-"/>
+            </a:pPr>
+            <a:r>
+              <a:rPr lang="en-US" altLang="ko-KR" dirty="0" smtClean="0"/>
+              <a:t>{ {</a:t>
+            </a:r>
+            <a:r>
+              <a:rPr lang="ko-KR" altLang="en-US" dirty="0" err="1" smtClean="0"/>
+              <a:t>스타일명</a:t>
+            </a:r>
+            <a:r>
+              <a:rPr lang="ko-KR" altLang="en-US" dirty="0" smtClean="0"/>
+              <a:t> </a:t>
+            </a:r>
+            <a:r>
+              <a:rPr lang="en-US" altLang="ko-KR" dirty="0" smtClean="0"/>
+              <a:t>: ‘</a:t>
+            </a:r>
+            <a:r>
+              <a:rPr lang="ko-KR" altLang="en-US" dirty="0" smtClean="0"/>
+              <a:t>값’</a:t>
+            </a:r>
+            <a:r>
+              <a:rPr lang="en-US" altLang="ko-KR" dirty="0" smtClean="0"/>
+              <a:t>} } </a:t>
+            </a:r>
+          </a:p>
+          <a:p>
+            <a:pPr marL="171450" indent="-171450">
+              <a:buFontTx/>
+              <a:buChar char="-"/>
+            </a:pPr>
+            <a:r>
+              <a:rPr lang="ko-KR" altLang="en-US" dirty="0" smtClean="0"/>
+              <a:t>객체 형태</a:t>
+            </a:r>
+            <a:endParaRPr lang="en-US" altLang="ko-KR" dirty="0" smtClean="0"/>
+          </a:p>
+          <a:p>
+            <a:pPr marL="171450" indent="-171450">
+              <a:buFontTx/>
+              <a:buChar char="-"/>
+            </a:pPr>
+            <a:endParaRPr lang="en-US" altLang="ko-KR" dirty="0" smtClean="0"/>
+          </a:p>
+          <a:p>
+            <a:pPr marL="171450" indent="-171450">
+              <a:buFontTx/>
+              <a:buChar char="-"/>
+            </a:pPr>
+            <a:r>
+              <a:rPr lang="en-US" altLang="ko-KR" dirty="0" smtClean="0"/>
+              <a:t>font-size(x)</a:t>
+            </a:r>
+          </a:p>
+          <a:p>
+            <a:pPr marL="171450" indent="-171450">
+              <a:buFontTx/>
+              <a:buChar char="-"/>
+            </a:pPr>
+            <a:r>
+              <a:rPr lang="en-US" altLang="ko-KR" dirty="0" err="1" smtClean="0"/>
+              <a:t>fontSize</a:t>
+            </a:r>
+            <a:r>
+              <a:rPr lang="en-US" altLang="ko-KR" dirty="0" smtClean="0"/>
+              <a:t> </a:t>
+            </a:r>
+            <a:r>
+              <a:rPr lang="ko-KR" altLang="en-US" dirty="0" smtClean="0"/>
+              <a:t>형식으로 </a:t>
+            </a:r>
+            <a:r>
+              <a:rPr lang="ko-KR" altLang="en-US" dirty="0" err="1" smtClean="0"/>
+              <a:t>써줘야함</a:t>
+            </a:r>
+            <a:endParaRPr lang="en-US" altLang="ko-KR" dirty="0" smtClean="0"/>
+          </a:p>
+          <a:p>
+            <a:pPr marL="171450" indent="-171450">
+              <a:buFontTx/>
+              <a:buChar char="-"/>
+            </a:pPr>
+            <a:r>
+              <a:rPr lang="en-US" altLang="ko-KR" dirty="0" smtClean="0"/>
+              <a:t>JSX</a:t>
+            </a:r>
+            <a:r>
+              <a:rPr lang="ko-KR" altLang="en-US" dirty="0" smtClean="0"/>
+              <a:t>에서는 </a:t>
+            </a:r>
+            <a:r>
+              <a:rPr lang="en-US" altLang="ko-KR" dirty="0" smtClean="0"/>
+              <a:t>-</a:t>
+            </a:r>
+            <a:r>
+              <a:rPr lang="ko-KR" altLang="en-US" dirty="0" smtClean="0"/>
+              <a:t>는 진짜 빼기를 말함</a:t>
+            </a:r>
+            <a:r>
+              <a:rPr lang="en-US" altLang="ko-KR" dirty="0" smtClean="0"/>
+              <a:t>.</a:t>
+            </a:r>
             <a:endParaRPr lang="ko-KR" altLang="en-US" dirty="0"/>
           </a:p>
         </p:txBody>
@@ -1355,7 +1555,7 @@
           <a:p>
             <a:fld id="{BF7660BF-9D8A-4D9B-A2EE-C667F9509E93}" type="slidenum">
               <a:rPr lang="ko-KR" altLang="en-US" smtClean="0"/>
-              <a:t>17</a:t>
+              <a:t>16</a:t>
             </a:fld>
             <a:endParaRPr lang="ko-KR" altLang="en-US" dirty="0"/>
           </a:p>
@@ -1364,7 +1564,7 @@
     </p:spTree>
     <p:extLst>
       <p:ext uri="{BB962C8B-B14F-4D97-AF65-F5344CB8AC3E}">
-        <p14:creationId xmlns:p14="http://schemas.microsoft.com/office/powerpoint/2010/main" val="3327219103"/>
+        <p14:creationId xmlns:p14="http://schemas.microsoft.com/office/powerpoint/2010/main" val="2420792965"/>
       </p:ext>
     </p:extLst>
   </p:cSld>
@@ -1419,94 +1619,52 @@
           <a:lstStyle/>
           <a:p>
             <a:r>
-              <a:rPr lang="en-US" altLang="ko-KR" dirty="0"/>
-              <a:t>err: </a:t>
+              <a:rPr lang="en-US" altLang="ko-KR" dirty="0" err="1"/>
+              <a:t>js</a:t>
             </a:r>
             <a:r>
               <a:rPr lang="ko-KR" altLang="en-US" dirty="0"/>
-              <a:t>인풋에 대한 </a:t>
-            </a:r>
-            <a:r>
-              <a:rPr lang="ko-KR" altLang="en-US" dirty="0" err="1"/>
-              <a:t>클로징</a:t>
-            </a:r>
-            <a:r>
-              <a:rPr lang="ko-KR" altLang="en-US" dirty="0"/>
-              <a:t> 태그가 존재하지 않습니다</a:t>
-            </a:r>
-            <a:endParaRPr lang="en-US" altLang="ko-KR" dirty="0"/>
-          </a:p>
-          <a:p>
-            <a:pPr marL="171450" indent="-171450">
-              <a:buFont typeface="Wingdings" panose="05000000000000000000" pitchFamily="2" charset="2"/>
-              <a:buChar char="à"/>
-            </a:pPr>
-            <a:r>
-              <a:rPr lang="en-US" altLang="ko-KR" dirty="0">
-                <a:sym typeface="Wingdings" panose="05000000000000000000" pitchFamily="2" charset="2"/>
-              </a:rPr>
-              <a:t>html</a:t>
-            </a:r>
-            <a:r>
-              <a:rPr lang="en-US" altLang="ko-KR" baseline="0" dirty="0">
-                <a:sym typeface="Wingdings" panose="05000000000000000000" pitchFamily="2" charset="2"/>
-              </a:rPr>
+              <a:t>에서</a:t>
+            </a:r>
+            <a:r>
+              <a:rPr lang="ko-KR" altLang="en-US" baseline="0" dirty="0"/>
               <a:t> </a:t>
             </a:r>
             <a:r>
-              <a:rPr lang="ko-KR" altLang="en-US" baseline="0" dirty="0">
-                <a:sym typeface="Wingdings" panose="05000000000000000000" pitchFamily="2" charset="2"/>
-              </a:rPr>
-              <a:t>수업에서 배웠던 것처럼</a:t>
-            </a:r>
-            <a:r>
-              <a:rPr lang="en-US" altLang="ko-KR" baseline="0" dirty="0">
-                <a:sym typeface="Wingdings" panose="05000000000000000000" pitchFamily="2" charset="2"/>
-              </a:rPr>
-              <a:t>, </a:t>
-            </a:r>
-            <a:r>
-              <a:rPr lang="ko-KR" altLang="en-US" baseline="0" dirty="0" err="1">
-                <a:sym typeface="Wingdings" panose="05000000000000000000" pitchFamily="2" charset="2"/>
-              </a:rPr>
-              <a:t>빈태그</a:t>
-            </a:r>
-            <a:r>
-              <a:rPr lang="ko-KR" altLang="en-US" baseline="0" dirty="0">
-                <a:sym typeface="Wingdings" panose="05000000000000000000" pitchFamily="2" charset="2"/>
-              </a:rPr>
-              <a:t> 마지막에 슬래시를 붙여서 닫아주거나</a:t>
-            </a:r>
-            <a:r>
-              <a:rPr lang="en-US" altLang="ko-KR" baseline="0" dirty="0">
-                <a:sym typeface="Wingdings" panose="05000000000000000000" pitchFamily="2" charset="2"/>
-              </a:rPr>
-              <a:t>,</a:t>
-            </a:r>
-          </a:p>
-          <a:p>
-            <a:pPr marL="171450" indent="-171450">
-              <a:buFont typeface="Wingdings" panose="05000000000000000000" pitchFamily="2" charset="2"/>
-              <a:buChar char="à"/>
-            </a:pPr>
-            <a:r>
-              <a:rPr lang="ko-KR" altLang="en-US" baseline="0" dirty="0">
-                <a:sym typeface="Wingdings" panose="05000000000000000000" pitchFamily="2" charset="2"/>
-              </a:rPr>
-              <a:t>기존의 </a:t>
-            </a:r>
-            <a:r>
-              <a:rPr lang="en-US" altLang="ko-KR" baseline="0" dirty="0">
-                <a:sym typeface="Wingdings" panose="05000000000000000000" pitchFamily="2" charset="2"/>
-              </a:rPr>
-              <a:t>div span</a:t>
-            </a:r>
-            <a:r>
-              <a:rPr lang="ko-KR" altLang="en-US" baseline="0" dirty="0">
-                <a:sym typeface="Wingdings" panose="05000000000000000000" pitchFamily="2" charset="2"/>
-              </a:rPr>
-              <a:t>등의 태그처럼 아예 닫는 태그를 만들어줘도 됨</a:t>
-            </a:r>
+              <a:rPr lang="en-US" altLang="ko-KR" baseline="0" dirty="0"/>
+              <a:t>class </a:t>
+            </a:r>
+            <a:r>
+              <a:rPr lang="ko-KR" altLang="en-US" baseline="0" dirty="0"/>
+              <a:t>는 </a:t>
+            </a:r>
+            <a:r>
+              <a:rPr lang="en-US" altLang="ko-KR" baseline="0" dirty="0"/>
+              <a:t>? </a:t>
+            </a:r>
+            <a:r>
+              <a:rPr lang="ko-KR" altLang="en-US" baseline="0" dirty="0"/>
+              <a:t>다른 기능이 있으니 </a:t>
+            </a:r>
+            <a:r>
+              <a:rPr lang="en-US" altLang="ko-KR" baseline="0" dirty="0"/>
+              <a:t>CSS </a:t>
+            </a:r>
+            <a:r>
+              <a:rPr lang="ko-KR" altLang="en-US" baseline="0" dirty="0"/>
+              <a:t>에서의 클래스를 구분하기 위해서 </a:t>
+            </a:r>
+            <a:r>
+              <a:rPr lang="en-US" altLang="ko-KR" baseline="0" dirty="0" err="1"/>
+              <a:t>className</a:t>
+            </a:r>
+            <a:r>
+              <a:rPr lang="ko-KR" altLang="en-US" baseline="0" dirty="0"/>
+              <a:t>사용</a:t>
+            </a:r>
+            <a:endParaRPr lang="en-US" altLang="ko-KR" baseline="0" dirty="0"/>
+          </a:p>
+          <a:p>
             <a:endParaRPr lang="ko-KR" altLang="en-US" dirty="0"/>
           </a:p>
         </p:txBody>
@@ -1528,7 +1686,7 @@
           <a:p>
             <a:fld id="{BF7660BF-9D8A-4D9B-A2EE-C667F9509E93}" type="slidenum">
               <a:rPr lang="ko-KR" altLang="en-US" smtClean="0"/>
-              <a:t>18</a:t>
+              <a:t>17</a:t>
             </a:fld>
             <a:endParaRPr lang="ko-KR" altLang="en-US" dirty="0"/>
           </a:p>
@@ -1537,7 +1695,7 @@
     </p:spTree>
     <p:extLst>
       <p:ext uri="{BB962C8B-B14F-4D97-AF65-F5344CB8AC3E}">
-        <p14:creationId xmlns:p14="http://schemas.microsoft.com/office/powerpoint/2010/main" val="796028090"/>
+        <p14:creationId xmlns:p14="http://schemas.microsoft.com/office/powerpoint/2010/main" val="3327219103"/>
       </p:ext>
     </p:extLst>
   </p:cSld>
@@ -1591,6 +1749,95 @@
           <a:bodyPr/>
           <a:lstStyle/>
           <a:p>
+            <a:r>
+              <a:rPr lang="en-US" altLang="ko-KR" dirty="0"/>
+              <a:t>err: </a:t>
+            </a:r>
+            <a:r>
+              <a:rPr lang="ko-KR" altLang="en-US" dirty="0"/>
+              <a:t>인풋에 대한 </a:t>
+            </a:r>
+            <a:r>
+              <a:rPr lang="ko-KR" altLang="en-US" dirty="0" err="1"/>
+              <a:t>클로징</a:t>
+            </a:r>
+            <a:r>
+              <a:rPr lang="ko-KR" altLang="en-US" dirty="0"/>
+              <a:t> 태그가 존재하지 않습니다</a:t>
+            </a:r>
+            <a:endParaRPr lang="en-US" altLang="ko-KR" dirty="0"/>
+          </a:p>
+          <a:p>
+            <a:pPr marL="171450" indent="-171450">
+              <a:buFont typeface="Wingdings" panose="05000000000000000000" pitchFamily="2" charset="2"/>
+              <a:buChar char="à"/>
+            </a:pPr>
+            <a:r>
+              <a:rPr lang="en-US" altLang="ko-KR" dirty="0">
+                <a:sym typeface="Wingdings" panose="05000000000000000000" pitchFamily="2" charset="2"/>
+              </a:rPr>
+              <a:t>html</a:t>
+            </a:r>
+            <a:r>
+              <a:rPr lang="en-US" altLang="ko-KR" baseline="0" dirty="0">
+                <a:sym typeface="Wingdings" panose="05000000000000000000" pitchFamily="2" charset="2"/>
+              </a:rPr>
+              <a:t> </a:t>
+            </a:r>
+            <a:r>
+              <a:rPr lang="ko-KR" altLang="en-US" baseline="0" dirty="0">
+                <a:sym typeface="Wingdings" panose="05000000000000000000" pitchFamily="2" charset="2"/>
+              </a:rPr>
+              <a:t>수업에서 배웠던 것처럼</a:t>
+            </a:r>
+            <a:r>
+              <a:rPr lang="en-US" altLang="ko-KR" baseline="0" dirty="0">
+                <a:sym typeface="Wingdings" panose="05000000000000000000" pitchFamily="2" charset="2"/>
+              </a:rPr>
+              <a:t>, </a:t>
+            </a:r>
+            <a:r>
+              <a:rPr lang="ko-KR" altLang="en-US" baseline="0" dirty="0" err="1">
+                <a:sym typeface="Wingdings" panose="05000000000000000000" pitchFamily="2" charset="2"/>
+              </a:rPr>
+              <a:t>빈태그</a:t>
+            </a:r>
+            <a:r>
+              <a:rPr lang="ko-KR" altLang="en-US" baseline="0" dirty="0">
+                <a:sym typeface="Wingdings" panose="05000000000000000000" pitchFamily="2" charset="2"/>
+              </a:rPr>
+              <a:t> 마지막에 슬래시를 붙여서 닫아주거나</a:t>
+            </a:r>
+            <a:r>
+              <a:rPr lang="en-US" altLang="ko-KR" baseline="0" dirty="0">
+                <a:sym typeface="Wingdings" panose="05000000000000000000" pitchFamily="2" charset="2"/>
+              </a:rPr>
+              <a:t>,</a:t>
+            </a:r>
+          </a:p>
+          <a:p>
+            <a:pPr marL="171450" indent="-171450">
+              <a:buFont typeface="Wingdings" panose="05000000000000000000" pitchFamily="2" charset="2"/>
+              <a:buChar char="à"/>
+            </a:pPr>
+            <a:r>
+              <a:rPr lang="ko-KR" altLang="en-US" baseline="0" dirty="0">
+                <a:sym typeface="Wingdings" panose="05000000000000000000" pitchFamily="2" charset="2"/>
+              </a:rPr>
+              <a:t>기존의 </a:t>
+            </a:r>
+            <a:r>
+              <a:rPr lang="en-US" altLang="ko-KR" baseline="0" dirty="0">
+                <a:sym typeface="Wingdings" panose="05000000000000000000" pitchFamily="2" charset="2"/>
+              </a:rPr>
+              <a:t>div span</a:t>
+            </a:r>
+            <a:r>
+              <a:rPr lang="ko-KR" altLang="en-US" baseline="0" dirty="0">
+                <a:sym typeface="Wingdings" panose="05000000000000000000" pitchFamily="2" charset="2"/>
+              </a:rPr>
+              <a:t>등의 태그처럼 아예 닫는 태그를 만들어줘도 됨</a:t>
+            </a:r>
             <a:endParaRPr lang="ko-KR" altLang="en-US" dirty="0"/>
           </a:p>
         </p:txBody>
@@ -1612,6 +1859,90 @@
           <a:p>
             <a:fld id="{BF7660BF-9D8A-4D9B-A2EE-C667F9509E93}" type="slidenum">
               <a:rPr lang="ko-KR" altLang="en-US" smtClean="0"/>
+              <a:t>18</a:t>
+            </a:fld>
+            <a:endParaRPr lang="ko-KR" altLang="en-US" dirty="0"/>
+          </a:p>
+        </p:txBody>
+      </p:sp>
+    </p:spTree>
+    <p:extLst>
+      <p:ext uri="{BB962C8B-B14F-4D97-AF65-F5344CB8AC3E}">
+        <p14:creationId xmlns:p14="http://schemas.microsoft.com/office/powerpoint/2010/main" val="796028090"/>
+      </p:ext>
+    </p:extLst>
+  </p:cSld>
+  <p:clrMapOvr>
+    <a:masterClrMapping/>
+  </p:clrMapOvr>
+</p:notes>
+</file>
+
+<file path=ppt/notesSlides/notesSlide17.xml><?xml version="1.0" encoding="utf-8"?>
+<p:notes xmlns:a="http://schemas.openxmlformats.org/drawingml/2006/main" xmlns:r="http://schemas.openxmlformats.org/officeDocument/2006/relationships" xmlns:p="http://schemas.openxmlformats.org/presentationml/2006/main">
+  <p:cSld>
+    <p:spTree>
+      <p:nvGrpSpPr>
+        <p:cNvPr id="1" name=""/>
+        <p:cNvGrpSpPr/>
+        <p:nvPr/>
+      </p:nvGrpSpPr>
+      <p:grpSpPr>
+        <a:xfrm>
+          <a:off x="0" y="0"/>
+          <a:ext cx="0" cy="0"/>
+          <a:chOff x="0" y="0"/>
+          <a:chExt cx="0" cy="0"/>
+        </a:xfrm>
+      </p:grpSpPr>
+      <p:sp>
+        <p:nvSpPr>
+          <p:cNvPr id="2" name="슬라이드 이미지 개체 틀 1"/>
+          <p:cNvSpPr>
+            <a:spLocks noGrp="1" noRot="1" noChangeAspect="1"/>
+          </p:cNvSpPr>
+          <p:nvPr>
+            <p:ph type="sldImg"/>
+          </p:nvPr>
+        </p:nvSpPr>
+        <p:spPr/>
+      </p:sp>
+      <p:sp>
+        <p:nvSpPr>
+          <p:cNvPr id="3" name="슬라이드 노트 개체 틀 2"/>
+          <p:cNvSpPr>
+            <a:spLocks noGrp="1"/>
+          </p:cNvSpPr>
+          <p:nvPr>
+            <p:ph type="body" idx="1"/>
+          </p:nvPr>
+        </p:nvSpPr>
+        <p:spPr/>
+        <p:txBody>
+          <a:bodyPr/>
+          <a:lstStyle/>
+          <a:p>
+            <a:endParaRPr lang="ko-KR" altLang="en-US" dirty="0"/>
+          </a:p>
+        </p:txBody>
+      </p:sp>
+      <p:sp>
+        <p:nvSpPr>
+          <p:cNvPr id="4" name="슬라이드 번호 개체 틀 3"/>
+          <p:cNvSpPr>
+            <a:spLocks noGrp="1"/>
+          </p:cNvSpPr>
+          <p:nvPr>
+            <p:ph type="sldNum" sz="quarter" idx="10"/>
+          </p:nvPr>
+        </p:nvSpPr>
+        <p:spPr/>
+        <p:txBody>
+          <a:bodyPr/>
+          <a:lstStyle/>
+          <a:p>
+            <a:fld id="{BF7660BF-9D8A-4D9B-A2EE-C667F9509E93}" type="slidenum">
+              <a:rPr lang="ko-KR" altLang="en-US" smtClean="0"/>
               <a:t>19</a:t>
             </a:fld>
             <a:endParaRPr lang="ko-KR" altLang="en-US" dirty="0"/>
@@ -1631,7 +1962,7 @@
 </p:notes>
 </file>
 
-<file path=ppt/notesSlides/notesSlide17.xml><?xml version="1.0" encoding="utf-8"?>
+<file path=ppt/notesSlides/notesSlide18.xml><?xml version="1.0" encoding="utf-8"?>
 <p:notes xmlns:a="http://schemas.openxmlformats.org/drawingml/2006/main" xmlns:r="http://schemas.openxmlformats.org/officeDocument/2006/relationships" xmlns:p="http://schemas.openxmlformats.org/presentationml/2006/main">
   <p:cSld>
     <p:spTree>
@@ -2161,7 +2492,76 @@
           <a:bodyPr/>
           <a:lstStyle/>
           <a:p>
-            <a:endParaRPr lang="ko-KR" altLang="en-US" dirty="0"/>
+            <a:r>
+              <a:rPr lang="en-US" altLang="ko-KR" dirty="0" smtClean="0"/>
+              <a:t>** </a:t>
+            </a:r>
+            <a:r>
+              <a:rPr lang="ko-KR" altLang="en-US" dirty="0" err="1" smtClean="0"/>
+              <a:t>클래스형</a:t>
+            </a:r>
+            <a:r>
+              <a:rPr lang="ko-KR" altLang="en-US" dirty="0" smtClean="0"/>
+              <a:t> 컴포넌트</a:t>
+            </a:r>
+            <a:endParaRPr lang="en-US" altLang="ko-KR" dirty="0" smtClean="0"/>
+          </a:p>
+          <a:p>
+            <a:r>
+              <a:rPr lang="en-US" altLang="ko-KR" dirty="0" err="1" smtClean="0"/>
+              <a:t>React.Component</a:t>
+            </a:r>
+            <a:r>
+              <a:rPr lang="en-US" altLang="ko-KR" baseline="0" dirty="0" smtClean="0"/>
+              <a:t> </a:t>
+            </a:r>
+            <a:r>
+              <a:rPr lang="ko-KR" altLang="en-US" baseline="0" dirty="0" smtClean="0"/>
+              <a:t>를 상속 받아야함</a:t>
+            </a:r>
+            <a:r>
+              <a:rPr lang="en-US" altLang="ko-KR" baseline="0" dirty="0" smtClean="0"/>
+              <a:t>.</a:t>
+            </a:r>
+          </a:p>
+          <a:p>
+            <a:r>
+              <a:rPr lang="ko-KR" altLang="en-US" baseline="0" dirty="0" smtClean="0"/>
+              <a:t>다양한 생명주기 메서드 제공</a:t>
+            </a:r>
+            <a:endParaRPr lang="en-US" altLang="ko-KR" baseline="0" dirty="0" smtClean="0"/>
+          </a:p>
+          <a:p>
+            <a:endParaRPr lang="en-US" altLang="ko-KR" baseline="0" dirty="0" smtClean="0"/>
+          </a:p>
+          <a:p>
+            <a:r>
+              <a:rPr lang="en-US" altLang="ko-KR" baseline="0" dirty="0" smtClean="0"/>
+              <a:t>** </a:t>
+            </a:r>
+            <a:r>
+              <a:rPr lang="ko-KR" altLang="en-US" baseline="0" dirty="0" smtClean="0"/>
+              <a:t>함수형 컴포넌트</a:t>
+            </a:r>
+            <a:endParaRPr lang="en-US" altLang="ko-KR" baseline="0" dirty="0" smtClean="0"/>
+          </a:p>
+          <a:p>
+            <a:r>
+              <a:rPr lang="ko-KR" altLang="en-US" baseline="0" dirty="0" smtClean="0"/>
+              <a:t>단순히 </a:t>
+            </a:r>
+            <a:r>
+              <a:rPr lang="en-US" altLang="ko-KR" baseline="0" dirty="0" smtClean="0"/>
+              <a:t>JS </a:t>
+            </a:r>
+            <a:r>
+              <a:rPr lang="ko-KR" altLang="en-US" baseline="0" dirty="0" smtClean="0"/>
+              <a:t>함수로 정의</a:t>
+            </a:r>
+            <a:r>
+              <a:rPr lang="en-US" altLang="ko-KR" baseline="0" dirty="0" smtClean="0"/>
+              <a:t>.</a:t>
+            </a:r>
           </a:p>
         </p:txBody>
       </p:sp>
@@ -2245,6 +2645,63 @@
           <a:bodyPr/>
           <a:lstStyle/>
           <a:p>
+            <a:r>
+              <a:rPr lang="en-US" altLang="ko-KR" baseline="0" dirty="0" smtClean="0"/>
+              <a:t>React 16.8 </a:t>
+            </a:r>
+            <a:r>
+              <a:rPr lang="ko-KR" altLang="en-US" baseline="0" dirty="0" smtClean="0"/>
+              <a:t>이후로 훅 을 통해 상태와 생명주기 기능 사용 가능</a:t>
+            </a:r>
+            <a:r>
+              <a:rPr lang="en-US" altLang="ko-KR" baseline="0" dirty="0" smtClean="0"/>
+              <a:t>.</a:t>
+            </a:r>
+          </a:p>
+          <a:p>
+            <a:endParaRPr lang="en-US" altLang="ko-KR" baseline="0" dirty="0" smtClean="0"/>
+          </a:p>
+          <a:p>
+            <a:r>
+              <a:rPr lang="en-US" altLang="ko-KR" baseline="0" dirty="0" smtClean="0"/>
+              <a:t>React </a:t>
+            </a:r>
+            <a:r>
+              <a:rPr lang="ko-KR" altLang="en-US" baseline="0" dirty="0" smtClean="0"/>
+              <a:t>커뮤니티에서는 함수형 컴포넌트와 훅 사용을 더 권장</a:t>
+            </a:r>
+            <a:r>
+              <a:rPr lang="en-US" altLang="ko-KR" baseline="0" dirty="0" smtClean="0"/>
+              <a:t>.</a:t>
+            </a:r>
+          </a:p>
+          <a:p>
+            <a:r>
+              <a:rPr lang="ko-KR" altLang="en-US" baseline="0" dirty="0" smtClean="0"/>
+              <a:t>코드의 간결성</a:t>
+            </a:r>
+            <a:r>
+              <a:rPr lang="en-US" altLang="ko-KR" baseline="0" dirty="0" smtClean="0"/>
+              <a:t>, </a:t>
+            </a:r>
+            <a:r>
+              <a:rPr lang="ko-KR" altLang="en-US" baseline="0" dirty="0" err="1" smtClean="0"/>
+              <a:t>가독성</a:t>
+            </a:r>
+            <a:r>
+              <a:rPr lang="en-US" altLang="ko-KR" baseline="0" dirty="0" smtClean="0"/>
+              <a:t>, </a:t>
+            </a:r>
+            <a:r>
+              <a:rPr lang="ko-KR" altLang="en-US" baseline="0" dirty="0" smtClean="0"/>
+              <a:t>그리고 미래 방향성 때문</a:t>
+            </a:r>
+            <a:r>
+              <a:rPr lang="en-US" altLang="ko-KR" baseline="0" dirty="0" smtClean="0"/>
+              <a:t>.</a:t>
+            </a:r>
+          </a:p>
+          <a:p>
             <a:endParaRPr lang="ko-KR" altLang="en-US" dirty="0"/>
           </a:p>
         </p:txBody>
@@ -2571,6 +3028,220 @@
           <a:bodyPr/>
           <a:lstStyle/>
           <a:p>
+            <a:r>
+              <a:rPr lang="en-US" altLang="ko-KR" dirty="0" smtClean="0"/>
+              <a:t>Html</a:t>
+            </a:r>
+            <a:r>
+              <a:rPr lang="ko-KR" altLang="en-US" dirty="0" smtClean="0"/>
+              <a:t>과 유사한 구문 사용</a:t>
+            </a:r>
+            <a:r>
+              <a:rPr lang="en-US" altLang="ko-KR" dirty="0" smtClean="0"/>
+              <a:t>.</a:t>
+            </a:r>
+          </a:p>
+          <a:p>
+            <a:r>
+              <a:rPr lang="en-US" altLang="ko-KR" dirty="0" smtClean="0"/>
+              <a:t>JS </a:t>
+            </a:r>
+            <a:r>
+              <a:rPr lang="ko-KR" altLang="en-US" dirty="0" smtClean="0"/>
+              <a:t>코드 내에서 </a:t>
+            </a:r>
+            <a:r>
+              <a:rPr lang="en-US" altLang="ko-KR" dirty="0" smtClean="0"/>
+              <a:t>UI </a:t>
+            </a:r>
+            <a:r>
+              <a:rPr lang="ko-KR" altLang="en-US" dirty="0" smtClean="0"/>
+              <a:t>구조를 정의 할 수 있게 해줌</a:t>
+            </a:r>
+            <a:r>
+              <a:rPr lang="en-US" altLang="ko-KR" dirty="0" smtClean="0"/>
+              <a:t>.</a:t>
+            </a:r>
+          </a:p>
+          <a:p>
+            <a:endParaRPr lang="en-US" altLang="ko-KR" dirty="0" smtClean="0"/>
+          </a:p>
+          <a:p>
+            <a:r>
+              <a:rPr lang="en-US" altLang="ko-KR" dirty="0" smtClean="0"/>
+              <a:t>**</a:t>
+            </a:r>
+            <a:r>
+              <a:rPr lang="en-US" altLang="ko-KR" baseline="0" dirty="0" smtClean="0"/>
+              <a:t> </a:t>
+            </a:r>
+            <a:r>
+              <a:rPr lang="ko-KR" altLang="en-US" baseline="0" dirty="0" smtClean="0"/>
+              <a:t>브라우저는 </a:t>
+            </a:r>
+            <a:r>
+              <a:rPr lang="en-US" altLang="ko-KR" baseline="0" dirty="0" smtClean="0"/>
+              <a:t>JSX</a:t>
+            </a:r>
+            <a:r>
+              <a:rPr lang="ko-KR" altLang="en-US" baseline="0" dirty="0" smtClean="0"/>
+              <a:t>를 직접 이해 못함</a:t>
+            </a:r>
+            <a:r>
+              <a:rPr lang="en-US" altLang="ko-KR" baseline="0" dirty="0" smtClean="0"/>
+              <a:t>.</a:t>
+            </a:r>
+          </a:p>
+          <a:p>
+            <a:r>
+              <a:rPr lang="ko-KR" altLang="en-US" dirty="0" smtClean="0"/>
+              <a:t>따라서 </a:t>
+            </a:r>
+            <a:r>
+              <a:rPr lang="en-US" altLang="ko-KR" dirty="0" smtClean="0"/>
+              <a:t>Babel</a:t>
+            </a:r>
+            <a:r>
+              <a:rPr lang="ko-KR" altLang="en-US" dirty="0" smtClean="0"/>
+              <a:t>과 같은 트랜스파일러를 사용하여 </a:t>
+            </a:r>
+            <a:r>
+              <a:rPr lang="en-US" altLang="ko-KR" dirty="0" smtClean="0"/>
+              <a:t>JSX</a:t>
+            </a:r>
+            <a:r>
+              <a:rPr lang="ko-KR" altLang="en-US" dirty="0" smtClean="0"/>
+              <a:t>를 일반 </a:t>
+            </a:r>
+            <a:r>
+              <a:rPr lang="en-US" altLang="ko-KR" dirty="0" smtClean="0"/>
+              <a:t>JS</a:t>
+            </a:r>
+            <a:r>
+              <a:rPr lang="ko-KR" altLang="en-US" dirty="0" smtClean="0"/>
+              <a:t>로 변환해야 함</a:t>
+            </a:r>
+            <a:r>
+              <a:rPr lang="en-US" altLang="ko-KR" dirty="0" smtClean="0"/>
+              <a:t>.</a:t>
+            </a:r>
+          </a:p>
+          <a:p>
+            <a:r>
+              <a:rPr lang="ko-KR" altLang="en-US" dirty="0" smtClean="0"/>
+              <a:t>바벨은 </a:t>
+            </a:r>
+            <a:r>
+              <a:rPr lang="en-US" altLang="ko-KR" dirty="0" smtClean="0"/>
+              <a:t>JSX </a:t>
+            </a:r>
+            <a:r>
+              <a:rPr lang="ko-KR" altLang="en-US" dirty="0" smtClean="0"/>
+              <a:t>코드를 </a:t>
+            </a:r>
+            <a:r>
+              <a:rPr lang="en-US" altLang="ko-KR" dirty="0" err="1" smtClean="0"/>
+              <a:t>React.createElement</a:t>
+            </a:r>
+            <a:r>
+              <a:rPr lang="en-US" altLang="ko-KR" dirty="0" smtClean="0"/>
+              <a:t> </a:t>
+            </a:r>
+            <a:r>
+              <a:rPr lang="ko-KR" altLang="en-US" dirty="0" smtClean="0"/>
+              <a:t>호출로 </a:t>
+            </a:r>
+            <a:r>
+              <a:rPr lang="ko-KR" altLang="en-US" dirty="0" err="1" smtClean="0"/>
+              <a:t>변환해줌</a:t>
+            </a:r>
+            <a:r>
+              <a:rPr lang="en-US" altLang="ko-KR" dirty="0" smtClean="0"/>
+              <a:t>.</a:t>
+            </a:r>
+          </a:p>
+          <a:p>
+            <a:endParaRPr lang="en-US" altLang="ko-KR" dirty="0" smtClean="0"/>
+          </a:p>
+          <a:p>
+            <a:r>
+              <a:rPr lang="en-US" altLang="ko-KR" dirty="0" err="1" smtClean="0"/>
+              <a:t>const</a:t>
+            </a:r>
+            <a:r>
+              <a:rPr lang="en-US" altLang="ko-KR" dirty="0" smtClean="0"/>
+              <a:t> element = &lt;h1 </a:t>
+            </a:r>
+            <a:r>
+              <a:rPr lang="en-US" altLang="ko-KR" dirty="0" err="1" smtClean="0"/>
+              <a:t>className</a:t>
+            </a:r>
+            <a:r>
+              <a:rPr lang="en-US" altLang="ko-KR" dirty="0" smtClean="0"/>
+              <a:t>=＂hello"&gt;Hello, world!&lt;/h1&gt;;</a:t>
+            </a:r>
+          </a:p>
+          <a:p>
+            <a:endParaRPr lang="en-US" altLang="ko-KR" dirty="0" smtClean="0"/>
+          </a:p>
+          <a:p>
+            <a:r>
+              <a:rPr lang="en-US" altLang="ko-KR" dirty="0" smtClean="0"/>
+              <a:t>=&gt;</a:t>
+            </a:r>
+          </a:p>
+          <a:p>
+            <a:endParaRPr lang="en-US" altLang="ko-KR" dirty="0" smtClean="0"/>
+          </a:p>
+          <a:p>
+            <a:r>
+              <a:rPr lang="en-US" altLang="ko-KR" dirty="0" err="1" smtClean="0"/>
+              <a:t>const</a:t>
+            </a:r>
+            <a:r>
+              <a:rPr lang="en-US" altLang="ko-KR" dirty="0" smtClean="0"/>
+              <a:t> element = </a:t>
+            </a:r>
+            <a:r>
+              <a:rPr lang="en-US" altLang="ko-KR" dirty="0" err="1" smtClean="0"/>
+              <a:t>React.createElement</a:t>
+            </a:r>
+            <a:r>
+              <a:rPr lang="en-US" altLang="ko-KR" dirty="0" smtClean="0"/>
+              <a:t>(</a:t>
+            </a:r>
+          </a:p>
+          <a:p>
+            <a:r>
+              <a:rPr lang="en-US" altLang="ko-KR" dirty="0" smtClean="0"/>
+              <a:t> 'h1', {</a:t>
+            </a:r>
+          </a:p>
+          <a:p>
+            <a:r>
+              <a:rPr lang="en-US" altLang="ko-KR" dirty="0" smtClean="0"/>
+              <a:t> </a:t>
+            </a:r>
+            <a:r>
+              <a:rPr lang="en-US" altLang="ko-KR" dirty="0" err="1" smtClean="0"/>
+              <a:t>className</a:t>
+            </a:r>
+            <a:r>
+              <a:rPr lang="en-US" altLang="ko-KR" dirty="0" smtClean="0"/>
+              <a:t>: hello' }, </a:t>
+            </a:r>
+          </a:p>
+          <a:p>
+            <a:r>
+              <a:rPr lang="en-US" altLang="ko-KR" dirty="0" smtClean="0"/>
+              <a:t>'Hello, world!' </a:t>
+            </a:r>
+          </a:p>
+          <a:p>
+            <a:r>
+              <a:rPr lang="en-US" altLang="ko-KR" dirty="0" smtClean="0"/>
+              <a:t>);</a:t>
+            </a:r>
             <a:endParaRPr lang="ko-KR" altLang="en-US" dirty="0"/>
           </a:p>
         </p:txBody>
@@ -2590,18 +3261,18 @@
           <a:bodyPr/>
           <a:lstStyle/>
           <a:p>
-            <a:fld id="{BF7660BF-9D8A-4D9B-A2EE-C667F9509E93}" type="slidenum">
+            <a:fld id="{C09E5BFC-1559-42F1-8940-AB342D56BF02}" type="slidenum">
               <a:rPr lang="ko-KR" altLang="en-US" smtClean="0"/>
-              <a:t>12</a:t>
+              <a:t>11</a:t>
             </a:fld>
-            <a:endParaRPr lang="ko-KR" altLang="en-US" dirty="0"/>
+            <a:endParaRPr lang="ko-KR" altLang="en-US"/>
           </a:p>
         </p:txBody>
       </p:sp>
     </p:spTree>
     <p:extLst>
       <p:ext uri="{BB962C8B-B14F-4D97-AF65-F5344CB8AC3E}">
-        <p14:creationId xmlns:p14="http://schemas.microsoft.com/office/powerpoint/2010/main" val="1945367991"/>
+        <p14:creationId xmlns:p14="http://schemas.microsoft.com/office/powerpoint/2010/main" val="4250507352"/>
       </p:ext>
     </p:extLst>
   </p:cSld>
@@ -2628,43 +3299,6 @@
           <a:chExt cx="0" cy="0"/>
         </a:xfrm>
       </p:grpSpPr>
-      <p:pic>
-        <p:nvPicPr>
-          <p:cNvPr id="7" name="그림 6" descr="폰트, 텍스트, 로고, 그래픽이(가) 표시된 사진&#10;&#10;자동 생성된 설명">
-            <a:extLst>
-              <a:ext uri="{FF2B5EF4-FFF2-40B4-BE49-F238E27FC236}">
-                <a16:creationId xmlns:a16="http://schemas.microsoft.com/office/drawing/2014/main" id="{01AB1409-DEDF-C824-D8D3-05B260A93BD6}"/>
-              </a:ext>
-            </a:extLst>
-          </p:cNvPr>
-          <p:cNvPicPr>
-            <a:picLocks noChangeAspect="1"/>
-          </p:cNvPicPr>
-          <p:nvPr userDrawn="1"/>
-        </p:nvPicPr>
-        <p:blipFill>
-          <a:blip r:embed="rId2">
-            <a:alphaModFix/>
-            <a:extLst>
-              <a:ext uri="{28A0092B-C50C-407E-A947-70E740481C1C}">
-                <a14:useLocalDpi xmlns:a14="http://schemas.microsoft.com/office/drawing/2010/main" val="0"/>
-              </a:ext>
-            </a:extLst>
-          </a:blip>
-          <a:stretch>
-            <a:fillRect/>
-          </a:stretch>
-        </p:blipFill>
-        <p:spPr>
-          <a:xfrm>
-            <a:off x="118533" y="103811"/>
-            <a:ext cx="4328535" cy="2280805"/>
-          </a:xfrm>
-          <a:prstGeom prst="rect">
-            <a:avLst/>
-          </a:prstGeom>
-        </p:spPr>
-      </p:pic>
       <p:sp>
         <p:nvSpPr>
           <p:cNvPr id="2" name="제목 1">
@@ -2802,7 +3436,7 @@
           <a:p>
             <a:fld id="{0E19CB95-6D28-40F1-9DA3-1BAC5D4B5B4F}" type="datetime6">
               <a:rPr lang="ko-KR" altLang="en-US" smtClean="0"/>
-              <a:t>2023년 9월</a:t>
+              <a:t>2024년 7월</a:t>
             </a:fld>
             <a:endParaRPr lang="ko-KR" altLang="en-US"/>
           </a:p>
@@ -2917,221 +3551,47 @@
           </a:p>
         </p:txBody>
       </p:sp>
-      <p:sp>
-        <p:nvSpPr>
-          <p:cNvPr id="15" name="부제목 2">
+      <p:pic>
+        <p:nvPicPr>
+          <p:cNvPr id="5" name="그림 4" descr="그래픽, 그래픽 디자인, 클립아트, 다채로움이(가) 표시된 사진&#10;&#10;자동 생성된 설명">
             <a:extLst>
               <a:ext uri="{FF2B5EF4-FFF2-40B4-BE49-F238E27FC236}">
-                <a16:creationId xmlns:a16="http://schemas.microsoft.com/office/drawing/2014/main" id="{26026682-DE15-5F01-6FA7-8F46F9ABCC2A}"/>
+                <a16:creationId xmlns:a16="http://schemas.microsoft.com/office/drawing/2014/main" id="{BE5A577B-81A7-2FA6-9E57-9DCEC5BF71F7}"/>
               </a:ext>
             </a:extLst>
           </p:cNvPr>
-          <p:cNvSpPr txBox="1">
-            <a:spLocks/>
-          </p:cNvSpPr>
+          <p:cNvPicPr>
+            <a:picLocks noChangeAspect="1"/>
+          </p:cNvPicPr>
           <p:nvPr userDrawn="1"/>
-        </p:nvSpPr>
+        </p:nvPicPr>
+        <p:blipFill>
+          <a:blip r:embed="rId2" cstate="hqprint">
+            <a:alphaModFix amt="20000"/>
+            <a:extLst>
+              <a:ext uri="{28A0092B-C50C-407E-A947-70E740481C1C}">
+                <a14:useLocalDpi xmlns:a14="http://schemas.microsoft.com/office/drawing/2010/main" val="0"/>
+              </a:ext>
+            </a:extLst>
+          </a:blip>
+          <a:stretch>
+            <a:fillRect/>
+          </a:stretch>
+        </p:blipFill>
         <p:spPr>
           <a:xfrm>
-            <a:off x="9110749" y="5933035"/>
-            <a:ext cx="2948515" cy="365125"/>
+            <a:off x="4296000" y="1461146"/>
+            <a:ext cx="3600000" cy="3652155"/>
           </a:xfrm>
           <a:prstGeom prst="rect">
             <a:avLst/>
           </a:prstGeom>
         </p:spPr>
-        <p:txBody>
-          <a:bodyPr vert="horz" lIns="91440" tIns="45720" rIns="91440" bIns="45720" rtlCol="0" anchor="ctr">
-            <a:noAutofit/>
-          </a:bodyPr>
-          <a:lstStyle>
-            <a:lvl1pPr marL="228600" indent="-228600" algn="l" defTabSz="914400" rtl="0" eaLnBrk="1" latinLnBrk="1" hangingPunct="1">
-              <a:lnSpc>
-                <a:spcPct val="90000"/>
-              </a:lnSpc>
-              <a:spcBef>
-                <a:spcPts val="1000"/>
-              </a:spcBef>
-              <a:buFont typeface="Arial" panose="020B0604020202020204" pitchFamily="34" charset="0"/>
-              <a:buChar char="•"/>
-              <a:defRPr sz="2800" kern="1200">
-                <a:solidFill>
-                  <a:schemeClr val="tx1"/>
-                </a:solidFill>
-                <a:latin typeface="+mn-lt"/>
-                <a:ea typeface="+mn-ea"/>
-                <a:cs typeface="+mn-cs"/>
-              </a:defRPr>
-            </a:lvl1pPr>
-            <a:lvl2pPr marL="685800" indent="-228600" algn="l" defTabSz="914400" rtl="0" eaLnBrk="1" latinLnBrk="1" hangingPunct="1">
-              <a:lnSpc>
-                <a:spcPct val="90000"/>
-              </a:lnSpc>
-              <a:spcBef>
-                <a:spcPts val="500"/>
-              </a:spcBef>
-              <a:buFont typeface="Arial" panose="020B0604020202020204" pitchFamily="34" charset="0"/>
-              <a:buChar char="•"/>
-              <a:defRPr sz="2400" kern="1200">
-                <a:solidFill>
-                  <a:schemeClr val="tx1"/>
-                </a:solidFill>
-                <a:latin typeface="+mn-lt"/>
-                <a:ea typeface="+mn-ea"/>
-                <a:cs typeface="+mn-cs"/>
-              </a:defRPr>
-            </a:lvl2pPr>
-            <a:lvl3pPr marL="1143000" indent="-228600" algn="l" defTabSz="914400" rtl="0" eaLnBrk="1" latinLnBrk="1" hangingPunct="1">
-              <a:lnSpc>
-                <a:spcPct val="90000"/>
-              </a:lnSpc>
-              <a:spcBef>
-                <a:spcPts val="500"/>
-              </a:spcBef>
-              <a:buFont typeface="Arial" panose="020B0604020202020204" pitchFamily="34" charset="0"/>
-              <a:buChar char="•"/>
-              <a:defRPr sz="2000" kern="1200">
-                <a:solidFill>
-                  <a:schemeClr val="tx1"/>
-                </a:solidFill>
-                <a:latin typeface="+mn-lt"/>
-                <a:ea typeface="+mn-ea"/>
-                <a:cs typeface="+mn-cs"/>
-              </a:defRPr>
-            </a:lvl3pPr>
-            <a:lvl4pPr marL="1600200" indent="-228600" algn="l" defTabSz="914400" rtl="0" eaLnBrk="1" latinLnBrk="1" hangingPunct="1">
-              <a:lnSpc>
-                <a:spcPct val="90000"/>
-              </a:lnSpc>
-              <a:spcBef>
-                <a:spcPts val="500"/>
-              </a:spcBef>
-              <a:buFont typeface="Arial" panose="020B0604020202020204" pitchFamily="34" charset="0"/>
-              <a:buChar char="•"/>
-              <a:defRPr sz="1800" kern="1200">
-                <a:solidFill>
-                  <a:schemeClr val="tx1"/>
-                </a:solidFill>
-                <a:latin typeface="+mn-lt"/>
-                <a:ea typeface="+mn-ea"/>
-                <a:cs typeface="+mn-cs"/>
-              </a:defRPr>
-            </a:lvl4pPr>
-            <a:lvl5pPr marL="2057400" indent="-228600" algn="l" defTabSz="914400" rtl="0" eaLnBrk="1" latinLnBrk="1" hangingPunct="1">
-              <a:lnSpc>
-                <a:spcPct val="90000"/>
-              </a:lnSpc>
-              <a:spcBef>
-                <a:spcPts val="500"/>
-              </a:spcBef>
-              <a:buFont typeface="Arial" panose="020B0604020202020204" pitchFamily="34" charset="0"/>
-              <a:buChar char="•"/>
-              <a:defRPr sz="1800" kern="1200">
-                <a:solidFill>
-                  <a:schemeClr val="tx1"/>
-                </a:solidFill>
-                <a:latin typeface="+mn-lt"/>
-                <a:ea typeface="+mn-ea"/>
-                <a:cs typeface="+mn-cs"/>
-              </a:defRPr>
-            </a:lvl5pPr>
-            <a:lvl6pPr marL="2514600" indent="-228600" algn="l" defTabSz="914400" rtl="0" eaLnBrk="1" latinLnBrk="1" hangingPunct="1">
-              <a:lnSpc>
-                <a:spcPct val="90000"/>
-              </a:lnSpc>
-              <a:spcBef>
-                <a:spcPts val="500"/>
-              </a:spcBef>
-              <a:buFont typeface="Arial" panose="020B0604020202020204" pitchFamily="34" charset="0"/>
-              <a:buChar char="•"/>
-              <a:defRPr sz="1800" kern="1200">
-                <a:solidFill>
-                  <a:schemeClr val="tx1"/>
-                </a:solidFill>
-                <a:latin typeface="+mn-lt"/>
-                <a:ea typeface="+mn-ea"/>
-                <a:cs typeface="+mn-cs"/>
-              </a:defRPr>
-            </a:lvl6pPr>
-            <a:lvl7pPr marL="2971800" indent="-228600" algn="l" defTabSz="914400" rtl="0" eaLnBrk="1" latinLnBrk="1" hangingPunct="1">
-              <a:lnSpc>
-                <a:spcPct val="90000"/>
-              </a:lnSpc>
-              <a:spcBef>
-                <a:spcPts val="500"/>
-              </a:spcBef>
-              <a:buFont typeface="Arial" panose="020B0604020202020204" pitchFamily="34" charset="0"/>
-              <a:buChar char="•"/>
-              <a:defRPr sz="1800" kern="1200">
-                <a:solidFill>
-                  <a:schemeClr val="tx1"/>
-                </a:solidFill>
-                <a:latin typeface="+mn-lt"/>
-                <a:ea typeface="+mn-ea"/>
-                <a:cs typeface="+mn-cs"/>
-              </a:defRPr>
-            </a:lvl7pPr>
-            <a:lvl8pPr marL="3429000" indent="-228600" algn="l" defTabSz="914400" rtl="0" eaLnBrk="1" latinLnBrk="1" hangingPunct="1">
-              <a:lnSpc>
-                <a:spcPct val="90000"/>
-              </a:lnSpc>
-              <a:spcBef>
-                <a:spcPts val="500"/>
-              </a:spcBef>
-              <a:buFont typeface="Arial" panose="020B0604020202020204" pitchFamily="34" charset="0"/>
-              <a:buChar char="•"/>
-              <a:defRPr sz="1800" kern="1200">
-                <a:solidFill>
-                  <a:schemeClr val="tx1"/>
-                </a:solidFill>
-                <a:latin typeface="+mn-lt"/>
-                <a:ea typeface="+mn-ea"/>
-                <a:cs typeface="+mn-cs"/>
-              </a:defRPr>
-            </a:lvl8pPr>
-            <a:lvl9pPr marL="3886200" indent="-228600" algn="l" defTabSz="914400" rtl="0" eaLnBrk="1" latinLnBrk="1" hangingPunct="1">
-              <a:lnSpc>
-                <a:spcPct val="90000"/>
-              </a:lnSpc>
-              <a:spcBef>
-                <a:spcPts val="500"/>
-              </a:spcBef>
-              <a:buFont typeface="Arial" panose="020B0604020202020204" pitchFamily="34" charset="0"/>
-              <a:buChar char="•"/>
-              <a:defRPr sz="1800" kern="1200">
-                <a:solidFill>
-                  <a:schemeClr val="tx1"/>
-                </a:solidFill>
-                <a:latin typeface="+mn-lt"/>
-                <a:ea typeface="+mn-ea"/>
-                <a:cs typeface="+mn-cs"/>
-              </a:defRPr>
-            </a:lvl9pPr>
-          </a:lstStyle>
-          <a:p>
-            <a:pPr marL="0" indent="0" algn="r">
-              <a:buNone/>
-            </a:pPr>
-            <a:r>
-              <a:rPr lang="en-US" altLang="ko-KR" sz="2000" u="none" dirty="0"/>
-              <a:t>With. </a:t>
-            </a:r>
-            <a:r>
-              <a:rPr lang="ko-KR" altLang="en-US" sz="2000" u="none" dirty="0"/>
-              <a:t>팀 </a:t>
-            </a:r>
-            <a:r>
-              <a:rPr lang="ko-KR" altLang="en-US" sz="2000" u="none" dirty="0" err="1"/>
-              <a:t>뤼쳐드</a:t>
-            </a:r>
-            <a:endParaRPr lang="ko-KR" altLang="en-US" sz="2000" u="none" dirty="0"/>
-          </a:p>
-        </p:txBody>
-      </p:sp>
+      </p:pic>
     </p:spTree>
     <p:extLst>
       <p:ext uri="{BB962C8B-B14F-4D97-AF65-F5344CB8AC3E}">
-        <p14:creationId xmlns:p14="http://schemas.microsoft.com/office/powerpoint/2010/main" val="2104502687"/>
+        <p14:creationId xmlns:p14="http://schemas.microsoft.com/office/powerpoint/2010/main" val="794800688"/>
       </p:ext>
     </p:extLst>
   </p:cSld>
@@ -3184,12 +3644,12 @@
           <a:bodyPr anchor="b"/>
           <a:lstStyle>
             <a:lvl1pPr>
-              <a:defRPr sz="3200"/>
+              <a:defRPr sz="3200" b="1"/>
             </a:lvl1pPr>
           </a:lstStyle>
           <a:p>
             <a:r>
-              <a:rPr lang="ko-KR" altLang="en-US"/>
+              <a:rPr lang="ko-KR" altLang="en-US" dirty="0"/>
               <a:t>마스터 제목 스타일 편집</a:t>
             </a:r>
           </a:p>
@@ -3356,7 +3816,7 @@
           <a:p>
             <a:fld id="{C4A39A32-5728-48B8-9F9C-437D214CCAF1}" type="datetime6">
               <a:rPr lang="ko-KR" altLang="en-US" smtClean="0"/>
-              <a:t>2023년 9월</a:t>
+              <a:t>2024년 7월</a:t>
             </a:fld>
             <a:endParaRPr lang="ko-KR" altLang="en-US"/>
           </a:p>
@@ -3419,7 +3879,7 @@
     </p:spTree>
     <p:extLst>
       <p:ext uri="{BB962C8B-B14F-4D97-AF65-F5344CB8AC3E}">
-        <p14:creationId xmlns:p14="http://schemas.microsoft.com/office/powerpoint/2010/main" val="3456815718"/>
+        <p14:creationId xmlns:p14="http://schemas.microsoft.com/office/powerpoint/2010/main" val="3187771095"/>
       </p:ext>
     </p:extLst>
   </p:cSld>
@@ -3465,10 +3925,14 @@
         <p:spPr/>
         <p:txBody>
           <a:bodyPr/>
-          <a:lstStyle/>
-          <a:p>
-            <a:r>
-              <a:rPr lang="ko-KR" altLang="en-US"/>
+          <a:lstStyle>
+            <a:lvl1pPr>
+              <a:defRPr b="1"/>
+            </a:lvl1pPr>
+          </a:lstStyle>
+          <a:p>
+            <a:r>
+              <a:rPr lang="ko-KR" altLang="en-US" dirty="0"/>
               <a:t>마스터 제목 스타일 편집</a:t>
             </a:r>
           </a:p>
@@ -3554,7 +4018,7 @@
           <a:p>
             <a:fld id="{3BECC8BA-EBCB-4BF9-8E87-970CE0138376}" type="datetime6">
               <a:rPr lang="ko-KR" altLang="en-US" smtClean="0"/>
-              <a:t>2023년 9월</a:t>
+              <a:t>2024년 7월</a:t>
             </a:fld>
             <a:endParaRPr lang="ko-KR" altLang="en-US"/>
           </a:p>
@@ -3617,7 +4081,7 @@
     </p:spTree>
     <p:extLst>
       <p:ext uri="{BB962C8B-B14F-4D97-AF65-F5344CB8AC3E}">
-        <p14:creationId xmlns:p14="http://schemas.microsoft.com/office/powerpoint/2010/main" val="3602548054"/>
+        <p14:creationId xmlns:p14="http://schemas.microsoft.com/office/powerpoint/2010/main" val="2492604871"/>
       </p:ext>
     </p:extLst>
   </p:cSld>
@@ -3762,7 +4226,7 @@
           <a:p>
             <a:fld id="{7869FA6E-4699-4AC6-B2CB-4E60A58ED7A8}" type="datetime6">
               <a:rPr lang="ko-KR" altLang="en-US" smtClean="0"/>
-              <a:t>2023년 9월</a:t>
+              <a:t>2024년 7월</a:t>
             </a:fld>
             <a:endParaRPr lang="ko-KR" altLang="en-US"/>
           </a:p>
@@ -3825,7 +4289,7 @@
     </p:spTree>
     <p:extLst>
       <p:ext uri="{BB962C8B-B14F-4D97-AF65-F5344CB8AC3E}">
-        <p14:creationId xmlns:p14="http://schemas.microsoft.com/office/powerpoint/2010/main" val="2313786568"/>
+        <p14:creationId xmlns:p14="http://schemas.microsoft.com/office/powerpoint/2010/main" val="3614034504"/>
       </p:ext>
     </p:extLst>
   </p:cSld>
@@ -3875,7 +4339,7 @@
           <a:p>
             <a:fld id="{0E19CB95-6D28-40F1-9DA3-1BAC5D4B5B4F}" type="datetime6">
               <a:rPr lang="ko-KR" altLang="en-US" smtClean="0"/>
-              <a:t>2023년 9월</a:t>
+              <a:t>2024년 7월</a:t>
             </a:fld>
             <a:endParaRPr lang="ko-KR" altLang="en-US"/>
           </a:p>
@@ -4012,7 +4476,7 @@
           </a:bodyPr>
           <a:lstStyle>
             <a:lvl1pPr algn="ctr">
-              <a:defRPr sz="8000" b="0">
+              <a:defRPr sz="8000" b="1">
                 <a:solidFill>
                   <a:srgbClr val="6EC173"/>
                 </a:solidFill>
@@ -4030,7 +4494,7 @@
     </p:spTree>
     <p:extLst>
       <p:ext uri="{BB962C8B-B14F-4D97-AF65-F5344CB8AC3E}">
-        <p14:creationId xmlns:p14="http://schemas.microsoft.com/office/powerpoint/2010/main" val="2608942727"/>
+        <p14:creationId xmlns:p14="http://schemas.microsoft.com/office/powerpoint/2010/main" val="3433392274"/>
       </p:ext>
     </p:extLst>
   </p:cSld>
@@ -4137,7 +4601,7 @@
           <a:p>
             <a:fld id="{3C9CE3CE-253F-4F9D-BA15-C226C8D8501E}" type="datetime6">
               <a:rPr lang="ko-KR" altLang="en-US" smtClean="0"/>
-              <a:t>2023년 9월</a:t>
+              <a:t>2024년 7월</a:t>
             </a:fld>
             <a:endParaRPr lang="ko-KR" altLang="en-US"/>
           </a:p>
@@ -4226,7 +4690,11 @@
           <a:bodyPr vert="horz" lIns="91440" tIns="45720" rIns="91440" bIns="45720" rtlCol="0" anchor="ctr">
             <a:normAutofit/>
           </a:bodyPr>
-          <a:lstStyle/>
+          <a:lstStyle>
+            <a:lvl1pPr>
+              <a:defRPr b="1"/>
+            </a:lvl1pPr>
+          </a:lstStyle>
           <a:p>
             <a:r>
               <a:rPr lang="ko-KR" altLang="en-US" dirty="0"/>
@@ -4238,7 +4706,7 @@
     </p:spTree>
     <p:extLst>
       <p:ext uri="{BB962C8B-B14F-4D97-AF65-F5344CB8AC3E}">
-        <p14:creationId xmlns:p14="http://schemas.microsoft.com/office/powerpoint/2010/main" val="2493143943"/>
+        <p14:creationId xmlns:p14="http://schemas.microsoft.com/office/powerpoint/2010/main" val="1402054750"/>
       </p:ext>
     </p:extLst>
   </p:cSld>
@@ -4450,7 +4918,7 @@
           <a:p>
             <a:fld id="{BE5A7087-D460-46DD-B430-F8D9B9677D08}" type="datetime6">
               <a:rPr lang="ko-KR" altLang="en-US" smtClean="0"/>
-              <a:t>2023년 9월</a:t>
+              <a:t>2024년 7월</a:t>
             </a:fld>
             <a:endParaRPr lang="ko-KR" altLang="en-US"/>
           </a:p>
@@ -4513,7 +4981,7 @@
     </p:spTree>
     <p:extLst>
       <p:ext uri="{BB962C8B-B14F-4D97-AF65-F5344CB8AC3E}">
-        <p14:creationId xmlns:p14="http://schemas.microsoft.com/office/powerpoint/2010/main" val="1559029814"/>
+        <p14:creationId xmlns:p14="http://schemas.microsoft.com/office/powerpoint/2010/main" val="3637238796"/>
       </p:ext>
     </p:extLst>
   </p:cSld>
@@ -4559,10 +5027,14 @@
         <p:spPr/>
         <p:txBody>
           <a:bodyPr/>
-          <a:lstStyle/>
-          <a:p>
-            <a:r>
-              <a:rPr lang="ko-KR" altLang="en-US"/>
+          <a:lstStyle>
+            <a:lvl1pPr>
+              <a:defRPr b="1"/>
+            </a:lvl1pPr>
+          </a:lstStyle>
+          <a:p>
+            <a:r>
+              <a:rPr lang="ko-KR" altLang="en-US" dirty="0"/>
               <a:t>마스터 제목 스타일 편집</a:t>
             </a:r>
           </a:p>
@@ -4715,7 +5187,7 @@
           <a:p>
             <a:fld id="{0581BA25-D675-4234-A003-8449BDEEF18E}" type="datetime6">
               <a:rPr lang="ko-KR" altLang="en-US" smtClean="0"/>
-              <a:t>2023년 9월</a:t>
+              <a:t>2024년 7월</a:t>
             </a:fld>
             <a:endParaRPr lang="ko-KR" altLang="en-US"/>
           </a:p>
@@ -4778,7 +5250,7 @@
     </p:spTree>
     <p:extLst>
       <p:ext uri="{BB962C8B-B14F-4D97-AF65-F5344CB8AC3E}">
-        <p14:creationId xmlns:p14="http://schemas.microsoft.com/office/powerpoint/2010/main" val="947449693"/>
+        <p14:creationId xmlns:p14="http://schemas.microsoft.com/office/powerpoint/2010/main" val="456160068"/>
       </p:ext>
     </p:extLst>
   </p:cSld>
@@ -4829,10 +5301,14 @@
         </p:spPr>
         <p:txBody>
           <a:bodyPr/>
-          <a:lstStyle/>
-          <a:p>
-            <a:r>
-              <a:rPr lang="ko-KR" altLang="en-US"/>
+          <a:lstStyle>
+            <a:lvl1pPr>
+              <a:defRPr b="1"/>
+            </a:lvl1pPr>
+          </a:lstStyle>
+          <a:p>
+            <a:r>
+              <a:rPr lang="ko-KR" altLang="en-US" dirty="0"/>
               <a:t>마스터 제목 스타일 편집</a:t>
             </a:r>
           </a:p>
@@ -5127,7 +5603,7 @@
           <a:p>
             <a:fld id="{26155C29-A87F-46F0-A24C-6C9F0A4BF6AA}" type="datetime6">
               <a:rPr lang="ko-KR" altLang="en-US" smtClean="0"/>
-              <a:t>2023년 9월</a:t>
+              <a:t>2024년 7월</a:t>
             </a:fld>
             <a:endParaRPr lang="ko-KR" altLang="en-US"/>
           </a:p>
@@ -5190,7 +5666,7 @@
     </p:spTree>
     <p:extLst>
       <p:ext uri="{BB962C8B-B14F-4D97-AF65-F5344CB8AC3E}">
-        <p14:creationId xmlns:p14="http://schemas.microsoft.com/office/powerpoint/2010/main" val="2333661961"/>
+        <p14:creationId xmlns:p14="http://schemas.microsoft.com/office/powerpoint/2010/main" val="2251036717"/>
       </p:ext>
     </p:extLst>
   </p:cSld>
@@ -5236,10 +5712,14 @@
         <p:spPr/>
         <p:txBody>
           <a:bodyPr/>
-          <a:lstStyle/>
-          <a:p>
-            <a:r>
-              <a:rPr lang="ko-KR" altLang="en-US"/>
+          <a:lstStyle>
+            <a:lvl1pPr>
+              <a:defRPr b="1"/>
+            </a:lvl1pPr>
+          </a:lstStyle>
+          <a:p>
+            <a:r>
+              <a:rPr lang="ko-KR" altLang="en-US" dirty="0"/>
               <a:t>마스터 제목 스타일 편집</a:t>
             </a:r>
           </a:p>
@@ -5268,7 +5748,7 @@
           <a:p>
             <a:fld id="{DD2EDD62-8757-43DB-BAE0-460422B548EA}" type="datetime6">
               <a:rPr lang="ko-KR" altLang="en-US" smtClean="0"/>
-              <a:t>2023년 9월</a:t>
+              <a:t>2024년 7월</a:t>
             </a:fld>
             <a:endParaRPr lang="ko-KR" altLang="en-US"/>
           </a:p>
@@ -5331,7 +5811,7 @@
     </p:spTree>
     <p:extLst>
       <p:ext uri="{BB962C8B-B14F-4D97-AF65-F5344CB8AC3E}">
-        <p14:creationId xmlns:p14="http://schemas.microsoft.com/office/powerpoint/2010/main" val="1324141276"/>
+        <p14:creationId xmlns:p14="http://schemas.microsoft.com/office/powerpoint/2010/main" val="2484281962"/>
       </p:ext>
     </p:extLst>
   </p:cSld>
@@ -5381,7 +5861,7 @@
           <a:p>
             <a:fld id="{DC6A871B-4800-495F-AC75-93D44C7DEBA5}" type="datetime6">
               <a:rPr lang="ko-KR" altLang="en-US" smtClean="0"/>
-              <a:t>2023년 9월</a:t>
+              <a:t>2024년 7월</a:t>
             </a:fld>
             <a:endParaRPr lang="ko-KR" altLang="en-US"/>
           </a:p>
@@ -5444,7 +5924,7 @@
     </p:spTree>
     <p:extLst>
       <p:ext uri="{BB962C8B-B14F-4D97-AF65-F5344CB8AC3E}">
-        <p14:creationId xmlns:p14="http://schemas.microsoft.com/office/powerpoint/2010/main" val="1014306624"/>
+        <p14:creationId xmlns:p14="http://schemas.microsoft.com/office/powerpoint/2010/main" val="907962968"/>
       </p:ext>
     </p:extLst>
   </p:cSld>
@@ -5497,12 +5977,12 @@
           <a:bodyPr anchor="b"/>
           <a:lstStyle>
             <a:lvl1pPr>
-              <a:defRPr sz="3200"/>
+              <a:defRPr sz="3200" b="1"/>
             </a:lvl1pPr>
           </a:lstStyle>
           <a:p>
             <a:r>
-              <a:rPr lang="ko-KR" altLang="en-US"/>
+              <a:rPr lang="ko-KR" altLang="en-US" dirty="0"/>
               <a:t>마스터 제목 스타일 편집</a:t>
             </a:r>
           </a:p>
@@ -5692,7 +6172,7 @@
           <a:p>
             <a:fld id="{59605888-30A6-49BB-95E2-DEAE4E5B09E9}" type="datetime6">
               <a:rPr lang="ko-KR" altLang="en-US" smtClean="0"/>
-              <a:t>2023년 9월</a:t>
+              <a:t>2024년 7월</a:t>
             </a:fld>
             <a:endParaRPr lang="ko-KR" altLang="en-US"/>
           </a:p>
@@ -5755,7 +6235,7 @@
     </p:spTree>
     <p:extLst>
       <p:ext uri="{BB962C8B-B14F-4D97-AF65-F5344CB8AC3E}">
-        <p14:creationId xmlns:p14="http://schemas.microsoft.com/office/powerpoint/2010/main" val="2040181567"/>
+        <p14:creationId xmlns:p14="http://schemas.microsoft.com/office/powerpoint/2010/main" val="3772471995"/>
       </p:ext>
     </p:extLst>
   </p:cSld>
@@ -5858,35 +6338,35 @@
           <a:p>
             <a:pPr lvl="0"/>
             <a:r>
-              <a:rPr lang="ko-KR" altLang="en-US"/>
+              <a:rPr lang="ko-KR" altLang="en-US" dirty="0"/>
               <a:t>마스터 텍스트 스타일을 편집하려면 클릭</a:t>
             </a:r>
           </a:p>
           <a:p>
             <a:pPr lvl="1"/>
             <a:r>
-              <a:rPr lang="ko-KR" altLang="en-US"/>
+              <a:rPr lang="ko-KR" altLang="en-US" dirty="0"/>
               <a:t>두 번째 수준</a:t>
             </a:r>
           </a:p>
           <a:p>
             <a:pPr lvl="2"/>
             <a:r>
-              <a:rPr lang="ko-KR" altLang="en-US"/>
+              <a:rPr lang="ko-KR" altLang="en-US" dirty="0"/>
               <a:t>세 번째 수준</a:t>
             </a:r>
           </a:p>
           <a:p>
             <a:pPr lvl="3"/>
             <a:r>
-              <a:rPr lang="ko-KR" altLang="en-US"/>
+              <a:rPr lang="ko-KR" altLang="en-US" dirty="0"/>
               <a:t>네 번째 수준</a:t>
             </a:r>
           </a:p>
           <a:p>
             <a:pPr lvl="4"/>
             <a:r>
-              <a:rPr lang="ko-KR" altLang="en-US"/>
+              <a:rPr lang="ko-KR" altLang="en-US" dirty="0"/>
               <a:t>다섯 번째 수준</a:t>
             </a:r>
           </a:p>
@@ -5933,7 +6413,7 @@
           <a:p>
             <a:fld id="{8691C14A-5735-4A8B-B68B-DEC1DC2A3813}" type="datetime6">
               <a:rPr lang="ko-KR" altLang="en-US" smtClean="0"/>
-              <a:t>2023년 9월</a:t>
+              <a:t>2024년 7월</a:t>
             </a:fld>
             <a:endParaRPr lang="ko-KR" altLang="en-US"/>
           </a:p>
@@ -6085,10 +6565,10 @@
       </p:sp>
       <p:pic>
         <p:nvPicPr>
-          <p:cNvPr id="9" name="그림 8" descr="텍스트, 클립아트이(가) 표시된 사진&#10;&#10;자동 생성된 설명">
+          <p:cNvPr id="14" name="그림 13" descr="그래픽, 그래픽 디자인, 폰트, 원이(가) 표시된 사진&#10;&#10;자동 생성된 설명">
             <a:extLst>
               <a:ext uri="{FF2B5EF4-FFF2-40B4-BE49-F238E27FC236}">
-                <a16:creationId xmlns:a16="http://schemas.microsoft.com/office/drawing/2014/main" id="{CFFA81A6-6D9A-9C22-6A01-103FCC7108B8}"/>
+                <a16:creationId xmlns:a16="http://schemas.microsoft.com/office/drawing/2014/main" id="{0EB71D7B-83F1-1414-954A-8C79751B7793}"/>
               </a:ext>
             </a:extLst>
           </p:cNvPr>
@@ -6099,7 +6579,6 @@
         </p:nvPicPr>
         <p:blipFill>
           <a:blip r:embed="rId14" cstate="hqprint">
-            <a:alphaModFix/>
             <a:extLst>
               <a:ext uri="{28A0092B-C50C-407E-A947-70E740481C1C}">
                 <a14:useLocalDpi xmlns:a14="http://schemas.microsoft.com/office/drawing/2010/main" val="0"/>
@@ -6112,136 +6591,35 @@
         </p:blipFill>
         <p:spPr>
           <a:xfrm>
-            <a:off x="11044576" y="140110"/>
-            <a:ext cx="1026976" cy="205105"/>
+            <a:off x="10835681" y="96056"/>
+            <a:ext cx="1260000" cy="270857"/>
           </a:xfrm>
           <a:prstGeom prst="rect">
             <a:avLst/>
           </a:prstGeom>
         </p:spPr>
       </p:pic>
-      <p:sp>
-        <p:nvSpPr>
-          <p:cNvPr id="10" name="TextBox 9">
-            <a:extLst>
-              <a:ext uri="{FF2B5EF4-FFF2-40B4-BE49-F238E27FC236}">
-                <a16:creationId xmlns:a16="http://schemas.microsoft.com/office/drawing/2014/main" id="{2E8CEA0B-0194-B9A0-705F-CAB04B3523DA}"/>
-              </a:ext>
-            </a:extLst>
-          </p:cNvPr>
-          <p:cNvSpPr txBox="1"/>
-          <p:nvPr userDrawn="1"/>
-        </p:nvSpPr>
-        <p:spPr>
-          <a:xfrm>
-            <a:off x="10814758" y="104713"/>
-            <a:ext cx="227015" cy="307777"/>
-          </a:xfrm>
-          <a:prstGeom prst="rect">
-            <a:avLst/>
-          </a:prstGeom>
-          <a:noFill/>
-        </p:spPr>
-        <p:txBody>
-          <a:bodyPr wrap="square" rtlCol="0">
-            <a:spAutoFit/>
-          </a:bodyPr>
-          <a:lstStyle/>
-          <a:p>
-            <a:pPr algn="ctr"/>
-            <a:r>
-              <a:rPr lang="en-US" altLang="ko-KR" sz="1400" b="1" dirty="0">
-                <a:solidFill>
-                  <a:schemeClr val="tx1"/>
-                </a:solidFill>
-              </a:rPr>
-              <a:t>X</a:t>
-            </a:r>
-            <a:endParaRPr lang="ko-KR" altLang="en-US" sz="2000" b="1" dirty="0">
-              <a:solidFill>
-                <a:schemeClr val="tx1"/>
-              </a:solidFill>
-            </a:endParaRPr>
-          </a:p>
-        </p:txBody>
-      </p:sp>
-      <p:pic>
-        <p:nvPicPr>
-          <p:cNvPr id="11" name="Picture 4" descr="청년취업사관학교, 새싹(SeSAC) - YouTube">
-            <a:extLst>
-              <a:ext uri="{FF2B5EF4-FFF2-40B4-BE49-F238E27FC236}">
-                <a16:creationId xmlns:a16="http://schemas.microsoft.com/office/drawing/2014/main" id="{AD5D531A-42B5-6D12-7A47-FFEB75D29CB0}"/>
-              </a:ext>
-            </a:extLst>
-          </p:cNvPr>
-          <p:cNvPicPr>
-            <a:picLocks noChangeAspect="1" noChangeArrowheads="1"/>
-          </p:cNvPicPr>
-          <p:nvPr userDrawn="1"/>
-        </p:nvPicPr>
-        <p:blipFill>
-          <a:blip r:embed="rId15" cstate="hqprint">
-            <a:extLst>
-              <a:ext uri="{BEBA8EAE-BF5A-486C-A8C5-ECC9F3942E4B}">
-                <a14:imgProps xmlns:a14="http://schemas.microsoft.com/office/drawing/2010/main">
-                  <a14:imgLayer r:embed="rId16">
-                    <a14:imgEffect>
-                      <a14:backgroundRemoval t="10000" b="90000" l="10000" r="90000"/>
-                    </a14:imgEffect>
-                  </a14:imgLayer>
-                </a14:imgProps>
-              </a:ext>
-              <a:ext uri="{28A0092B-C50C-407E-A947-70E740481C1C}">
-                <a14:useLocalDpi xmlns:a14="http://schemas.microsoft.com/office/drawing/2010/main" val="0"/>
-              </a:ext>
-            </a:extLst>
-          </a:blip>
-          <a:srcRect/>
-          <a:stretch>
-            <a:fillRect/>
-          </a:stretch>
-        </p:blipFill>
-        <p:spPr bwMode="auto">
-          <a:xfrm>
-            <a:off x="10492653" y="54125"/>
-            <a:ext cx="371243" cy="371243"/>
-          </a:xfrm>
-          <a:prstGeom prst="rect">
-            <a:avLst/>
-          </a:prstGeom>
-          <a:noFill/>
-          <a:extLst>
-            <a:ext uri="{909E8E84-426E-40DD-AFC4-6F175D3DCCD1}">
-              <a14:hiddenFill xmlns:a14="http://schemas.microsoft.com/office/drawing/2010/main">
-                <a:solidFill>
-                  <a:srgbClr val="FFFFFF"/>
-                </a:solidFill>
-              </a14:hiddenFill>
-            </a:ext>
-          </a:extLst>
-        </p:spPr>
-      </p:pic>
     </p:spTree>
     <p:extLst>
       <p:ext uri="{BB962C8B-B14F-4D97-AF65-F5344CB8AC3E}">
-        <p14:creationId xmlns:p14="http://schemas.microsoft.com/office/powerpoint/2010/main" val="579173985"/>
+        <p14:creationId xmlns:p14="http://schemas.microsoft.com/office/powerpoint/2010/main" val="2088285390"/>
       </p:ext>
     </p:extLst>
   </p:cSld>
   <p:clrMap bg1="lt1" tx1="dk1" bg2="lt2" tx2="dk2" accent1="accent1" accent2="accent2" accent3="accent3" accent4="accent4" accent5="accent5" accent6="accent6" hlink="hlink" folHlink="folHlink"/>
   <p:sldLayoutIdLst>
-    <p:sldLayoutId id="2147483674" r:id="rId1"/>
-    <p:sldLayoutId id="2147483675" r:id="rId2"/>
-    <p:sldLayoutId id="2147483676" r:id="rId3"/>
-    <p:sldLayoutId id="2147483677" r:id="rId4"/>
-    <p:sldLayoutId id="2147483678" r:id="rId5"/>
-    <p:sldLayoutId id="2147483679" r:id="rId6"/>
-    <p:sldLayoutId id="2147483680" r:id="rId7"/>
-    <p:sldLayoutId id="2147483681" r:id="rId8"/>
-    <p:sldLayoutId id="2147483682" r:id="rId9"/>
-    <p:sldLayoutId id="2147483683" r:id="rId10"/>
-    <p:sldLayoutId id="2147483684" r:id="rId11"/>
-    <p:sldLayoutId id="2147483685" r:id="rId12"/>
+    <p:sldLayoutId id="2147483687" r:id="rId1"/>
+    <p:sldLayoutId id="2147483688" r:id="rId2"/>
+    <p:sldLayoutId id="2147483689" r:id="rId3"/>
+    <p:sldLayoutId id="2147483690" r:id="rId4"/>
+    <p:sldLayoutId id="2147483691" r:id="rId5"/>
+    <p:sldLayoutId id="2147483692" r:id="rId6"/>
+    <p:sldLayoutId id="2147483693" r:id="rId7"/>
+    <p:sldLayoutId id="2147483694" r:id="rId8"/>
+    <p:sldLayoutId id="2147483695" r:id="rId9"/>
+    <p:sldLayoutId id="2147483696" r:id="rId10"/>
+    <p:sldLayoutId id="2147483697" r:id="rId11"/>
+    <p:sldLayoutId id="2147483698" r:id="rId12"/>
   </p:sldLayoutIdLst>
   <p:hf hdr="0" ftr="0"/>
   <p:txStyles>
@@ -6254,7 +6632,7 @@
           <a:spcPct val="0"/>
         </a:spcBef>
         <a:buNone/>
-        <a:defRPr sz="4400" kern="1200">
+        <a:defRPr sz="4400" b="1" kern="1200">
           <a:solidFill>
             <a:schemeClr val="tx1"/>
           </a:solidFill>
@@ -6620,7 +6998,7 @@
           <a:p>
             <a:fld id="{4DA02FB7-A3D0-4BF4-B23F-90A4C3B73A56}" type="datetime6">
               <a:rPr lang="ko-KR" altLang="en-US" smtClean="0"/>
-              <a:t>2023년 9월</a:t>
+              <a:t>2024년 7월</a:t>
             </a:fld>
             <a:endParaRPr lang="ko-KR" altLang="en-US" dirty="0"/>
           </a:p>
@@ -6702,7 +7080,7 @@
           <a:p>
             <a:fld id="{0E19CB95-6D28-40F1-9DA3-1BAC5D4B5B4F}" type="datetime6">
               <a:rPr lang="ko-KR" altLang="en-US" smtClean="0"/>
-              <a:t>2023년 9월</a:t>
+              <a:t>2024년 7월</a:t>
             </a:fld>
             <a:endParaRPr lang="ko-KR" altLang="en-US"/>
           </a:p>
@@ -6800,7 +7178,12 @@
             <p:ph idx="1"/>
           </p:nvPr>
         </p:nvSpPr>
-        <p:spPr/>
+        <p:spPr>
+          <a:xfrm>
+            <a:off x="601531" y="1825625"/>
+            <a:ext cx="10515600" cy="4351338"/>
+          </a:xfrm>
+        </p:spPr>
         <p:txBody>
           <a:bodyPr/>
           <a:lstStyle/>
@@ -6898,7 +7281,7 @@
           <a:p>
             <a:fld id="{3C9CE3CE-253F-4F9D-BA15-C226C8D8501E}" type="datetime6">
               <a:rPr lang="ko-KR" altLang="en-US" smtClean="0"/>
-              <a:t>2023년 9월</a:t>
+              <a:t>2024년 7월</a:t>
             </a:fld>
             <a:endParaRPr lang="ko-KR" altLang="en-US"/>
           </a:p>
@@ -6977,7 +7360,7 @@
           <p:nvPr/>
         </p:nvPicPr>
         <p:blipFill>
-          <a:blip r:embed="rId2">
+          <a:blip r:embed="rId3">
             <a:extLst>
               <a:ext uri="{28A0092B-C50C-407E-A947-70E740481C1C}">
                 <a14:useLocalDpi xmlns:a14="http://schemas.microsoft.com/office/drawing/2010/main" val="0"/>
@@ -6991,7 +7374,7 @@
         </p:blipFill>
         <p:spPr bwMode="auto">
           <a:xfrm>
-            <a:off x="8209280" y="1825625"/>
+            <a:off x="8596556" y="1825625"/>
             <a:ext cx="3385819" cy="3385820"/>
           </a:xfrm>
           <a:prstGeom prst="rect">
@@ -7041,6 +7424,109 @@
       </p:grpSpPr>
       <p:sp>
         <p:nvSpPr>
+          <p:cNvPr id="3" name="내용 개체 틀 2"/>
+          <p:cNvSpPr>
+            <a:spLocks noGrp="1"/>
+          </p:cNvSpPr>
+          <p:nvPr>
+            <p:ph idx="1"/>
+          </p:nvPr>
+        </p:nvSpPr>
+        <p:spPr>
+          <a:xfrm>
+            <a:off x="816685" y="1464143"/>
+            <a:ext cx="10515600" cy="4351338"/>
+          </a:xfrm>
+        </p:spPr>
+        <p:txBody>
+          <a:bodyPr/>
+          <a:lstStyle/>
+          <a:p>
+            <a:pPr marL="0" indent="0">
+              <a:buNone/>
+            </a:pPr>
+            <a:r>
+              <a:rPr lang="en-US" altLang="ko-KR" sz="2600" dirty="0"/>
+              <a:t>html </a:t>
+            </a:r>
+            <a:r>
+              <a:rPr lang="ko-KR" altLang="en-US" sz="2600" dirty="0"/>
+              <a:t>태그는 항상 </a:t>
+            </a:r>
+            <a:r>
+              <a:rPr lang="en-US" altLang="ko-KR" sz="2600" dirty="0"/>
+              <a:t>return </a:t>
+            </a:r>
+            <a:r>
+              <a:rPr lang="ko-KR" altLang="en-US" sz="2600" dirty="0"/>
+              <a:t>이후에</a:t>
+            </a:r>
+            <a:r>
+              <a:rPr lang="en-US" altLang="ko-KR" sz="2600" dirty="0"/>
+              <a:t>, </a:t>
+            </a:r>
+            <a:r>
+              <a:rPr lang="ko-KR" altLang="en-US" sz="2600" dirty="0"/>
+              <a:t>반드시 하나의 부모 요소가 전체 요소를 감싸는 형태로</a:t>
+            </a:r>
+            <a:r>
+              <a:rPr lang="en-US" altLang="ko-KR" sz="2600" dirty="0"/>
+              <a:t>!</a:t>
+            </a:r>
+          </a:p>
+          <a:p>
+            <a:pPr marL="457200" lvl="1" indent="0">
+              <a:buNone/>
+            </a:pPr>
+            <a:r>
+              <a:rPr lang="en-US" altLang="ko-KR" sz="2000" dirty="0"/>
+              <a:t>+ </a:t>
+            </a:r>
+            <a:r>
+              <a:rPr lang="ko-KR" altLang="en-US" sz="2000" dirty="0"/>
+              <a:t>딱 하나의 태그만 </a:t>
+            </a:r>
+            <a:r>
+              <a:rPr lang="en-US" altLang="ko-KR" sz="2000" dirty="0"/>
+              <a:t>return</a:t>
+            </a:r>
+            <a:r>
+              <a:rPr lang="ko-KR" altLang="en-US" sz="2000" dirty="0"/>
+              <a:t>할 때는 </a:t>
+            </a:r>
+            <a:r>
+              <a:rPr lang="en-US" altLang="ko-KR" sz="2000" dirty="0"/>
+              <a:t>()</a:t>
+            </a:r>
+            <a:r>
+              <a:rPr lang="ko-KR" altLang="en-US" sz="2000" dirty="0"/>
+              <a:t>가 필요 없지만 여러 개의 태그가 있다면 </a:t>
+            </a:r>
+            <a:r>
+              <a:rPr lang="en-US" altLang="ko-KR" sz="2000" dirty="0"/>
+              <a:t>return (~) </a:t>
+            </a:r>
+            <a:r>
+              <a:rPr lang="ko-KR" altLang="en-US" sz="2000" dirty="0"/>
+              <a:t>괄호 내부에</a:t>
+            </a:r>
+            <a:r>
+              <a:rPr lang="en-US" altLang="ko-KR" sz="2000" dirty="0"/>
+              <a:t> </a:t>
+            </a:r>
+            <a:r>
+              <a:rPr lang="ko-KR" altLang="en-US" sz="2000" dirty="0"/>
+              <a:t>작성해야 해요</a:t>
+            </a:r>
+            <a:r>
+              <a:rPr lang="en-US" altLang="ko-KR" sz="2000" dirty="0"/>
+              <a:t>!</a:t>
+            </a:r>
+          </a:p>
+        </p:txBody>
+      </p:sp>
+      <p:sp>
+        <p:nvSpPr>
           <p:cNvPr id="2" name="제목 1"/>
           <p:cNvSpPr>
             <a:spLocks noGrp="1"/>
@@ -7095,111 +7581,13 @@
       </p:sp>
       <p:sp>
         <p:nvSpPr>
-          <p:cNvPr id="3" name="내용 개체 틀 2"/>
-          <p:cNvSpPr>
-            <a:spLocks noGrp="1"/>
-          </p:cNvSpPr>
-          <p:nvPr>
-            <p:ph idx="1"/>
-          </p:nvPr>
-        </p:nvSpPr>
-        <p:spPr/>
-        <p:txBody>
-          <a:bodyPr/>
-          <a:lstStyle/>
-          <a:p>
-            <a:pPr marL="0" indent="0">
-              <a:buNone/>
-            </a:pPr>
-            <a:r>
-              <a:rPr lang="en-US" altLang="ko-KR" sz="2600" dirty="0"/>
-              <a:t>html </a:t>
-            </a:r>
-            <a:r>
-              <a:rPr lang="ko-KR" altLang="en-US" sz="2600" dirty="0"/>
-              <a:t>태그는 항상 </a:t>
-            </a:r>
-            <a:r>
-              <a:rPr lang="en-US" altLang="ko-KR" sz="2600" dirty="0"/>
-              <a:t>return </a:t>
-            </a:r>
-            <a:r>
-              <a:rPr lang="ko-KR" altLang="en-US" sz="2600" dirty="0"/>
-              <a:t>이후에</a:t>
-            </a:r>
-            <a:r>
-              <a:rPr lang="en-US" altLang="ko-KR" sz="2600" dirty="0"/>
-              <a:t>, </a:t>
-            </a:r>
-            <a:r>
-              <a:rPr lang="ko-KR" altLang="en-US" sz="2600" dirty="0"/>
-              <a:t>반드시 하나의 부모 요소가 전체 요소를 감싸는 형태로</a:t>
-            </a:r>
-            <a:r>
-              <a:rPr lang="en-US" altLang="ko-KR" sz="2600" dirty="0"/>
-              <a:t>!</a:t>
-            </a:r>
-          </a:p>
-          <a:p>
-            <a:pPr marL="457200" lvl="1" indent="0">
-              <a:buNone/>
-            </a:pPr>
-            <a:r>
-              <a:rPr lang="en-US" altLang="ko-KR" sz="2000" dirty="0"/>
-              <a:t>+ </a:t>
-            </a:r>
-            <a:r>
-              <a:rPr lang="ko-KR" altLang="en-US" sz="2000" dirty="0"/>
-              <a:t>딱 하나의 태그만 </a:t>
-            </a:r>
-            <a:r>
-              <a:rPr lang="en-US" altLang="ko-KR" sz="2000" dirty="0"/>
-              <a:t>return</a:t>
-            </a:r>
-            <a:r>
-              <a:rPr lang="ko-KR" altLang="en-US" sz="2000" dirty="0"/>
-              <a:t>할 때는 </a:t>
-            </a:r>
-            <a:r>
-              <a:rPr lang="en-US" altLang="ko-KR" sz="2000" dirty="0"/>
-              <a:t>()</a:t>
-            </a:r>
-            <a:r>
-              <a:rPr lang="ko-KR" altLang="en-US" sz="2000" dirty="0"/>
-              <a:t>가 필요 없지만 여러 개의 태그가 있다면 </a:t>
-            </a:r>
-            <a:r>
-              <a:rPr lang="en-US" altLang="ko-KR" sz="2000" dirty="0"/>
-              <a:t>return (~) </a:t>
-            </a:r>
-            <a:r>
-              <a:rPr lang="ko-KR" altLang="en-US" sz="2000" dirty="0"/>
-              <a:t>괄호 내부에</a:t>
-            </a:r>
-            <a:r>
-              <a:rPr lang="en-US" altLang="ko-KR" sz="2000" dirty="0"/>
-              <a:t> </a:t>
-            </a:r>
-            <a:r>
-              <a:rPr lang="ko-KR" altLang="en-US" sz="2000" dirty="0"/>
-              <a:t>작성해야 해요</a:t>
-            </a:r>
-            <a:r>
-              <a:rPr lang="en-US" altLang="ko-KR" sz="2000" dirty="0"/>
-              <a:t>!</a:t>
-            </a:r>
-          </a:p>
-        </p:txBody>
-      </p:sp>
-      <p:sp>
-        <p:nvSpPr>
           <p:cNvPr id="5" name="직사각형 4"/>
           <p:cNvSpPr/>
           <p:nvPr/>
         </p:nvSpPr>
         <p:spPr>
           <a:xfrm>
-            <a:off x="1569663" y="3546460"/>
+            <a:off x="1277793" y="3040851"/>
             <a:ext cx="4284807" cy="3139321"/>
           </a:xfrm>
           <a:prstGeom prst="rect">
@@ -7375,6 +7763,15 @@
             </a:endParaRPr>
           </a:p>
           <a:p>
+            <a:r>
+              <a:rPr lang="en-US" altLang="ko-KR" dirty="0">
+                <a:solidFill>
+                  <a:srgbClr val="BBBBBB"/>
+                </a:solidFill>
+                <a:latin typeface="Consolas" panose="020B0609020204030204" pitchFamily="49" charset="0"/>
+              </a:rPr>
+              <a:t/>
+            </a:r>
             <a:br>
               <a:rPr lang="en-US" altLang="ko-KR" dirty="0">
                 <a:solidFill>
@@ -7776,7 +8173,7 @@
         </p:blipFill>
         <p:spPr>
           <a:xfrm>
-            <a:off x="6928080" y="3546460"/>
+            <a:off x="6636210" y="3040851"/>
             <a:ext cx="4229201" cy="3131235"/>
           </a:xfrm>
           <a:prstGeom prst="rect">
@@ -7806,7 +8203,7 @@
         </p:blipFill>
         <p:spPr>
           <a:xfrm>
-            <a:off x="9633478" y="5209579"/>
+            <a:off x="9341608" y="4703970"/>
             <a:ext cx="855418" cy="598793"/>
           </a:xfrm>
           <a:prstGeom prst="rect">
@@ -7830,7 +8227,7 @@
         </p:blipFill>
         <p:spPr>
           <a:xfrm>
-            <a:off x="6522855" y="5714410"/>
+            <a:off x="6230985" y="5208801"/>
             <a:ext cx="5356195" cy="344327"/>
           </a:xfrm>
           <a:prstGeom prst="rect">
@@ -7998,6 +8395,73 @@
       </p:grpSpPr>
       <p:sp>
         <p:nvSpPr>
+          <p:cNvPr id="3" name="내용 개체 틀 2"/>
+          <p:cNvSpPr>
+            <a:spLocks noGrp="1"/>
+          </p:cNvSpPr>
+          <p:nvPr>
+            <p:ph idx="1"/>
+          </p:nvPr>
+        </p:nvSpPr>
+        <p:spPr>
+          <a:xfrm>
+            <a:off x="859715" y="1329153"/>
+            <a:ext cx="10515600" cy="4351338"/>
+          </a:xfrm>
+        </p:spPr>
+        <p:txBody>
+          <a:bodyPr/>
+          <a:lstStyle/>
+          <a:p>
+            <a:pPr marL="0" indent="0">
+              <a:buNone/>
+            </a:pPr>
+            <a:r>
+              <a:rPr lang="en-US" altLang="ko-KR" dirty="0"/>
+              <a:t>html</a:t>
+            </a:r>
+            <a:r>
+              <a:rPr lang="ko-KR" altLang="en-US" dirty="0"/>
+              <a:t>를 작성하다가 중간에 </a:t>
+            </a:r>
+            <a:r>
+              <a:rPr lang="en-US" altLang="ko-KR" dirty="0" err="1"/>
+              <a:t>js</a:t>
+            </a:r>
+            <a:r>
+              <a:rPr lang="en-US" altLang="ko-KR" dirty="0"/>
+              <a:t> </a:t>
+            </a:r>
+            <a:r>
+              <a:rPr lang="ko-KR" altLang="en-US" dirty="0"/>
+              <a:t>문법을 사용하고 싶을 때는 </a:t>
+            </a:r>
+            <a:r>
+              <a:rPr lang="en-US" altLang="ko-KR" dirty="0"/>
+              <a:t>{</a:t>
+            </a:r>
+            <a:r>
+              <a:rPr lang="ko-KR" altLang="en-US" dirty="0"/>
+              <a:t>중괄호</a:t>
+            </a:r>
+            <a:r>
+              <a:rPr lang="en-US" altLang="ko-KR" dirty="0"/>
+              <a:t>}</a:t>
+            </a:r>
+            <a:r>
+              <a:rPr lang="ko-KR" altLang="en-US" dirty="0"/>
+              <a:t>로 감싸야 합니다</a:t>
+            </a:r>
+            <a:r>
+              <a:rPr lang="en-US" altLang="ko-KR" dirty="0"/>
+              <a:t>.</a:t>
+            </a:r>
+            <a:endParaRPr lang="ko-KR" altLang="en-US" dirty="0"/>
+          </a:p>
+        </p:txBody>
+      </p:sp>
+      <p:sp>
+        <p:nvSpPr>
           <p:cNvPr id="2" name="제목 1"/>
           <p:cNvSpPr>
             <a:spLocks noGrp="1"/>
@@ -8046,73 +8510,6 @@
             <a:r>
               <a:rPr lang="en-US" altLang="ko-KR" dirty="0"/>
               <a:t>html with JS</a:t>
-            </a:r>
-            <a:endParaRPr lang="ko-KR" altLang="en-US" dirty="0"/>
-          </a:p>
-        </p:txBody>
-      </p:sp>
-      <p:sp>
-        <p:nvSpPr>
-          <p:cNvPr id="3" name="내용 개체 틀 2"/>
-          <p:cNvSpPr>
-            <a:spLocks noGrp="1"/>
-          </p:cNvSpPr>
-          <p:nvPr>
-            <p:ph idx="1"/>
-          </p:nvPr>
-        </p:nvSpPr>
-        <p:spPr>
-          <a:xfrm>
-            <a:off x="838200" y="1579158"/>
-            <a:ext cx="10515600" cy="4351338"/>
-          </a:xfrm>
-        </p:spPr>
-        <p:txBody>
-          <a:bodyPr/>
-          <a:lstStyle/>
-          <a:p>
-            <a:pPr marL="0" indent="0">
-              <a:buNone/>
-            </a:pPr>
-            <a:r>
-              <a:rPr lang="en-US" altLang="ko-KR" dirty="0"/>
-              <a:t>html</a:t>
-            </a:r>
-            <a:r>
-              <a:rPr lang="ko-KR" altLang="en-US" dirty="0"/>
-              <a:t>를 작성하다가 중간에 </a:t>
-            </a:r>
-            <a:r>
-              <a:rPr lang="en-US" altLang="ko-KR" dirty="0" err="1"/>
-              <a:t>js</a:t>
-            </a:r>
-            <a:r>
-              <a:rPr lang="en-US" altLang="ko-KR" dirty="0"/>
-              <a:t> </a:t>
-            </a:r>
-            <a:r>
-              <a:rPr lang="ko-KR" altLang="en-US" dirty="0"/>
-              <a:t>문법을 사용하고 싶을 때는 </a:t>
-            </a:r>
-            <a:r>
-              <a:rPr lang="en-US" altLang="ko-KR" dirty="0"/>
-              <a:t>{</a:t>
-            </a:r>
-            <a:r>
-              <a:rPr lang="ko-KR" altLang="en-US" dirty="0"/>
-              <a:t>중괄호</a:t>
-            </a:r>
-            <a:r>
-              <a:rPr lang="en-US" altLang="ko-KR" dirty="0"/>
-              <a:t>}</a:t>
-            </a:r>
-            <a:r>
-              <a:rPr lang="ko-KR" altLang="en-US" dirty="0"/>
-              <a:t>로 감싸야 합니다</a:t>
-            </a:r>
-            <a:r>
-              <a:rPr lang="en-US" altLang="ko-KR" dirty="0"/>
-              <a:t>.</a:t>
             </a:r>
             <a:endParaRPr lang="ko-KR" altLang="en-US" dirty="0"/>
           </a:p>
@@ -9768,61 +10165,6 @@
       </p:grpSpPr>
       <p:sp>
         <p:nvSpPr>
-          <p:cNvPr id="2" name="제목 1"/>
-          <p:cNvSpPr>
-            <a:spLocks noGrp="1"/>
-          </p:cNvSpPr>
-          <p:nvPr>
-            <p:ph type="title"/>
-          </p:nvPr>
-        </p:nvSpPr>
-        <p:spPr/>
-        <p:txBody>
-          <a:bodyPr/>
-          <a:lstStyle/>
-          <a:p>
-            <a:r>
-              <a:rPr lang="en-US" altLang="ko-KR" dirty="0" err="1">
-                <a:solidFill>
-                  <a:srgbClr val="F3DF49"/>
-                </a:solidFill>
-              </a:rPr>
-              <a:t>JS</a:t>
-            </a:r>
-            <a:r>
-              <a:rPr lang="en-US" altLang="ko-KR" dirty="0" err="1">
-                <a:solidFill>
-                  <a:srgbClr val="8A53A6"/>
-                </a:solidFill>
-              </a:rPr>
-              <a:t>X</a:t>
-            </a:r>
-            <a:r>
-              <a:rPr lang="en-US" altLang="ko-KR" dirty="0"/>
-              <a:t> </a:t>
-            </a:r>
-            <a:r>
-              <a:rPr lang="ko-KR" altLang="en-US" dirty="0"/>
-              <a:t> </a:t>
-            </a:r>
-            <a:r>
-              <a:rPr lang="en-US" altLang="ko-KR" dirty="0">
-                <a:solidFill>
-                  <a:srgbClr val="8A53A6"/>
-                </a:solidFill>
-              </a:rPr>
-              <a:t>2</a:t>
-            </a:r>
-            <a:r>
-              <a:rPr lang="en-US" altLang="ko-KR" dirty="0"/>
-              <a:t>. html with JS</a:t>
-            </a:r>
-            <a:endParaRPr lang="ko-KR" altLang="en-US" dirty="0"/>
-          </a:p>
-        </p:txBody>
-      </p:sp>
-      <p:sp>
-        <p:nvSpPr>
           <p:cNvPr id="3" name="내용 개체 틀 2"/>
           <p:cNvSpPr>
             <a:spLocks noGrp="1"/>
@@ -9891,6 +10233,61 @@
             <a:r>
               <a:rPr lang="en-US" altLang="ko-KR" dirty="0"/>
               <a:t>.</a:t>
+            </a:r>
+            <a:endParaRPr lang="ko-KR" altLang="en-US" dirty="0"/>
+          </a:p>
+        </p:txBody>
+      </p:sp>
+      <p:sp>
+        <p:nvSpPr>
+          <p:cNvPr id="2" name="제목 1"/>
+          <p:cNvSpPr>
+            <a:spLocks noGrp="1"/>
+          </p:cNvSpPr>
+          <p:nvPr>
+            <p:ph type="title"/>
+          </p:nvPr>
+        </p:nvSpPr>
+        <p:spPr/>
+        <p:txBody>
+          <a:bodyPr/>
+          <a:lstStyle/>
+          <a:p>
+            <a:r>
+              <a:rPr lang="en-US" altLang="ko-KR" dirty="0" err="1">
+                <a:solidFill>
+                  <a:srgbClr val="F3DF49"/>
+                </a:solidFill>
+              </a:rPr>
+              <a:t>JS</a:t>
+            </a:r>
+            <a:r>
+              <a:rPr lang="en-US" altLang="ko-KR" dirty="0" err="1">
+                <a:solidFill>
+                  <a:srgbClr val="8A53A6"/>
+                </a:solidFill>
+              </a:rPr>
+              <a:t>X</a:t>
+            </a:r>
+            <a:r>
+              <a:rPr lang="en-US" altLang="ko-KR" dirty="0"/>
+              <a:t> </a:t>
+            </a:r>
+            <a:r>
+              <a:rPr lang="ko-KR" altLang="en-US" dirty="0"/>
+              <a:t> </a:t>
+            </a:r>
+            <a:r>
+              <a:rPr lang="en-US" altLang="ko-KR" dirty="0">
+                <a:solidFill>
+                  <a:srgbClr val="8A53A6"/>
+                </a:solidFill>
+              </a:rPr>
+              <a:t>2</a:t>
+            </a:r>
+            <a:r>
+              <a:rPr lang="en-US" altLang="ko-KR" dirty="0"/>
+              <a:t>. html with JS</a:t>
             </a:r>
             <a:endParaRPr lang="ko-KR" altLang="en-US" dirty="0"/>
           </a:p>
@@ -10900,6 +11297,159 @@
       </p:cxnSp>
       <p:sp>
         <p:nvSpPr>
+          <p:cNvPr id="3" name="내용 개체 틀 2"/>
+          <p:cNvSpPr>
+            <a:spLocks noGrp="1"/>
+          </p:cNvSpPr>
+          <p:nvPr>
+            <p:ph idx="1"/>
+          </p:nvPr>
+        </p:nvSpPr>
+        <p:spPr>
+          <a:xfrm>
+            <a:off x="838200" y="1579158"/>
+            <a:ext cx="11010902" cy="4351338"/>
+          </a:xfrm>
+        </p:spPr>
+        <p:txBody>
+          <a:bodyPr/>
+          <a:lstStyle/>
+          <a:p>
+            <a:pPr marL="0" indent="0">
+              <a:buNone/>
+            </a:pPr>
+            <a:r>
+              <a:rPr lang="en-US" altLang="ko-KR" dirty="0"/>
+              <a:t>JSX </a:t>
+            </a:r>
+            <a:r>
+              <a:rPr lang="ko-KR" altLang="en-US" dirty="0" err="1"/>
+              <a:t>삼항연산자</a:t>
+            </a:r>
+            <a:r>
+              <a:rPr lang="ko-KR" altLang="en-US" dirty="0"/>
+              <a:t> 대신 </a:t>
+            </a:r>
+            <a:r>
+              <a:rPr lang="en-US" altLang="ko-KR" dirty="0">
+                <a:solidFill>
+                  <a:srgbClr val="FF5050"/>
+                </a:solidFill>
+              </a:rPr>
+              <a:t>if </a:t>
+            </a:r>
+            <a:r>
+              <a:rPr lang="ko-KR" altLang="en-US" dirty="0">
+                <a:solidFill>
+                  <a:srgbClr val="FF5050"/>
+                </a:solidFill>
+              </a:rPr>
+              <a:t>문이 올 수 없어요</a:t>
+            </a:r>
+            <a:r>
+              <a:rPr lang="en-US" altLang="ko-KR" dirty="0">
+                <a:solidFill>
+                  <a:srgbClr val="FF5050"/>
+                </a:solidFill>
+              </a:rPr>
+              <a:t>,</a:t>
+            </a:r>
+          </a:p>
+          <a:p>
+            <a:pPr marL="0" indent="0">
+              <a:buNone/>
+            </a:pPr>
+            <a:r>
+              <a:rPr lang="en-US" altLang="ko-KR" dirty="0"/>
+              <a:t>+ </a:t>
+            </a:r>
+            <a:r>
+              <a:rPr lang="en-US" altLang="ko-KR" dirty="0">
+                <a:solidFill>
+                  <a:srgbClr val="FF5050"/>
+                </a:solidFill>
+              </a:rPr>
+              <a:t>for</a:t>
+            </a:r>
+            <a:r>
+              <a:rPr lang="ko-KR" altLang="en-US" dirty="0" err="1">
+                <a:solidFill>
+                  <a:srgbClr val="FF5050"/>
+                </a:solidFill>
+              </a:rPr>
+              <a:t>문</a:t>
+            </a:r>
+            <a:r>
+              <a:rPr lang="ko-KR" altLang="en-US" dirty="0" err="1"/>
+              <a:t>또한</a:t>
+            </a:r>
+            <a:r>
+              <a:rPr lang="ko-KR" altLang="en-US" dirty="0"/>
+              <a:t> </a:t>
+            </a:r>
+            <a:r>
+              <a:rPr lang="en-US" altLang="ko-KR" dirty="0"/>
+              <a:t>JSX </a:t>
+            </a:r>
+            <a:r>
+              <a:rPr lang="ko-KR" altLang="en-US" dirty="0"/>
+              <a:t>내부에 </a:t>
+            </a:r>
+            <a:r>
+              <a:rPr lang="ko-KR" altLang="en-US" dirty="0">
+                <a:solidFill>
+                  <a:srgbClr val="FF5050"/>
+                </a:solidFill>
+              </a:rPr>
+              <a:t>올 수 없어요</a:t>
+            </a:r>
+            <a:r>
+              <a:rPr lang="en-US" altLang="ko-KR" dirty="0">
+                <a:solidFill>
+                  <a:srgbClr val="FF5050"/>
+                </a:solidFill>
+              </a:rPr>
+              <a:t>!</a:t>
+            </a:r>
+          </a:p>
+          <a:p>
+            <a:pPr marL="0" indent="0">
+              <a:buNone/>
+            </a:pPr>
+            <a:r>
+              <a:rPr lang="en-US" altLang="ko-KR" sz="2400" dirty="0"/>
+              <a:t>(for</a:t>
+            </a:r>
+            <a:r>
+              <a:rPr lang="ko-KR" altLang="en-US" sz="2400" dirty="0"/>
+              <a:t>문과 </a:t>
+            </a:r>
+            <a:r>
+              <a:rPr lang="en-US" altLang="ko-KR" sz="2400" dirty="0"/>
+              <a:t>if </a:t>
+            </a:r>
+            <a:r>
+              <a:rPr lang="ko-KR" altLang="en-US" sz="2400" dirty="0"/>
+              <a:t>문을 사용하고 싶다면 </a:t>
+            </a:r>
+            <a:r>
+              <a:rPr lang="en-US" altLang="ko-KR" sz="2400" dirty="0"/>
+              <a:t>return </a:t>
+            </a:r>
+            <a:r>
+              <a:rPr lang="ko-KR" altLang="en-US" sz="2400" dirty="0"/>
+              <a:t>이 오기 전에 결과값을 저장하고 사용</a:t>
+            </a:r>
+            <a:r>
+              <a:rPr lang="en-US" altLang="ko-KR" sz="2400" dirty="0"/>
+              <a:t>)</a:t>
+            </a:r>
+            <a:endParaRPr lang="ko-KR" altLang="en-US" sz="2400" dirty="0"/>
+          </a:p>
+        </p:txBody>
+      </p:sp>
+      <p:sp>
+        <p:nvSpPr>
           <p:cNvPr id="2" name="제목 1"/>
           <p:cNvSpPr>
             <a:spLocks noGrp="1"/>
@@ -10950,159 +11500,6 @@
               <a:t>html with JS</a:t>
             </a:r>
             <a:endParaRPr lang="ko-KR" altLang="en-US" dirty="0"/>
-          </a:p>
-        </p:txBody>
-      </p:sp>
-      <p:sp>
-        <p:nvSpPr>
-          <p:cNvPr id="3" name="내용 개체 틀 2"/>
-          <p:cNvSpPr>
-            <a:spLocks noGrp="1"/>
-          </p:cNvSpPr>
-          <p:nvPr>
-            <p:ph idx="1"/>
-          </p:nvPr>
-        </p:nvSpPr>
-        <p:spPr>
-          <a:xfrm>
-            <a:off x="838200" y="1579158"/>
-            <a:ext cx="10515600" cy="4351338"/>
-          </a:xfrm>
-        </p:spPr>
-        <p:txBody>
-          <a:bodyPr/>
-          <a:lstStyle/>
-          <a:p>
-            <a:pPr marL="0" indent="0">
-              <a:buNone/>
-            </a:pPr>
-            <a:r>
-              <a:rPr lang="en-US" altLang="ko-KR" dirty="0"/>
-              <a:t>JSX </a:t>
-            </a:r>
-            <a:r>
-              <a:rPr lang="ko-KR" altLang="en-US" dirty="0" err="1"/>
-              <a:t>삼항연산자</a:t>
-            </a:r>
-            <a:r>
-              <a:rPr lang="ko-KR" altLang="en-US" dirty="0"/>
-              <a:t> 대신 </a:t>
-            </a:r>
-            <a:r>
-              <a:rPr lang="en-US" altLang="ko-KR" dirty="0">
-                <a:solidFill>
-                  <a:srgbClr val="FF5050"/>
-                </a:solidFill>
-              </a:rPr>
-              <a:t>if </a:t>
-            </a:r>
-            <a:r>
-              <a:rPr lang="ko-KR" altLang="en-US" dirty="0">
-                <a:solidFill>
-                  <a:srgbClr val="FF5050"/>
-                </a:solidFill>
-              </a:rPr>
-              <a:t>문이 올 수 없어요</a:t>
-            </a:r>
-            <a:r>
-              <a:rPr lang="en-US" altLang="ko-KR" dirty="0">
-                <a:solidFill>
-                  <a:srgbClr val="FF5050"/>
-                </a:solidFill>
-              </a:rPr>
-              <a:t>,</a:t>
-            </a:r>
-          </a:p>
-          <a:p>
-            <a:pPr marL="0" indent="0">
-              <a:buNone/>
-            </a:pPr>
-            <a:r>
-              <a:rPr lang="en-US" altLang="ko-KR" dirty="0"/>
-              <a:t>+ </a:t>
-            </a:r>
-            <a:r>
-              <a:rPr lang="en-US" altLang="ko-KR" dirty="0">
-                <a:solidFill>
-                  <a:srgbClr val="FF5050"/>
-                </a:solidFill>
-              </a:rPr>
-              <a:t>for</a:t>
-            </a:r>
-            <a:r>
-              <a:rPr lang="ko-KR" altLang="en-US" dirty="0" err="1">
-                <a:solidFill>
-                  <a:srgbClr val="FF5050"/>
-                </a:solidFill>
-              </a:rPr>
-              <a:t>문</a:t>
-            </a:r>
-            <a:r>
-              <a:rPr lang="ko-KR" altLang="en-US" dirty="0" err="1"/>
-              <a:t>또한</a:t>
-            </a:r>
-            <a:r>
-              <a:rPr lang="ko-KR" altLang="en-US" dirty="0"/>
-              <a:t> </a:t>
-            </a:r>
-            <a:r>
-              <a:rPr lang="en-US" altLang="ko-KR" dirty="0"/>
-              <a:t>JSX </a:t>
-            </a:r>
-            <a:r>
-              <a:rPr lang="ko-KR" altLang="en-US" dirty="0"/>
-              <a:t>내부에 </a:t>
-            </a:r>
-            <a:r>
-              <a:rPr lang="ko-KR" altLang="en-US" dirty="0">
-                <a:solidFill>
-                  <a:srgbClr val="FF5050"/>
-                </a:solidFill>
-              </a:rPr>
-              <a:t>올 수 없어요</a:t>
-            </a:r>
-            <a:r>
-              <a:rPr lang="en-US" altLang="ko-KR" dirty="0">
-                <a:solidFill>
-                  <a:srgbClr val="FF5050"/>
-                </a:solidFill>
-              </a:rPr>
-              <a:t>!</a:t>
-            </a:r>
-          </a:p>
-          <a:p>
-            <a:pPr marL="0" indent="0">
-              <a:buNone/>
-            </a:pPr>
-            <a:r>
-              <a:rPr lang="en-US" altLang="ko-KR" sz="2400" dirty="0"/>
-              <a:t>(for</a:t>
-            </a:r>
-            <a:r>
-              <a:rPr lang="ko-KR" altLang="en-US" sz="2400" dirty="0"/>
-              <a:t>문과 </a:t>
-            </a:r>
-            <a:r>
-              <a:rPr lang="en-US" altLang="ko-KR" sz="2400" dirty="0"/>
-              <a:t>if </a:t>
-            </a:r>
-            <a:r>
-              <a:rPr lang="ko-KR" altLang="en-US" sz="2400" dirty="0"/>
-              <a:t>문을 사용하고 싶다면 </a:t>
-            </a:r>
-            <a:r>
-              <a:rPr lang="en-US" altLang="ko-KR" sz="2400" dirty="0"/>
-              <a:t>return </a:t>
-            </a:r>
-            <a:r>
-              <a:rPr lang="ko-KR" altLang="en-US" sz="2400" dirty="0"/>
-              <a:t>이 오기 전에 결과값을 저장하고 사용</a:t>
-            </a:r>
-            <a:r>
-              <a:rPr lang="en-US" altLang="ko-KR" sz="2400" dirty="0"/>
-              <a:t>)</a:t>
-            </a:r>
-            <a:endParaRPr lang="ko-KR" altLang="en-US" sz="2400" dirty="0"/>
           </a:p>
         </p:txBody>
       </p:sp>
@@ -12461,6 +12858,15 @@
             </a:endParaRPr>
           </a:p>
           <a:p>
+            <a:r>
+              <a:rPr lang="en-US" altLang="ko-KR" sz="1600" dirty="0">
+                <a:solidFill>
+                  <a:srgbClr val="BBBBBB"/>
+                </a:solidFill>
+                <a:latin typeface="Consolas" panose="020B0609020204030204" pitchFamily="49" charset="0"/>
+              </a:rPr>
+              <a:t/>
+            </a:r>
             <a:br>
               <a:rPr lang="en-US" altLang="ko-KR" sz="1600" dirty="0">
                 <a:solidFill>
@@ -12952,6 +13358,149 @@
       </p:grpSpPr>
       <p:sp>
         <p:nvSpPr>
+          <p:cNvPr id="3" name="내용 개체 틀 2"/>
+          <p:cNvSpPr>
+            <a:spLocks noGrp="1"/>
+          </p:cNvSpPr>
+          <p:nvPr>
+            <p:ph idx="1"/>
+          </p:nvPr>
+        </p:nvSpPr>
+        <p:spPr>
+          <a:xfrm>
+            <a:off x="833836" y="1391204"/>
+            <a:ext cx="10515600" cy="4351338"/>
+          </a:xfrm>
+        </p:spPr>
+        <p:txBody>
+          <a:bodyPr/>
+          <a:lstStyle/>
+          <a:p>
+            <a:r>
+              <a:rPr lang="en-US" altLang="ko-KR" dirty="0" err="1"/>
+              <a:t>CSS</a:t>
+            </a:r>
+            <a:r>
+              <a:rPr lang="en-US" altLang="ko-KR" dirty="0"/>
+              <a:t> </a:t>
+            </a:r>
+            <a:r>
+              <a:rPr lang="ko-KR" altLang="en-US" dirty="0"/>
+              <a:t>를 인라인 형태로 적용할 때는 </a:t>
+            </a:r>
+            <a:r>
+              <a:rPr lang="en-US" altLang="ko-KR" dirty="0"/>
+              <a:t>{object}</a:t>
+            </a:r>
+            <a:r>
+              <a:rPr lang="ko-KR" altLang="en-US" dirty="0"/>
+              <a:t>형태로 저장해야 해요</a:t>
+            </a:r>
+            <a:r>
+              <a:rPr lang="en-US" altLang="ko-KR" dirty="0"/>
+              <a:t>!</a:t>
+            </a:r>
+          </a:p>
+          <a:p>
+            <a:r>
+              <a:rPr lang="en-US" altLang="ko-KR" dirty="0" err="1">
+                <a:solidFill>
+                  <a:srgbClr val="FF5050"/>
+                </a:solidFill>
+              </a:rPr>
+              <a:t>CSS</a:t>
+            </a:r>
+            <a:r>
+              <a:rPr lang="en-US" altLang="ko-KR" dirty="0">
+                <a:solidFill>
+                  <a:srgbClr val="FF5050"/>
+                </a:solidFill>
+              </a:rPr>
+              <a:t> </a:t>
+            </a:r>
+            <a:r>
+              <a:rPr lang="ko-KR" altLang="en-US" dirty="0">
+                <a:solidFill>
+                  <a:srgbClr val="FF5050"/>
+                </a:solidFill>
+              </a:rPr>
+              <a:t>속성은 </a:t>
+            </a:r>
+            <a:r>
+              <a:rPr lang="en-US" altLang="ko-KR" dirty="0"/>
+              <a:t>dash-case </a:t>
+            </a:r>
+            <a:r>
+              <a:rPr lang="en-US" altLang="ko-KR" dirty="0">
+                <a:solidFill>
+                  <a:schemeClr val="tx1">
+                    <a:lumMod val="65000"/>
+                    <a:lumOff val="35000"/>
+                  </a:schemeClr>
+                </a:solidFill>
+                <a:sym typeface="Wingdings" panose="05000000000000000000" pitchFamily="2" charset="2"/>
+              </a:rPr>
+              <a:t></a:t>
+            </a:r>
+            <a:r>
+              <a:rPr lang="en-US" altLang="ko-KR" dirty="0">
+                <a:sym typeface="Wingdings" panose="05000000000000000000" pitchFamily="2" charset="2"/>
+              </a:rPr>
+              <a:t> </a:t>
+            </a:r>
+            <a:r>
+              <a:rPr lang="en-US" altLang="ko-KR" dirty="0" err="1">
+                <a:solidFill>
+                  <a:srgbClr val="FF5050"/>
+                </a:solidFill>
+              </a:rPr>
+              <a:t>camelCase</a:t>
+            </a:r>
+            <a:endParaRPr lang="en-US" altLang="ko-KR" dirty="0">
+              <a:solidFill>
+                <a:srgbClr val="FF5050"/>
+              </a:solidFill>
+            </a:endParaRPr>
+          </a:p>
+          <a:p>
+            <a:endParaRPr lang="en-US" altLang="ko-KR" dirty="0"/>
+          </a:p>
+          <a:p>
+            <a:endParaRPr lang="en-US" altLang="ko-KR" dirty="0"/>
+          </a:p>
+          <a:p>
+            <a:endParaRPr lang="en-US" altLang="ko-KR" dirty="0"/>
+          </a:p>
+          <a:p>
+            <a:endParaRPr lang="en-US" altLang="ko-KR" dirty="0"/>
+          </a:p>
+          <a:p>
+            <a:r>
+              <a:rPr lang="en-US" altLang="ko-KR" dirty="0"/>
+              <a:t>return </a:t>
+            </a:r>
+            <a:r>
+              <a:rPr lang="ko-KR" altLang="en-US" dirty="0"/>
+              <a:t>위에 </a:t>
+            </a:r>
+            <a:r>
+              <a:rPr lang="en-US" altLang="ko-KR" dirty="0"/>
+              <a:t>object</a:t>
+            </a:r>
+            <a:r>
+              <a:rPr lang="ko-KR" altLang="en-US" dirty="0"/>
+              <a:t>를 변수에 담아놓고 사용할 수도 있어요</a:t>
+            </a:r>
+            <a:r>
+              <a:rPr lang="en-US" altLang="ko-KR" dirty="0"/>
+              <a:t>.</a:t>
+            </a:r>
+            <a:endParaRPr lang="ko-KR" altLang="en-US" dirty="0"/>
+          </a:p>
+        </p:txBody>
+      </p:sp>
+      <p:sp>
+        <p:nvSpPr>
           <p:cNvPr id="2" name="제목 1"/>
           <p:cNvSpPr>
             <a:spLocks noGrp="1"/>
@@ -13001,144 +13550,6 @@
               <a:rPr lang="ko-KR" altLang="en-US" dirty="0"/>
               <a:t> 적용</a:t>
             </a:r>
-          </a:p>
-        </p:txBody>
-      </p:sp>
-      <p:sp>
-        <p:nvSpPr>
-          <p:cNvPr id="3" name="내용 개체 틀 2"/>
-          <p:cNvSpPr>
-            <a:spLocks noGrp="1"/>
-          </p:cNvSpPr>
-          <p:nvPr>
-            <p:ph idx="1"/>
-          </p:nvPr>
-        </p:nvSpPr>
-        <p:spPr/>
-        <p:txBody>
-          <a:bodyPr/>
-          <a:lstStyle/>
-          <a:p>
-            <a:r>
-              <a:rPr lang="en-US" altLang="ko-KR" dirty="0" err="1"/>
-              <a:t>CSS</a:t>
-            </a:r>
-            <a:r>
-              <a:rPr lang="en-US" altLang="ko-KR" dirty="0"/>
-              <a:t> </a:t>
-            </a:r>
-            <a:r>
-              <a:rPr lang="ko-KR" altLang="en-US" dirty="0"/>
-              <a:t>를 인라인 형태로 적용할 때는 </a:t>
-            </a:r>
-            <a:r>
-              <a:rPr lang="en-US" altLang="ko-KR" dirty="0"/>
-              <a:t>{object}</a:t>
-            </a:r>
-            <a:r>
-              <a:rPr lang="ko-KR" altLang="en-US" dirty="0"/>
-              <a:t>형태로 저장해야 해요</a:t>
-            </a:r>
-            <a:r>
-              <a:rPr lang="en-US" altLang="ko-KR" dirty="0"/>
-              <a:t>!</a:t>
-            </a:r>
-          </a:p>
-          <a:p>
-            <a:r>
-              <a:rPr lang="en-US" altLang="ko-KR" dirty="0" err="1">
-                <a:solidFill>
-                  <a:srgbClr val="FF5050"/>
-                </a:solidFill>
-              </a:rPr>
-              <a:t>CSS</a:t>
-            </a:r>
-            <a:r>
-              <a:rPr lang="en-US" altLang="ko-KR" dirty="0">
-                <a:solidFill>
-                  <a:srgbClr val="FF5050"/>
-                </a:solidFill>
-              </a:rPr>
-              <a:t> </a:t>
-            </a:r>
-            <a:r>
-              <a:rPr lang="ko-KR" altLang="en-US" dirty="0">
-                <a:solidFill>
-                  <a:srgbClr val="FF5050"/>
-                </a:solidFill>
-              </a:rPr>
-              <a:t>속성은 </a:t>
-            </a:r>
-            <a:r>
-              <a:rPr lang="en-US" altLang="ko-KR" dirty="0"/>
-              <a:t>dash-case </a:t>
-            </a:r>
-            <a:r>
-              <a:rPr lang="en-US" altLang="ko-KR" dirty="0">
-                <a:solidFill>
-                  <a:schemeClr val="tx1">
-                    <a:lumMod val="65000"/>
-                    <a:lumOff val="35000"/>
-                  </a:schemeClr>
-                </a:solidFill>
-                <a:sym typeface="Wingdings" panose="05000000000000000000" pitchFamily="2" charset="2"/>
-              </a:rPr>
-              <a:t></a:t>
-            </a:r>
-            <a:r>
-              <a:rPr lang="en-US" altLang="ko-KR" dirty="0">
-                <a:sym typeface="Wingdings" panose="05000000000000000000" pitchFamily="2" charset="2"/>
-              </a:rPr>
-              <a:t> </a:t>
-            </a:r>
-            <a:r>
-              <a:rPr lang="en-US" altLang="ko-KR" dirty="0" err="1">
-                <a:solidFill>
-                  <a:srgbClr val="FF5050"/>
-                </a:solidFill>
-              </a:rPr>
-              <a:t>camelCase</a:t>
-            </a:r>
-            <a:endParaRPr lang="en-US" altLang="ko-KR" dirty="0">
-              <a:solidFill>
-                <a:srgbClr val="FF5050"/>
-              </a:solidFill>
-            </a:endParaRPr>
-          </a:p>
-          <a:p>
-            <a:endParaRPr lang="en-US" altLang="ko-KR" dirty="0"/>
-          </a:p>
-          <a:p>
-            <a:endParaRPr lang="en-US" altLang="ko-KR" dirty="0"/>
-          </a:p>
-          <a:p>
-            <a:endParaRPr lang="en-US" altLang="ko-KR" dirty="0"/>
-          </a:p>
-          <a:p>
-            <a:endParaRPr lang="en-US" altLang="ko-KR" dirty="0"/>
-          </a:p>
-          <a:p>
-            <a:r>
-              <a:rPr lang="en-US" altLang="ko-KR" dirty="0"/>
-              <a:t>return </a:t>
-            </a:r>
-            <a:r>
-              <a:rPr lang="ko-KR" altLang="en-US" dirty="0"/>
-              <a:t>위에 </a:t>
-            </a:r>
-            <a:r>
-              <a:rPr lang="en-US" altLang="ko-KR" dirty="0"/>
-              <a:t>object</a:t>
-            </a:r>
-            <a:r>
-              <a:rPr lang="ko-KR" altLang="en-US" dirty="0"/>
-              <a:t>를 변수에 담아놓고 사용할 수도 있어요</a:t>
-            </a:r>
-            <a:r>
-              <a:rPr lang="en-US" altLang="ko-KR" dirty="0"/>
-              <a:t>.</a:t>
-            </a:r>
-            <a:endParaRPr lang="ko-KR" altLang="en-US" dirty="0"/>
           </a:p>
         </p:txBody>
       </p:sp>
@@ -14320,61 +14731,6 @@
       </p:grpSpPr>
       <p:sp>
         <p:nvSpPr>
-          <p:cNvPr id="2" name="제목 1"/>
-          <p:cNvSpPr>
-            <a:spLocks noGrp="1"/>
-          </p:cNvSpPr>
-          <p:nvPr>
-            <p:ph type="title"/>
-          </p:nvPr>
-        </p:nvSpPr>
-        <p:spPr/>
-        <p:txBody>
-          <a:bodyPr/>
-          <a:lstStyle/>
-          <a:p>
-            <a:r>
-              <a:rPr lang="en-US" altLang="ko-KR" dirty="0" err="1">
-                <a:solidFill>
-                  <a:srgbClr val="F3DF49"/>
-                </a:solidFill>
-              </a:rPr>
-              <a:t>JS</a:t>
-            </a:r>
-            <a:r>
-              <a:rPr lang="en-US" altLang="ko-KR" dirty="0" err="1">
-                <a:solidFill>
-                  <a:srgbClr val="8A53A6"/>
-                </a:solidFill>
-              </a:rPr>
-              <a:t>X</a:t>
-            </a:r>
-            <a:r>
-              <a:rPr lang="en-US" altLang="ko-KR" dirty="0">
-                <a:solidFill>
-                  <a:srgbClr val="8A53A6"/>
-                </a:solidFill>
-              </a:rPr>
-              <a:t>  4. </a:t>
-            </a:r>
-            <a:r>
-              <a:rPr lang="en-US" altLang="ko-KR" dirty="0"/>
-              <a:t>class</a:t>
-            </a:r>
-            <a:r>
-              <a:rPr lang="ko-KR" altLang="en-US" dirty="0"/>
-              <a:t>와 </a:t>
-            </a:r>
-            <a:r>
-              <a:rPr lang="en-US" altLang="ko-KR" dirty="0" err="1"/>
-              <a:t>onclick</a:t>
-            </a:r>
-            <a:endParaRPr lang="ko-KR" altLang="en-US" dirty="0"/>
-          </a:p>
-        </p:txBody>
-      </p:sp>
-      <p:sp>
-        <p:nvSpPr>
           <p:cNvPr id="3" name="내용 개체 틀 2"/>
           <p:cNvSpPr>
             <a:spLocks noGrp="1"/>
@@ -14579,6 +14935,61 @@
               <a:buNone/>
             </a:pPr>
             <a:endParaRPr lang="en-US" altLang="ko-KR" dirty="0"/>
+          </a:p>
+        </p:txBody>
+      </p:sp>
+      <p:sp>
+        <p:nvSpPr>
+          <p:cNvPr id="2" name="제목 1"/>
+          <p:cNvSpPr>
+            <a:spLocks noGrp="1"/>
+          </p:cNvSpPr>
+          <p:nvPr>
+            <p:ph type="title"/>
+          </p:nvPr>
+        </p:nvSpPr>
+        <p:spPr/>
+        <p:txBody>
+          <a:bodyPr/>
+          <a:lstStyle/>
+          <a:p>
+            <a:r>
+              <a:rPr lang="en-US" altLang="ko-KR" dirty="0" err="1">
+                <a:solidFill>
+                  <a:srgbClr val="F3DF49"/>
+                </a:solidFill>
+              </a:rPr>
+              <a:t>JS</a:t>
+            </a:r>
+            <a:r>
+              <a:rPr lang="en-US" altLang="ko-KR" dirty="0" err="1">
+                <a:solidFill>
+                  <a:srgbClr val="8A53A6"/>
+                </a:solidFill>
+              </a:rPr>
+              <a:t>X</a:t>
+            </a:r>
+            <a:r>
+              <a:rPr lang="en-US" altLang="ko-KR" dirty="0">
+                <a:solidFill>
+                  <a:srgbClr val="8A53A6"/>
+                </a:solidFill>
+              </a:rPr>
+              <a:t>  4. </a:t>
+            </a:r>
+            <a:r>
+              <a:rPr lang="en-US" altLang="ko-KR" dirty="0"/>
+              <a:t>class</a:t>
+            </a:r>
+            <a:r>
+              <a:rPr lang="ko-KR" altLang="en-US" dirty="0"/>
+              <a:t>와 </a:t>
+            </a:r>
+            <a:r>
+              <a:rPr lang="en-US" altLang="ko-KR" dirty="0" err="1"/>
+              <a:t>onclick</a:t>
+            </a:r>
+            <a:endParaRPr lang="ko-KR" altLang="en-US" dirty="0"/>
           </a:p>
         </p:txBody>
       </p:sp>
@@ -15125,7 +15536,7 @@
         </p:blipFill>
         <p:spPr bwMode="auto">
           <a:xfrm>
-            <a:off x="9763214" y="1711456"/>
+            <a:off x="10656099" y="1743729"/>
             <a:ext cx="539884" cy="539884"/>
           </a:xfrm>
           <a:prstGeom prst="rect">
@@ -15175,45 +15586,6 @@
       </p:grpSpPr>
       <p:sp>
         <p:nvSpPr>
-          <p:cNvPr id="2" name="제목 1"/>
-          <p:cNvSpPr>
-            <a:spLocks noGrp="1"/>
-          </p:cNvSpPr>
-          <p:nvPr>
-            <p:ph type="title"/>
-          </p:nvPr>
-        </p:nvSpPr>
-        <p:spPr/>
-        <p:txBody>
-          <a:bodyPr/>
-          <a:lstStyle/>
-          <a:p>
-            <a:r>
-              <a:rPr lang="en-US" altLang="ko-KR" dirty="0">
-                <a:solidFill>
-                  <a:srgbClr val="F3DF49"/>
-                </a:solidFill>
-              </a:rPr>
-              <a:t>JS</a:t>
-            </a:r>
-            <a:r>
-              <a:rPr lang="en-US" altLang="ko-KR" dirty="0">
-                <a:solidFill>
-                  <a:srgbClr val="8A53A6"/>
-                </a:solidFill>
-              </a:rPr>
-              <a:t>X  5. </a:t>
-            </a:r>
-            <a:r>
-              <a:rPr lang="en-US" altLang="ko-KR" dirty="0"/>
-              <a:t>closing tag</a:t>
-            </a:r>
-            <a:endParaRPr lang="ko-KR" altLang="en-US" dirty="0"/>
-          </a:p>
-        </p:txBody>
-      </p:sp>
-      <p:sp>
-        <p:nvSpPr>
           <p:cNvPr id="3" name="내용 개체 틀 2"/>
           <p:cNvSpPr>
             <a:spLocks noGrp="1"/>
@@ -15260,6 +15632,45 @@
               <a:rPr lang="en-US" altLang="ko-KR" dirty="0"/>
               <a:t>!</a:t>
             </a:r>
+          </a:p>
+        </p:txBody>
+      </p:sp>
+      <p:sp>
+        <p:nvSpPr>
+          <p:cNvPr id="2" name="제목 1"/>
+          <p:cNvSpPr>
+            <a:spLocks noGrp="1"/>
+          </p:cNvSpPr>
+          <p:nvPr>
+            <p:ph type="title"/>
+          </p:nvPr>
+        </p:nvSpPr>
+        <p:spPr/>
+        <p:txBody>
+          <a:bodyPr/>
+          <a:lstStyle/>
+          <a:p>
+            <a:r>
+              <a:rPr lang="en-US" altLang="ko-KR" dirty="0">
+                <a:solidFill>
+                  <a:srgbClr val="F3DF49"/>
+                </a:solidFill>
+              </a:rPr>
+              <a:t>JS</a:t>
+            </a:r>
+            <a:r>
+              <a:rPr lang="en-US" altLang="ko-KR" dirty="0">
+                <a:solidFill>
+                  <a:srgbClr val="8A53A6"/>
+                </a:solidFill>
+              </a:rPr>
+              <a:t>X  5. </a:t>
+            </a:r>
+            <a:r>
+              <a:rPr lang="en-US" altLang="ko-KR" dirty="0"/>
+              <a:t>closing tag</a:t>
+            </a:r>
+            <a:endParaRPr lang="ko-KR" altLang="en-US" dirty="0"/>
           </a:p>
         </p:txBody>
       </p:sp>
@@ -16737,52 +17148,6 @@
       </p:grpSpPr>
       <p:sp>
         <p:nvSpPr>
-          <p:cNvPr id="2" name="제목 1"/>
-          <p:cNvSpPr>
-            <a:spLocks noGrp="1"/>
-          </p:cNvSpPr>
-          <p:nvPr>
-            <p:ph type="title"/>
-          </p:nvPr>
-        </p:nvSpPr>
-        <p:spPr/>
-        <p:txBody>
-          <a:bodyPr/>
-          <a:lstStyle/>
-          <a:p>
-            <a:r>
-              <a:rPr lang="en-US" altLang="ko-KR" dirty="0" err="1">
-                <a:solidFill>
-                  <a:srgbClr val="F3DF49"/>
-                </a:solidFill>
-              </a:rPr>
-              <a:t>JS</a:t>
-            </a:r>
-            <a:r>
-              <a:rPr lang="en-US" altLang="ko-KR" dirty="0" err="1">
-                <a:solidFill>
-                  <a:srgbClr val="8A53A6"/>
-                </a:solidFill>
-              </a:rPr>
-              <a:t>X</a:t>
-            </a:r>
-            <a:r>
-              <a:rPr lang="en-US" altLang="ko-KR" dirty="0">
-                <a:solidFill>
-                  <a:srgbClr val="8A53A6"/>
-                </a:solidFill>
-              </a:rPr>
-              <a:t>  6. </a:t>
-            </a:r>
-            <a:r>
-              <a:rPr lang="ko-KR" altLang="en-US" dirty="0"/>
-              <a:t>주석 사용</a:t>
-            </a:r>
-          </a:p>
-        </p:txBody>
-      </p:sp>
-      <p:sp>
-        <p:nvSpPr>
           <p:cNvPr id="3" name="내용 개체 틀 2"/>
           <p:cNvSpPr>
             <a:spLocks noGrp="1"/>
@@ -16828,6 +17193,52 @@
                 </a:solidFill>
               </a:rPr>
               <a:t>!*/}</a:t>
+            </a:r>
+          </a:p>
+        </p:txBody>
+      </p:sp>
+      <p:sp>
+        <p:nvSpPr>
+          <p:cNvPr id="2" name="제목 1"/>
+          <p:cNvSpPr>
+            <a:spLocks noGrp="1"/>
+          </p:cNvSpPr>
+          <p:nvPr>
+            <p:ph type="title"/>
+          </p:nvPr>
+        </p:nvSpPr>
+        <p:spPr/>
+        <p:txBody>
+          <a:bodyPr/>
+          <a:lstStyle/>
+          <a:p>
+            <a:r>
+              <a:rPr lang="en-US" altLang="ko-KR" dirty="0" err="1">
+                <a:solidFill>
+                  <a:srgbClr val="F3DF49"/>
+                </a:solidFill>
+              </a:rPr>
+              <a:t>JS</a:t>
+            </a:r>
+            <a:r>
+              <a:rPr lang="en-US" altLang="ko-KR" dirty="0" err="1">
+                <a:solidFill>
+                  <a:srgbClr val="8A53A6"/>
+                </a:solidFill>
+              </a:rPr>
+              <a:t>X</a:t>
+            </a:r>
+            <a:r>
+              <a:rPr lang="en-US" altLang="ko-KR" dirty="0">
+                <a:solidFill>
+                  <a:srgbClr val="8A53A6"/>
+                </a:solidFill>
+              </a:rPr>
+              <a:t>  6. </a:t>
+            </a:r>
+            <a:r>
+              <a:rPr lang="ko-KR" altLang="en-US" dirty="0"/>
+              <a:t>주석 사용</a:t>
             </a:r>
           </a:p>
         </p:txBody>
@@ -17455,7 +17866,7 @@
           <a:p>
             <a:fld id="{0E19CB95-6D28-40F1-9DA3-1BAC5D4B5B4F}" type="datetime6">
               <a:rPr lang="ko-KR" altLang="en-US" smtClean="0"/>
-              <a:t>2023년 9월</a:t>
+              <a:t>2024년 7월</a:t>
             </a:fld>
             <a:endParaRPr lang="ko-KR" altLang="en-US"/>
           </a:p>
@@ -17539,32 +17950,6 @@
       </p:grpSpPr>
       <p:sp>
         <p:nvSpPr>
-          <p:cNvPr id="2" name="제목 1"/>
-          <p:cNvSpPr>
-            <a:spLocks noGrp="1"/>
-          </p:cNvSpPr>
-          <p:nvPr>
-            <p:ph type="title"/>
-          </p:nvPr>
-        </p:nvSpPr>
-        <p:spPr/>
-        <p:txBody>
-          <a:bodyPr/>
-          <a:lstStyle/>
-          <a:p>
-            <a:r>
-              <a:rPr lang="ko-KR" altLang="en-US" dirty="0" err="1"/>
-              <a:t>리액트의</a:t>
-            </a:r>
-            <a:r>
-              <a:rPr lang="ko-KR" altLang="en-US" dirty="0"/>
-              <a:t> 디버깅</a:t>
-            </a:r>
-          </a:p>
-        </p:txBody>
-      </p:sp>
-      <p:sp>
-        <p:nvSpPr>
           <p:cNvPr id="3" name="내용 개체 틀 2"/>
           <p:cNvSpPr>
             <a:spLocks noGrp="1"/>
@@ -17581,7 +17966,7 @@
         </p:spPr>
         <p:txBody>
           <a:bodyPr>
-            <a:normAutofit fontScale="85000" lnSpcReduction="10000"/>
+            <a:normAutofit fontScale="85000" lnSpcReduction="20000"/>
           </a:bodyPr>
           <a:lstStyle/>
           <a:p>
@@ -17707,6 +18092,32 @@
               <a:t>!</a:t>
             </a:r>
             <a:endParaRPr lang="ko-KR" altLang="en-US" dirty="0"/>
+          </a:p>
+        </p:txBody>
+      </p:sp>
+      <p:sp>
+        <p:nvSpPr>
+          <p:cNvPr id="2" name="제목 1"/>
+          <p:cNvSpPr>
+            <a:spLocks noGrp="1"/>
+          </p:cNvSpPr>
+          <p:nvPr>
+            <p:ph type="title"/>
+          </p:nvPr>
+        </p:nvSpPr>
+        <p:spPr/>
+        <p:txBody>
+          <a:bodyPr/>
+          <a:lstStyle/>
+          <a:p>
+            <a:r>
+              <a:rPr lang="ko-KR" altLang="en-US" dirty="0" err="1"/>
+              <a:t>리액트의</a:t>
+            </a:r>
+            <a:r>
+              <a:rPr lang="ko-KR" altLang="en-US" dirty="0"/>
+              <a:t> 디버깅</a:t>
+            </a:r>
           </a:p>
         </p:txBody>
       </p:sp>
@@ -17732,7 +18143,7 @@
         </p:blipFill>
         <p:spPr>
           <a:xfrm>
-            <a:off x="1152230" y="2890776"/>
+            <a:off x="1152230" y="2761684"/>
             <a:ext cx="4943770" cy="1907731"/>
           </a:xfrm>
           <a:prstGeom prst="rect">
@@ -17770,29 +18181,6 @@
           <a:chExt cx="0" cy="0"/>
         </a:xfrm>
       </p:grpSpPr>
-      <p:sp>
-        <p:nvSpPr>
-          <p:cNvPr id="2" name="제목 1"/>
-          <p:cNvSpPr>
-            <a:spLocks noGrp="1"/>
-          </p:cNvSpPr>
-          <p:nvPr>
-            <p:ph type="title"/>
-          </p:nvPr>
-        </p:nvSpPr>
-        <p:spPr/>
-        <p:txBody>
-          <a:bodyPr/>
-          <a:lstStyle/>
-          <a:p>
-            <a:r>
-              <a:rPr lang="en-US" altLang="ko-KR" dirty="0"/>
-              <a:t>Component</a:t>
-            </a:r>
-            <a:endParaRPr lang="ko-KR" altLang="en-US" dirty="0"/>
-          </a:p>
-        </p:txBody>
-      </p:sp>
       <p:pic>
         <p:nvPicPr>
           <p:cNvPr id="6" name="내용 개체 틀 5">
@@ -17833,6 +18221,29 @@
           </a:effectLst>
         </p:spPr>
       </p:pic>
+      <p:sp>
+        <p:nvSpPr>
+          <p:cNvPr id="2" name="제목 1"/>
+          <p:cNvSpPr>
+            <a:spLocks noGrp="1"/>
+          </p:cNvSpPr>
+          <p:nvPr>
+            <p:ph type="title"/>
+          </p:nvPr>
+        </p:nvSpPr>
+        <p:spPr/>
+        <p:txBody>
+          <a:bodyPr/>
+          <a:lstStyle/>
+          <a:p>
+            <a:r>
+              <a:rPr lang="en-US" altLang="ko-KR" dirty="0"/>
+              <a:t>Component</a:t>
+            </a:r>
+            <a:endParaRPr lang="ko-KR" altLang="en-US" dirty="0"/>
+          </a:p>
+        </p:txBody>
+      </p:sp>
     </p:spTree>
     <p:extLst>
       <p:ext uri="{BB962C8B-B14F-4D97-AF65-F5344CB8AC3E}">
@@ -17865,29 +18276,6 @@
       </p:grpSpPr>
       <p:sp>
         <p:nvSpPr>
-          <p:cNvPr id="2" name="제목 1"/>
-          <p:cNvSpPr>
-            <a:spLocks noGrp="1"/>
-          </p:cNvSpPr>
-          <p:nvPr>
-            <p:ph type="title"/>
-          </p:nvPr>
-        </p:nvSpPr>
-        <p:spPr/>
-        <p:txBody>
-          <a:bodyPr/>
-          <a:lstStyle/>
-          <a:p>
-            <a:r>
-              <a:rPr lang="en-US" altLang="ko-KR" dirty="0"/>
-              <a:t>Component</a:t>
-            </a:r>
-            <a:endParaRPr lang="ko-KR" altLang="en-US" dirty="0"/>
-          </a:p>
-        </p:txBody>
-      </p:sp>
-      <p:sp>
-        <p:nvSpPr>
           <p:cNvPr id="3" name="내용 개체 틀 2"/>
           <p:cNvSpPr>
             <a:spLocks noGrp="1"/>
@@ -17977,6 +18365,29 @@
               <a:t>각 조각을 개별적으로 나누어 분리 가능</a:t>
             </a:r>
             <a:endParaRPr lang="en-US" altLang="ko-KR" dirty="0"/>
+          </a:p>
+        </p:txBody>
+      </p:sp>
+      <p:sp>
+        <p:nvSpPr>
+          <p:cNvPr id="2" name="제목 1"/>
+          <p:cNvSpPr>
+            <a:spLocks noGrp="1"/>
+          </p:cNvSpPr>
+          <p:nvPr>
+            <p:ph type="title"/>
+          </p:nvPr>
+        </p:nvSpPr>
+        <p:spPr/>
+        <p:txBody>
+          <a:bodyPr/>
+          <a:lstStyle/>
+          <a:p>
+            <a:r>
+              <a:rPr lang="en-US" altLang="ko-KR" dirty="0"/>
+              <a:t>Component</a:t>
+            </a:r>
+            <a:endParaRPr lang="ko-KR" altLang="en-US" dirty="0"/>
           </a:p>
         </p:txBody>
       </p:sp>
@@ -18010,29 +18421,6 @@
           <a:chExt cx="0" cy="0"/>
         </a:xfrm>
       </p:grpSpPr>
-      <p:sp>
-        <p:nvSpPr>
-          <p:cNvPr id="2" name="제목 1"/>
-          <p:cNvSpPr>
-            <a:spLocks noGrp="1"/>
-          </p:cNvSpPr>
-          <p:nvPr>
-            <p:ph type="title"/>
-          </p:nvPr>
-        </p:nvSpPr>
-        <p:spPr/>
-        <p:txBody>
-          <a:bodyPr/>
-          <a:lstStyle/>
-          <a:p>
-            <a:r>
-              <a:rPr lang="en-US" altLang="ko-KR" dirty="0"/>
-              <a:t>Component</a:t>
-            </a:r>
-            <a:endParaRPr lang="ko-KR" altLang="en-US" dirty="0"/>
-          </a:p>
-        </p:txBody>
-      </p:sp>
       <p:pic>
         <p:nvPicPr>
           <p:cNvPr id="6" name="내용 개체 틀 5">
@@ -18073,6 +18461,29 @@
           </a:effectLst>
         </p:spPr>
       </p:pic>
+      <p:sp>
+        <p:nvSpPr>
+          <p:cNvPr id="2" name="제목 1"/>
+          <p:cNvSpPr>
+            <a:spLocks noGrp="1"/>
+          </p:cNvSpPr>
+          <p:nvPr>
+            <p:ph type="title"/>
+          </p:nvPr>
+        </p:nvSpPr>
+        <p:spPr/>
+        <p:txBody>
+          <a:bodyPr/>
+          <a:lstStyle/>
+          <a:p>
+            <a:r>
+              <a:rPr lang="en-US" altLang="ko-KR" dirty="0"/>
+              <a:t>Component</a:t>
+            </a:r>
+            <a:endParaRPr lang="ko-KR" altLang="en-US" dirty="0"/>
+          </a:p>
+        </p:txBody>
+      </p:sp>
       <p:sp>
         <p:nvSpPr>
           <p:cNvPr id="3" name="직사각형 2"/>
@@ -18914,38 +19325,6 @@
       </p:grpSpPr>
       <p:sp>
         <p:nvSpPr>
-          <p:cNvPr id="2" name="제목 1">
-            <a:extLst>
-              <a:ext uri="{FF2B5EF4-FFF2-40B4-BE49-F238E27FC236}">
-                <a16:creationId xmlns:a16="http://schemas.microsoft.com/office/drawing/2014/main" id="{4F6F743E-6D99-228E-21E4-B6FD029FA077}"/>
-              </a:ext>
-            </a:extLst>
-          </p:cNvPr>
-          <p:cNvSpPr>
-            <a:spLocks noGrp="1"/>
-          </p:cNvSpPr>
-          <p:nvPr>
-            <p:ph type="title"/>
-          </p:nvPr>
-        </p:nvSpPr>
-        <p:spPr/>
-        <p:txBody>
-          <a:bodyPr/>
-          <a:lstStyle/>
-          <a:p>
-            <a:r>
-              <a:rPr lang="en-US" altLang="ko-KR" dirty="0"/>
-              <a:t>Component </a:t>
-            </a:r>
-            <a:r>
-              <a:rPr lang="ko-KR" altLang="en-US" dirty="0"/>
-              <a:t>트리 구조</a:t>
-            </a:r>
-          </a:p>
-        </p:txBody>
-      </p:sp>
-      <p:sp>
-        <p:nvSpPr>
           <p:cNvPr id="4" name="날짜 개체 틀 3">
             <a:extLst>
               <a:ext uri="{FF2B5EF4-FFF2-40B4-BE49-F238E27FC236}">
@@ -18967,7 +19346,7 @@
           <a:p>
             <a:fld id="{6468698F-A099-4459-96DD-C5B99D5CE837}" type="datetime6">
               <a:rPr lang="ko-KR" altLang="en-US" smtClean="0"/>
-              <a:t>2023년 9월</a:t>
+              <a:t>2024년 7월</a:t>
             </a:fld>
             <a:endParaRPr lang="ko-KR" altLang="en-US"/>
           </a:p>
@@ -18999,6 +19378,38 @@
               <a:t>6</a:t>
             </a:fld>
             <a:endParaRPr lang="ko-KR" altLang="en-US"/>
+          </a:p>
+        </p:txBody>
+      </p:sp>
+      <p:sp>
+        <p:nvSpPr>
+          <p:cNvPr id="2" name="제목 1">
+            <a:extLst>
+              <a:ext uri="{FF2B5EF4-FFF2-40B4-BE49-F238E27FC236}">
+                <a16:creationId xmlns:a16="http://schemas.microsoft.com/office/drawing/2014/main" id="{4F6F743E-6D99-228E-21E4-B6FD029FA077}"/>
+              </a:ext>
+            </a:extLst>
+          </p:cNvPr>
+          <p:cNvSpPr>
+            <a:spLocks noGrp="1"/>
+          </p:cNvSpPr>
+          <p:nvPr>
+            <p:ph type="title"/>
+          </p:nvPr>
+        </p:nvSpPr>
+        <p:spPr/>
+        <p:txBody>
+          <a:bodyPr/>
+          <a:lstStyle/>
+          <a:p>
+            <a:r>
+              <a:rPr lang="en-US" altLang="ko-KR" dirty="0"/>
+              <a:t>Component </a:t>
+            </a:r>
+            <a:r>
+              <a:rPr lang="ko-KR" altLang="en-US" dirty="0"/>
+              <a:t>트리 구조</a:t>
+            </a:r>
           </a:p>
         </p:txBody>
       </p:sp>
@@ -19223,7 +19634,7 @@
           <a:p>
             <a:fld id="{3C9CE3CE-253F-4F9D-BA15-C226C8D8501E}" type="datetime6">
               <a:rPr lang="ko-KR" altLang="en-US" smtClean="0"/>
-              <a:t>2023년 9월</a:t>
+              <a:t>2024년 7월</a:t>
             </a:fld>
             <a:endParaRPr lang="ko-KR" altLang="en-US"/>
           </a:p>
@@ -19322,32 +19733,6 @@
       </p:grpSpPr>
       <p:sp>
         <p:nvSpPr>
-          <p:cNvPr id="2" name="제목 1"/>
-          <p:cNvSpPr>
-            <a:spLocks noGrp="1"/>
-          </p:cNvSpPr>
-          <p:nvPr>
-            <p:ph type="title"/>
-          </p:nvPr>
-        </p:nvSpPr>
-        <p:spPr/>
-        <p:txBody>
-          <a:bodyPr/>
-          <a:lstStyle/>
-          <a:p>
-            <a:r>
-              <a:rPr lang="en-US" altLang="ko-KR" dirty="0"/>
-              <a:t>Component </a:t>
-            </a:r>
-            <a:r>
-              <a:rPr lang="ko-KR" altLang="en-US" dirty="0"/>
-              <a:t>를 만드는 방법</a:t>
-            </a:r>
-          </a:p>
-        </p:txBody>
-      </p:sp>
-      <p:sp>
-        <p:nvSpPr>
           <p:cNvPr id="3" name="내용 개체 틀 2"/>
           <p:cNvSpPr>
             <a:spLocks noGrp="1"/>
@@ -19364,7 +19749,7 @@
         </p:spPr>
         <p:txBody>
           <a:bodyPr>
-            <a:normAutofit lnSpcReduction="10000"/>
+            <a:normAutofit fontScale="92500" lnSpcReduction="10000"/>
           </a:bodyPr>
           <a:lstStyle/>
           <a:p>
@@ -19706,6 +20091,32 @@
           <a:p>
             <a:pPr lvl="1"/>
             <a:endParaRPr lang="ko-KR" altLang="en-US" dirty="0"/>
+          </a:p>
+        </p:txBody>
+      </p:sp>
+      <p:sp>
+        <p:nvSpPr>
+          <p:cNvPr id="2" name="제목 1"/>
+          <p:cNvSpPr>
+            <a:spLocks noGrp="1"/>
+          </p:cNvSpPr>
+          <p:nvPr>
+            <p:ph type="title"/>
+          </p:nvPr>
+        </p:nvSpPr>
+        <p:spPr/>
+        <p:txBody>
+          <a:bodyPr/>
+          <a:lstStyle/>
+          <a:p>
+            <a:r>
+              <a:rPr lang="en-US" altLang="ko-KR" dirty="0"/>
+              <a:t>Component </a:t>
+            </a:r>
+            <a:r>
+              <a:rPr lang="ko-KR" altLang="en-US" dirty="0"/>
+              <a:t>를 만드는 방법</a:t>
+            </a:r>
           </a:p>
         </p:txBody>
       </p:sp>
@@ -19741,6 +20152,25 @@
       </p:grpSpPr>
       <p:sp>
         <p:nvSpPr>
+          <p:cNvPr id="3" name="내용 개체 틀 2"/>
+          <p:cNvSpPr>
+            <a:spLocks noGrp="1"/>
+          </p:cNvSpPr>
+          <p:nvPr>
+            <p:ph idx="1"/>
+          </p:nvPr>
+        </p:nvSpPr>
+        <p:spPr/>
+        <p:txBody>
+          <a:bodyPr/>
+          <a:lstStyle/>
+          <a:p>
+            <a:endParaRPr lang="ko-KR" altLang="en-US" dirty="0"/>
+          </a:p>
+        </p:txBody>
+      </p:sp>
+      <p:sp>
+        <p:nvSpPr>
           <p:cNvPr id="2" name="제목 1"/>
           <p:cNvSpPr>
             <a:spLocks noGrp="1"/>
@@ -19770,25 +20200,6 @@
               <a:rPr lang="en-US" altLang="ko-KR" dirty="0"/>
               <a:t>!</a:t>
             </a:r>
-            <a:endParaRPr lang="ko-KR" altLang="en-US" dirty="0"/>
-          </a:p>
-        </p:txBody>
-      </p:sp>
-      <p:sp>
-        <p:nvSpPr>
-          <p:cNvPr id="3" name="내용 개체 틀 2"/>
-          <p:cNvSpPr>
-            <a:spLocks noGrp="1"/>
-          </p:cNvSpPr>
-          <p:nvPr>
-            <p:ph idx="1"/>
-          </p:nvPr>
-        </p:nvSpPr>
-        <p:spPr/>
-        <p:txBody>
-          <a:bodyPr/>
-          <a:lstStyle/>
-          <a:p>
             <a:endParaRPr lang="ko-KR" altLang="en-US" dirty="0"/>
           </a:p>
         </p:txBody>
@@ -19935,6 +20346,16 @@
             </a:r>
           </a:p>
           <a:p>
+            <a:r>
+              <a:rPr lang="en-US" altLang="ko-KR" b="0" dirty="0">
+                <a:solidFill>
+                  <a:srgbClr val="D4D4D4"/>
+                </a:solidFill>
+                <a:effectLst/>
+                <a:latin typeface="Consolas" panose="020B0609020204030204" pitchFamily="49" charset="0"/>
+              </a:rPr>
+              <a:t/>
+            </a:r>
             <a:br>
               <a:rPr lang="en-US" altLang="ko-KR" b="0" dirty="0">
                 <a:solidFill>
@@ -20235,6 +20656,16 @@
             </a:r>
           </a:p>
           <a:p>
+            <a:r>
+              <a:rPr lang="en-US" altLang="ko-KR" b="0" dirty="0">
+                <a:solidFill>
+                  <a:srgbClr val="D4D4D4"/>
+                </a:solidFill>
+                <a:effectLst/>
+                <a:latin typeface="Consolas" panose="020B0609020204030204" pitchFamily="49" charset="0"/>
+              </a:rPr>
+              <a:t/>
+            </a:r>
             <a:br>
               <a:rPr lang="en-US" altLang="ko-KR" b="0" dirty="0">
                 <a:solidFill>
@@ -20714,7 +21145,7 @@
 </file>
 
 <file path=ppt/theme/theme1.xml><?xml version="1.0" encoding="utf-8"?>
-<a:theme xmlns:a="http://schemas.openxmlformats.org/drawingml/2006/main" name="1_Office 테마">
+<a:theme xmlns:a="http://schemas.openxmlformats.org/drawingml/2006/main" name="3_Office 테마">
   <a:themeElements>
     <a:clrScheme name="코딩온_새싹">
       <a:dk1>
@@ -20754,15 +21185,15 @@
         <a:srgbClr val="954F72"/>
       </a:folHlink>
     </a:clrScheme>
-    <a:fontScheme name="코딩온">
+    <a:fontScheme name="Pretendard GOV">
       <a:majorFont>
-        <a:latin typeface="메이플스토리"/>
-        <a:ea typeface="메이플스토리"/>
+        <a:latin typeface="Pretendard GOV"/>
+        <a:ea typeface="Pretendard GOV"/>
         <a:cs typeface=""/>
       </a:majorFont>
       <a:minorFont>
-        <a:latin typeface="메이플스토리"/>
-        <a:ea typeface="메이플스토리"/>
+        <a:latin typeface="Pretendard GOV"/>
+        <a:ea typeface="Pretendard GOV"/>
         <a:cs typeface=""/>
       </a:minorFont>
     </a:fontScheme>

--- a/material/[SeSAC_YDP_6] 23_React_Component_JSX.pptx
+++ b/material/[SeSAC_YDP_6] 23_React_Component_JSX.pptx
@@ -835,70 +835,70 @@
               <a:t> 감싸야 함</a:t>
             </a:r>
             <a:r>
-              <a:rPr lang="en-US" altLang="ko-KR" baseline="0" dirty="0" smtClean="0"/>
+              <a:rPr lang="en-US" altLang="ko-KR" baseline="0" dirty="0"/>
               <a:t>)</a:t>
             </a:r>
           </a:p>
           <a:p>
-            <a:endParaRPr lang="en-US" altLang="ko-KR" baseline="0" dirty="0" smtClean="0"/>
-          </a:p>
-          <a:p>
-            <a:r>
-              <a:rPr lang="en-US" altLang="ko-KR" baseline="0" dirty="0" smtClean="0"/>
+            <a:endParaRPr lang="en-US" altLang="ko-KR" baseline="0" dirty="0"/>
+          </a:p>
+          <a:p>
+            <a:r>
+              <a:rPr lang="en-US" altLang="ko-KR" baseline="0" dirty="0"/>
               <a:t>{</a:t>
             </a:r>
             <a:r>
-              <a:rPr lang="ko-KR" altLang="en-US" baseline="0" dirty="0" smtClean="0"/>
+              <a:rPr lang="ko-KR" altLang="en-US" baseline="0" dirty="0"/>
               <a:t>중괄호</a:t>
             </a:r>
             <a:r>
-              <a:rPr lang="en-US" altLang="ko-KR" baseline="0" dirty="0" smtClean="0"/>
+              <a:rPr lang="en-US" altLang="ko-KR" baseline="0" dirty="0"/>
               <a:t>}</a:t>
             </a:r>
             <a:r>
-              <a:rPr lang="ko-KR" altLang="en-US" baseline="0" dirty="0" smtClean="0"/>
+              <a:rPr lang="ko-KR" altLang="en-US" baseline="0" dirty="0"/>
               <a:t>는 </a:t>
             </a:r>
             <a:r>
-              <a:rPr lang="en-US" altLang="ko-KR" baseline="0" dirty="0" smtClean="0"/>
+              <a:rPr lang="en-US" altLang="ko-KR" baseline="0" dirty="0"/>
               <a:t>id </a:t>
             </a:r>
             <a:r>
-              <a:rPr lang="ko-KR" altLang="en-US" baseline="0" dirty="0" smtClean="0"/>
+              <a:rPr lang="ko-KR" altLang="en-US" baseline="0" dirty="0"/>
               <a:t>속성에도 가능</a:t>
             </a:r>
             <a:r>
-              <a:rPr lang="en-US" altLang="ko-KR" baseline="0" dirty="0" smtClean="0"/>
+              <a:rPr lang="en-US" altLang="ko-KR" baseline="0" dirty="0"/>
               <a:t>, </a:t>
             </a:r>
             <a:r>
-              <a:rPr lang="en-US" altLang="ko-KR" baseline="0" dirty="0" err="1" smtClean="0"/>
+              <a:rPr lang="en-US" altLang="ko-KR" baseline="0" dirty="0" err="1"/>
               <a:t>className</a:t>
             </a:r>
             <a:r>
-              <a:rPr lang="ko-KR" altLang="en-US" baseline="0" dirty="0" smtClean="0"/>
+              <a:rPr lang="ko-KR" altLang="en-US" baseline="0" dirty="0"/>
               <a:t> 등등 왠만한 모든 곳에 가능하다</a:t>
             </a:r>
             <a:r>
-              <a:rPr lang="en-US" altLang="ko-KR" baseline="0" dirty="0" smtClean="0"/>
+              <a:rPr lang="en-US" altLang="ko-KR" baseline="0" dirty="0"/>
               <a:t>.</a:t>
             </a:r>
           </a:p>
           <a:p>
             <a:r>
-              <a:rPr lang="ko-KR" altLang="en-US" baseline="0" dirty="0" smtClean="0"/>
+              <a:rPr lang="ko-KR" altLang="en-US" baseline="0" dirty="0"/>
               <a:t>이런걸 </a:t>
             </a:r>
             <a:r>
-              <a:rPr lang="en-US" altLang="ko-KR" baseline="0" dirty="0" smtClean="0"/>
+              <a:rPr lang="en-US" altLang="ko-KR" baseline="0" dirty="0"/>
               <a:t>– </a:t>
             </a:r>
             <a:r>
-              <a:rPr lang="ko-KR" altLang="en-US" baseline="0" dirty="0" smtClean="0"/>
+              <a:rPr lang="ko-KR" altLang="en-US" baseline="0" dirty="0"/>
               <a:t>데이터 바인딩이라고 합니다</a:t>
             </a:r>
             <a:r>
-              <a:rPr lang="en-US" altLang="ko-KR" baseline="0" dirty="0" smtClean="0"/>
+              <a:rPr lang="en-US" altLang="ko-KR" baseline="0" dirty="0"/>
               <a:t>.</a:t>
             </a:r>
           </a:p>
@@ -1157,61 +1157,57 @@
             </a:r>
             <a:r>
               <a:rPr lang="ko-KR" altLang="en-US" baseline="0" dirty="0"/>
-              <a:t>문이 올 수 </a:t>
-            </a:r>
-            <a:r>
-              <a:rPr lang="ko-KR" altLang="en-US" baseline="0" dirty="0" smtClean="0"/>
-              <a:t>없음</a:t>
-            </a:r>
-            <a:r>
-              <a:rPr lang="en-US" altLang="ko-KR" baseline="0" dirty="0" smtClean="0"/>
+              <a:t>문이 올 수 없음</a:t>
+            </a:r>
+            <a:r>
+              <a:rPr lang="en-US" altLang="ko-KR" baseline="0" dirty="0"/>
               <a:t>.</a:t>
             </a:r>
           </a:p>
           <a:p>
-            <a:endParaRPr lang="en-US" altLang="ko-KR" baseline="0" dirty="0" smtClean="0"/>
-          </a:p>
-          <a:p>
-            <a:r>
-              <a:rPr lang="en-US" altLang="ko-KR" baseline="0" dirty="0" smtClean="0"/>
+            <a:endParaRPr lang="en-US" altLang="ko-KR" baseline="0" dirty="0"/>
+          </a:p>
+          <a:p>
+            <a:r>
+              <a:rPr lang="en-US" altLang="ko-KR" baseline="0" dirty="0"/>
               <a:t>JSX </a:t>
             </a:r>
             <a:r>
-              <a:rPr lang="ko-KR" altLang="en-US" baseline="0" dirty="0" smtClean="0"/>
+              <a:rPr lang="ko-KR" altLang="en-US" baseline="0" dirty="0"/>
               <a:t>외부에서 </a:t>
             </a:r>
             <a:r>
-              <a:rPr lang="ko-KR" altLang="en-US" baseline="0" dirty="0" err="1" smtClean="0"/>
+              <a:rPr lang="ko-KR" altLang="en-US" baseline="0" dirty="0" err="1"/>
               <a:t>로직처리</a:t>
             </a:r>
             <a:r>
-              <a:rPr lang="en-US" altLang="ko-KR" baseline="0" dirty="0" smtClean="0"/>
+              <a:rPr lang="en-US" altLang="ko-KR" baseline="0" dirty="0"/>
               <a:t>!</a:t>
             </a:r>
           </a:p>
           <a:p>
             <a:r>
-              <a:rPr lang="ko-KR" altLang="en-US" baseline="0" dirty="0" smtClean="0"/>
+              <a:rPr lang="ko-KR" altLang="en-US" baseline="0" dirty="0"/>
               <a:t>렌더링할 요소를 결정한 후</a:t>
             </a:r>
             <a:r>
-              <a:rPr lang="en-US" altLang="ko-KR" baseline="0" dirty="0" smtClean="0"/>
+              <a:rPr lang="en-US" altLang="ko-KR" baseline="0" dirty="0"/>
               <a:t>, </a:t>
             </a:r>
             <a:r>
-              <a:rPr lang="ko-KR" altLang="en-US" baseline="0" dirty="0" smtClean="0"/>
+              <a:rPr lang="ko-KR" altLang="en-US" baseline="0" dirty="0"/>
               <a:t>해당 요소를 </a:t>
             </a:r>
             <a:r>
-              <a:rPr lang="en-US" altLang="ko-KR" baseline="0" dirty="0" smtClean="0"/>
+              <a:rPr lang="en-US" altLang="ko-KR" baseline="0" dirty="0"/>
               <a:t>JSX</a:t>
             </a:r>
             <a:r>
-              <a:rPr lang="ko-KR" altLang="en-US" baseline="0" dirty="0" smtClean="0"/>
+              <a:rPr lang="ko-KR" altLang="en-US" baseline="0" dirty="0"/>
               <a:t>에 </a:t>
             </a:r>
             <a:r>
-              <a:rPr lang="ko-KR" altLang="en-US" baseline="0" smtClean="0"/>
+              <a:rPr lang="ko-KR" altLang="en-US" baseline="0"/>
               <a:t>포함하는 방식</a:t>
             </a:r>
             <a:endParaRPr lang="ko-KR" altLang="en-US" dirty="0"/>
@@ -1399,16 +1395,12 @@
           <a:p>
             <a:r>
               <a:rPr lang="ko-KR" altLang="en-US" dirty="0"/>
-              <a:t>오브젝트를 따로 변수에 선언해서 사용할 수도 </a:t>
-            </a:r>
-            <a:r>
-              <a:rPr lang="ko-KR" altLang="en-US" dirty="0" smtClean="0"/>
-              <a:t>있음</a:t>
-            </a:r>
-            <a:endParaRPr lang="en-US" altLang="ko-KR" dirty="0" smtClean="0"/>
-          </a:p>
-          <a:p>
-            <a:endParaRPr lang="en-US" altLang="ko-KR" dirty="0" smtClean="0"/>
+              <a:t>오브젝트를 따로 변수에 선언해서 사용할 수도 있음</a:t>
+            </a:r>
+            <a:endParaRPr lang="en-US" altLang="ko-KR" dirty="0"/>
+          </a:p>
+          <a:p>
+            <a:endParaRPr lang="en-US" altLang="ko-KR" dirty="0"/>
           </a:p>
           <a:p>
             <a:pPr marL="171450" indent="-171450">
@@ -1416,15 +1408,15 @@
               <a:buChar char="-"/>
             </a:pPr>
             <a:r>
-              <a:rPr lang="en-US" altLang="ko-KR" dirty="0" smtClean="0"/>
+              <a:rPr lang="en-US" altLang="ko-KR" dirty="0"/>
               <a:t>style </a:t>
             </a:r>
             <a:r>
-              <a:rPr lang="ko-KR" altLang="en-US" dirty="0" smtClean="0"/>
+              <a:rPr lang="ko-KR" altLang="en-US" dirty="0"/>
               <a:t>넣을 땐 </a:t>
             </a:r>
             <a:r>
-              <a:rPr lang="en-US" altLang="ko-KR" dirty="0" smtClean="0"/>
+              <a:rPr lang="en-US" altLang="ko-KR" dirty="0"/>
               <a:t>style = { }</a:t>
             </a:r>
           </a:p>
@@ -1434,27 +1426,27 @@
               <a:buChar char="-"/>
             </a:pPr>
             <a:r>
-              <a:rPr lang="en-US" altLang="ko-KR" dirty="0" smtClean="0"/>
+              <a:rPr lang="en-US" altLang="ko-KR" dirty="0"/>
               <a:t>{ {</a:t>
             </a:r>
             <a:r>
-              <a:rPr lang="ko-KR" altLang="en-US" dirty="0" err="1" smtClean="0"/>
+              <a:rPr lang="ko-KR" altLang="en-US" dirty="0" err="1"/>
               <a:t>스타일명</a:t>
             </a:r>
             <a:r>
-              <a:rPr lang="ko-KR" altLang="en-US" dirty="0" smtClean="0"/>
+              <a:rPr lang="ko-KR" altLang="en-US" dirty="0"/>
               <a:t> </a:t>
             </a:r>
             <a:r>
-              <a:rPr lang="en-US" altLang="ko-KR" dirty="0" smtClean="0"/>
+              <a:rPr lang="en-US" altLang="ko-KR" dirty="0"/>
               <a:t>: ‘</a:t>
             </a:r>
             <a:r>
-              <a:rPr lang="ko-KR" altLang="en-US" dirty="0" smtClean="0"/>
+              <a:rPr lang="ko-KR" altLang="en-US" dirty="0"/>
               <a:t>값’</a:t>
             </a:r>
             <a:r>
-              <a:rPr lang="en-US" altLang="ko-KR" dirty="0" smtClean="0"/>
+              <a:rPr lang="en-US" altLang="ko-KR" dirty="0"/>
               <a:t>} } </a:t>
             </a:r>
           </a:p>
@@ -1464,17 +1456,17 @@
               <a:buChar char="-"/>
             </a:pPr>
             <a:r>
-              <a:rPr lang="ko-KR" altLang="en-US" dirty="0" smtClean="0"/>
+              <a:rPr lang="ko-KR" altLang="en-US" dirty="0"/>
               <a:t>객체 형태</a:t>
             </a:r>
-            <a:endParaRPr lang="en-US" altLang="ko-KR" dirty="0" smtClean="0"/>
+            <a:endParaRPr lang="en-US" altLang="ko-KR" dirty="0"/>
           </a:p>
           <a:p>
             <a:pPr marL="171450" indent="-171450">
               <a:buFontTx/>
               <a:buChar char="-"/>
             </a:pPr>
-            <a:endParaRPr lang="en-US" altLang="ko-KR" dirty="0" smtClean="0"/>
+            <a:endParaRPr lang="en-US" altLang="ko-KR" dirty="0"/>
           </a:p>
           <a:p>
             <a:pPr marL="171450" indent="-171450">
@@ -1482,7 +1474,7 @@
               <a:buChar char="-"/>
             </a:pPr>
             <a:r>
-              <a:rPr lang="en-US" altLang="ko-KR" dirty="0" smtClean="0"/>
+              <a:rPr lang="en-US" altLang="ko-KR" dirty="0"/>
               <a:t>font-size(x)</a:t>
             </a:r>
           </a:p>
@@ -1492,22 +1484,22 @@
               <a:buChar char="-"/>
             </a:pPr>
             <a:r>
-              <a:rPr lang="en-US" altLang="ko-KR" dirty="0" err="1" smtClean="0"/>
+              <a:rPr lang="en-US" altLang="ko-KR" dirty="0" err="1"/>
               <a:t>fontSize</a:t>
             </a:r>
             <a:r>
-              <a:rPr lang="en-US" altLang="ko-KR" dirty="0" smtClean="0"/>
+              <a:rPr lang="en-US" altLang="ko-KR" dirty="0"/>
               <a:t> </a:t>
             </a:r>
             <a:r>
-              <a:rPr lang="ko-KR" altLang="en-US" dirty="0" smtClean="0"/>
+              <a:rPr lang="ko-KR" altLang="en-US" dirty="0"/>
               <a:t>형식으로 </a:t>
             </a:r>
             <a:r>
-              <a:rPr lang="ko-KR" altLang="en-US" dirty="0" err="1" smtClean="0"/>
+              <a:rPr lang="ko-KR" altLang="en-US" dirty="0" err="1"/>
               <a:t>써줘야함</a:t>
             </a:r>
-            <a:endParaRPr lang="en-US" altLang="ko-KR" dirty="0" smtClean="0"/>
+            <a:endParaRPr lang="en-US" altLang="ko-KR" dirty="0"/>
           </a:p>
           <a:p>
             <a:pPr marL="171450" indent="-171450">
@@ -1515,23 +1507,23 @@
               <a:buChar char="-"/>
             </a:pPr>
             <a:r>
-              <a:rPr lang="en-US" altLang="ko-KR" dirty="0" smtClean="0"/>
+              <a:rPr lang="en-US" altLang="ko-KR" dirty="0"/>
               <a:t>JSX</a:t>
             </a:r>
             <a:r>
-              <a:rPr lang="ko-KR" altLang="en-US" dirty="0" smtClean="0"/>
+              <a:rPr lang="ko-KR" altLang="en-US" dirty="0"/>
               <a:t>에서는 </a:t>
             </a:r>
             <a:r>
-              <a:rPr lang="en-US" altLang="ko-KR" dirty="0" smtClean="0"/>
+              <a:rPr lang="en-US" altLang="ko-KR" dirty="0"/>
               <a:t>-</a:t>
             </a:r>
             <a:r>
-              <a:rPr lang="ko-KR" altLang="en-US" dirty="0" smtClean="0"/>
+              <a:rPr lang="ko-KR" altLang="en-US" dirty="0"/>
               <a:t>는 진짜 빼기를 말함</a:t>
             </a:r>
             <a:r>
-              <a:rPr lang="en-US" altLang="ko-KR" dirty="0" smtClean="0"/>
+              <a:rPr lang="en-US" altLang="ko-KR" dirty="0"/>
               <a:t>.</a:t>
             </a:r>
             <a:endParaRPr lang="ko-KR" altLang="en-US" dirty="0"/>
@@ -2493,73 +2485,73 @@
           <a:lstStyle/>
           <a:p>
             <a:r>
-              <a:rPr lang="en-US" altLang="ko-KR" dirty="0" smtClean="0"/>
+              <a:rPr lang="en-US" altLang="ko-KR" dirty="0"/>
               <a:t>** </a:t>
             </a:r>
             <a:r>
-              <a:rPr lang="ko-KR" altLang="en-US" dirty="0" err="1" smtClean="0"/>
+              <a:rPr lang="ko-KR" altLang="en-US" dirty="0" err="1"/>
               <a:t>클래스형</a:t>
             </a:r>
             <a:r>
-              <a:rPr lang="ko-KR" altLang="en-US" dirty="0" smtClean="0"/>
+              <a:rPr lang="ko-KR" altLang="en-US" dirty="0"/>
               <a:t> 컴포넌트</a:t>
             </a:r>
-            <a:endParaRPr lang="en-US" altLang="ko-KR" dirty="0" smtClean="0"/>
-          </a:p>
-          <a:p>
-            <a:r>
-              <a:rPr lang="en-US" altLang="ko-KR" dirty="0" err="1" smtClean="0"/>
+            <a:endParaRPr lang="en-US" altLang="ko-KR" dirty="0"/>
+          </a:p>
+          <a:p>
+            <a:r>
+              <a:rPr lang="en-US" altLang="ko-KR" dirty="0" err="1"/>
               <a:t>React.Component</a:t>
             </a:r>
             <a:r>
-              <a:rPr lang="en-US" altLang="ko-KR" baseline="0" dirty="0" smtClean="0"/>
+              <a:rPr lang="en-US" altLang="ko-KR" baseline="0" dirty="0"/>
               <a:t> </a:t>
             </a:r>
             <a:r>
-              <a:rPr lang="ko-KR" altLang="en-US" baseline="0" dirty="0" smtClean="0"/>
+              <a:rPr lang="ko-KR" altLang="en-US" baseline="0" dirty="0"/>
               <a:t>를 상속 받아야함</a:t>
             </a:r>
             <a:r>
-              <a:rPr lang="en-US" altLang="ko-KR" baseline="0" dirty="0" smtClean="0"/>
+              <a:rPr lang="en-US" altLang="ko-KR" baseline="0" dirty="0"/>
               <a:t>.</a:t>
             </a:r>
           </a:p>
           <a:p>
             <a:r>
-              <a:rPr lang="ko-KR" altLang="en-US" baseline="0" dirty="0" smtClean="0"/>
+              <a:rPr lang="ko-KR" altLang="en-US" baseline="0" dirty="0"/>
               <a:t>다양한 생명주기 메서드 제공</a:t>
             </a:r>
-            <a:endParaRPr lang="en-US" altLang="ko-KR" baseline="0" dirty="0" smtClean="0"/>
-          </a:p>
-          <a:p>
-            <a:endParaRPr lang="en-US" altLang="ko-KR" baseline="0" dirty="0" smtClean="0"/>
-          </a:p>
-          <a:p>
-            <a:r>
-              <a:rPr lang="en-US" altLang="ko-KR" baseline="0" dirty="0" smtClean="0"/>
+            <a:endParaRPr lang="en-US" altLang="ko-KR" baseline="0" dirty="0"/>
+          </a:p>
+          <a:p>
+            <a:endParaRPr lang="en-US" altLang="ko-KR" baseline="0" dirty="0"/>
+          </a:p>
+          <a:p>
+            <a:r>
+              <a:rPr lang="en-US" altLang="ko-KR" baseline="0" dirty="0"/>
               <a:t>** </a:t>
             </a:r>
             <a:r>
-              <a:rPr lang="ko-KR" altLang="en-US" baseline="0" dirty="0" smtClean="0"/>
+              <a:rPr lang="ko-KR" altLang="en-US" baseline="0" dirty="0"/>
               <a:t>함수형 컴포넌트</a:t>
             </a:r>
-            <a:endParaRPr lang="en-US" altLang="ko-KR" baseline="0" dirty="0" smtClean="0"/>
-          </a:p>
-          <a:p>
-            <a:r>
-              <a:rPr lang="ko-KR" altLang="en-US" baseline="0" dirty="0" smtClean="0"/>
+            <a:endParaRPr lang="en-US" altLang="ko-KR" baseline="0" dirty="0"/>
+          </a:p>
+          <a:p>
+            <a:r>
+              <a:rPr lang="ko-KR" altLang="en-US" baseline="0" dirty="0"/>
               <a:t>단순히 </a:t>
             </a:r>
             <a:r>
-              <a:rPr lang="en-US" altLang="ko-KR" baseline="0" dirty="0" smtClean="0"/>
+              <a:rPr lang="en-US" altLang="ko-KR" baseline="0" dirty="0"/>
               <a:t>JS </a:t>
             </a:r>
             <a:r>
-              <a:rPr lang="ko-KR" altLang="en-US" baseline="0" dirty="0" smtClean="0"/>
+              <a:rPr lang="ko-KR" altLang="en-US" baseline="0" dirty="0"/>
               <a:t>함수로 정의</a:t>
             </a:r>
             <a:r>
-              <a:rPr lang="en-US" altLang="ko-KR" baseline="0" dirty="0" smtClean="0"/>
+              <a:rPr lang="en-US" altLang="ko-KR" baseline="0" dirty="0"/>
               <a:t>.</a:t>
             </a:r>
           </a:p>
@@ -2646,58 +2638,58 @@
           <a:lstStyle/>
           <a:p>
             <a:r>
-              <a:rPr lang="en-US" altLang="ko-KR" baseline="0" dirty="0" smtClean="0"/>
+              <a:rPr lang="en-US" altLang="ko-KR" baseline="0" dirty="0"/>
               <a:t>React 16.8 </a:t>
             </a:r>
             <a:r>
-              <a:rPr lang="ko-KR" altLang="en-US" baseline="0" dirty="0" smtClean="0"/>
+              <a:rPr lang="ko-KR" altLang="en-US" baseline="0" dirty="0"/>
               <a:t>이후로 훅 을 통해 상태와 생명주기 기능 사용 가능</a:t>
             </a:r>
             <a:r>
-              <a:rPr lang="en-US" altLang="ko-KR" baseline="0" dirty="0" smtClean="0"/>
+              <a:rPr lang="en-US" altLang="ko-KR" baseline="0" dirty="0"/>
               <a:t>.</a:t>
             </a:r>
           </a:p>
           <a:p>
-            <a:endParaRPr lang="en-US" altLang="ko-KR" baseline="0" dirty="0" smtClean="0"/>
-          </a:p>
-          <a:p>
-            <a:r>
-              <a:rPr lang="en-US" altLang="ko-KR" baseline="0" dirty="0" smtClean="0"/>
+            <a:endParaRPr lang="en-US" altLang="ko-KR" baseline="0" dirty="0"/>
+          </a:p>
+          <a:p>
+            <a:r>
+              <a:rPr lang="en-US" altLang="ko-KR" baseline="0" dirty="0"/>
               <a:t>React </a:t>
             </a:r>
             <a:r>
-              <a:rPr lang="ko-KR" altLang="en-US" baseline="0" dirty="0" smtClean="0"/>
+              <a:rPr lang="ko-KR" altLang="en-US" baseline="0" dirty="0"/>
               <a:t>커뮤니티에서는 함수형 컴포넌트와 훅 사용을 더 권장</a:t>
             </a:r>
             <a:r>
-              <a:rPr lang="en-US" altLang="ko-KR" baseline="0" dirty="0" smtClean="0"/>
+              <a:rPr lang="en-US" altLang="ko-KR" baseline="0" dirty="0"/>
               <a:t>.</a:t>
             </a:r>
           </a:p>
           <a:p>
             <a:r>
-              <a:rPr lang="ko-KR" altLang="en-US" baseline="0" dirty="0" smtClean="0"/>
+              <a:rPr lang="ko-KR" altLang="en-US" baseline="0" dirty="0"/>
               <a:t>코드의 간결성</a:t>
             </a:r>
             <a:r>
-              <a:rPr lang="en-US" altLang="ko-KR" baseline="0" dirty="0" smtClean="0"/>
+              <a:rPr lang="en-US" altLang="ko-KR" baseline="0" dirty="0"/>
               <a:t>, </a:t>
             </a:r>
             <a:r>
-              <a:rPr lang="ko-KR" altLang="en-US" baseline="0" dirty="0" err="1" smtClean="0"/>
+              <a:rPr lang="ko-KR" altLang="en-US" baseline="0" dirty="0" err="1"/>
               <a:t>가독성</a:t>
             </a:r>
             <a:r>
-              <a:rPr lang="en-US" altLang="ko-KR" baseline="0" dirty="0" smtClean="0"/>
+              <a:rPr lang="en-US" altLang="ko-KR" baseline="0" dirty="0"/>
               <a:t>, </a:t>
             </a:r>
             <a:r>
-              <a:rPr lang="ko-KR" altLang="en-US" baseline="0" dirty="0" smtClean="0"/>
+              <a:rPr lang="ko-KR" altLang="en-US" baseline="0" dirty="0"/>
               <a:t>그리고 미래 방향성 때문</a:t>
             </a:r>
             <a:r>
-              <a:rPr lang="en-US" altLang="ko-KR" baseline="0" dirty="0" smtClean="0"/>
+              <a:rPr lang="en-US" altLang="ko-KR" baseline="0" dirty="0"/>
               <a:t>.</a:t>
             </a:r>
           </a:p>
@@ -3029,217 +3021,217 @@
           <a:lstStyle/>
           <a:p>
             <a:r>
-              <a:rPr lang="en-US" altLang="ko-KR" dirty="0" smtClean="0"/>
+              <a:rPr lang="en-US" altLang="ko-KR" dirty="0"/>
               <a:t>Html</a:t>
             </a:r>
             <a:r>
-              <a:rPr lang="ko-KR" altLang="en-US" dirty="0" smtClean="0"/>
+              <a:rPr lang="ko-KR" altLang="en-US" dirty="0"/>
               <a:t>과 유사한 구문 사용</a:t>
             </a:r>
             <a:r>
-              <a:rPr lang="en-US" altLang="ko-KR" dirty="0" smtClean="0"/>
+              <a:rPr lang="en-US" altLang="ko-KR" dirty="0"/>
               <a:t>.</a:t>
             </a:r>
           </a:p>
           <a:p>
             <a:r>
-              <a:rPr lang="en-US" altLang="ko-KR" dirty="0" smtClean="0"/>
+              <a:rPr lang="en-US" altLang="ko-KR" dirty="0"/>
               <a:t>JS </a:t>
             </a:r>
             <a:r>
-              <a:rPr lang="ko-KR" altLang="en-US" dirty="0" smtClean="0"/>
+              <a:rPr lang="ko-KR" altLang="en-US" dirty="0"/>
               <a:t>코드 내에서 </a:t>
             </a:r>
             <a:r>
-              <a:rPr lang="en-US" altLang="ko-KR" dirty="0" smtClean="0"/>
+              <a:rPr lang="en-US" altLang="ko-KR" dirty="0"/>
               <a:t>UI </a:t>
             </a:r>
             <a:r>
-              <a:rPr lang="ko-KR" altLang="en-US" dirty="0" smtClean="0"/>
+              <a:rPr lang="ko-KR" altLang="en-US" dirty="0"/>
               <a:t>구조를 정의 할 수 있게 해줌</a:t>
             </a:r>
             <a:r>
-              <a:rPr lang="en-US" altLang="ko-KR" dirty="0" smtClean="0"/>
+              <a:rPr lang="en-US" altLang="ko-KR" dirty="0"/>
               <a:t>.</a:t>
             </a:r>
           </a:p>
           <a:p>
-            <a:endParaRPr lang="en-US" altLang="ko-KR" dirty="0" smtClean="0"/>
-          </a:p>
-          <a:p>
-            <a:r>
-              <a:rPr lang="en-US" altLang="ko-KR" dirty="0" smtClean="0"/>
+            <a:endParaRPr lang="en-US" altLang="ko-KR" dirty="0"/>
+          </a:p>
+          <a:p>
+            <a:r>
+              <a:rPr lang="en-US" altLang="ko-KR" dirty="0"/>
               <a:t>**</a:t>
             </a:r>
             <a:r>
-              <a:rPr lang="en-US" altLang="ko-KR" baseline="0" dirty="0" smtClean="0"/>
+              <a:rPr lang="en-US" altLang="ko-KR" baseline="0" dirty="0"/>
               <a:t> </a:t>
             </a:r>
             <a:r>
-              <a:rPr lang="ko-KR" altLang="en-US" baseline="0" dirty="0" smtClean="0"/>
+              <a:rPr lang="ko-KR" altLang="en-US" baseline="0" dirty="0"/>
               <a:t>브라우저는 </a:t>
             </a:r>
             <a:r>
-              <a:rPr lang="en-US" altLang="ko-KR" baseline="0" dirty="0" smtClean="0"/>
+              <a:rPr lang="en-US" altLang="ko-KR" baseline="0" dirty="0"/>
               <a:t>JSX</a:t>
             </a:r>
             <a:r>
-              <a:rPr lang="ko-KR" altLang="en-US" baseline="0" dirty="0" smtClean="0"/>
+              <a:rPr lang="ko-KR" altLang="en-US" baseline="0" dirty="0"/>
               <a:t>를 직접 이해 못함</a:t>
             </a:r>
             <a:r>
-              <a:rPr lang="en-US" altLang="ko-KR" baseline="0" dirty="0" smtClean="0"/>
+              <a:rPr lang="en-US" altLang="ko-KR" baseline="0" dirty="0"/>
               <a:t>.</a:t>
             </a:r>
           </a:p>
           <a:p>
             <a:r>
-              <a:rPr lang="ko-KR" altLang="en-US" dirty="0" smtClean="0"/>
+              <a:rPr lang="ko-KR" altLang="en-US" dirty="0"/>
               <a:t>따라서 </a:t>
             </a:r>
             <a:r>
-              <a:rPr lang="en-US" altLang="ko-KR" dirty="0" smtClean="0"/>
+              <a:rPr lang="en-US" altLang="ko-KR" dirty="0"/>
               <a:t>Babel</a:t>
             </a:r>
             <a:r>
-              <a:rPr lang="ko-KR" altLang="en-US" dirty="0" smtClean="0"/>
+              <a:rPr lang="ko-KR" altLang="en-US" dirty="0"/>
               <a:t>과 같은 트랜스파일러를 사용하여 </a:t>
             </a:r>
             <a:r>
-              <a:rPr lang="en-US" altLang="ko-KR" dirty="0" smtClean="0"/>
+              <a:rPr lang="en-US" altLang="ko-KR" dirty="0"/>
               <a:t>JSX</a:t>
             </a:r>
             <a:r>
-              <a:rPr lang="ko-KR" altLang="en-US" dirty="0" smtClean="0"/>
+              <a:rPr lang="ko-KR" altLang="en-US" dirty="0"/>
               <a:t>를 일반 </a:t>
             </a:r>
             <a:r>
-              <a:rPr lang="en-US" altLang="ko-KR" dirty="0" smtClean="0"/>
+              <a:rPr lang="en-US" altLang="ko-KR" dirty="0"/>
               <a:t>JS</a:t>
             </a:r>
             <a:r>
-              <a:rPr lang="ko-KR" altLang="en-US" dirty="0" smtClean="0"/>
+              <a:rPr lang="ko-KR" altLang="en-US" dirty="0"/>
               <a:t>로 변환해야 함</a:t>
             </a:r>
             <a:r>
-              <a:rPr lang="en-US" altLang="ko-KR" dirty="0" smtClean="0"/>
+              <a:rPr lang="en-US" altLang="ko-KR" dirty="0"/>
               <a:t>.</a:t>
             </a:r>
           </a:p>
           <a:p>
             <a:r>
-              <a:rPr lang="ko-KR" altLang="en-US" dirty="0" smtClean="0"/>
+              <a:rPr lang="ko-KR" altLang="en-US" dirty="0"/>
               <a:t>바벨은 </a:t>
             </a:r>
             <a:r>
-              <a:rPr lang="en-US" altLang="ko-KR" dirty="0" smtClean="0"/>
+              <a:rPr lang="en-US" altLang="ko-KR" dirty="0"/>
               <a:t>JSX </a:t>
             </a:r>
             <a:r>
-              <a:rPr lang="ko-KR" altLang="en-US" dirty="0" smtClean="0"/>
+              <a:rPr lang="ko-KR" altLang="en-US" dirty="0"/>
               <a:t>코드를 </a:t>
             </a:r>
             <a:r>
-              <a:rPr lang="en-US" altLang="ko-KR" dirty="0" err="1" smtClean="0"/>
+              <a:rPr lang="en-US" altLang="ko-KR" dirty="0" err="1"/>
               <a:t>React.createElement</a:t>
             </a:r>
             <a:r>
-              <a:rPr lang="en-US" altLang="ko-KR" dirty="0" smtClean="0"/>
+              <a:rPr lang="en-US" altLang="ko-KR" dirty="0"/>
               <a:t> </a:t>
             </a:r>
             <a:r>
-              <a:rPr lang="ko-KR" altLang="en-US" dirty="0" smtClean="0"/>
+              <a:rPr lang="ko-KR" altLang="en-US" dirty="0"/>
               <a:t>호출로 </a:t>
             </a:r>
             <a:r>
-              <a:rPr lang="ko-KR" altLang="en-US" dirty="0" err="1" smtClean="0"/>
+              <a:rPr lang="ko-KR" altLang="en-US" dirty="0" err="1"/>
               <a:t>변환해줌</a:t>
             </a:r>
             <a:r>
-              <a:rPr lang="en-US" altLang="ko-KR" dirty="0" smtClean="0"/>
+              <a:rPr lang="en-US" altLang="ko-KR" dirty="0"/>
               <a:t>.</a:t>
             </a:r>
           </a:p>
           <a:p>
-            <a:endParaRPr lang="en-US" altLang="ko-KR" dirty="0" smtClean="0"/>
-          </a:p>
-          <a:p>
-            <a:r>
-              <a:rPr lang="en-US" altLang="ko-KR" dirty="0" err="1" smtClean="0"/>
+            <a:endParaRPr lang="en-US" altLang="ko-KR" dirty="0"/>
+          </a:p>
+          <a:p>
+            <a:r>
+              <a:rPr lang="en-US" altLang="ko-KR" dirty="0" err="1"/>
               <a:t>const</a:t>
             </a:r>
             <a:r>
-              <a:rPr lang="en-US" altLang="ko-KR" dirty="0" smtClean="0"/>
+              <a:rPr lang="en-US" altLang="ko-KR" dirty="0"/>
               <a:t> element = &lt;h1 </a:t>
             </a:r>
             <a:r>
-              <a:rPr lang="en-US" altLang="ko-KR" dirty="0" err="1" smtClean="0"/>
+              <a:rPr lang="en-US" altLang="ko-KR" dirty="0" err="1"/>
               <a:t>className</a:t>
             </a:r>
             <a:r>
-              <a:rPr lang="en-US" altLang="ko-KR" dirty="0" smtClean="0"/>
+              <a:rPr lang="en-US" altLang="ko-KR" dirty="0"/>
               <a:t>=＂hello"&gt;Hello, world!&lt;/h1&gt;;</a:t>
             </a:r>
           </a:p>
           <a:p>
-            <a:endParaRPr lang="en-US" altLang="ko-KR" dirty="0" smtClean="0"/>
-          </a:p>
-          <a:p>
-            <a:r>
-              <a:rPr lang="en-US" altLang="ko-KR" dirty="0" smtClean="0"/>
+            <a:endParaRPr lang="en-US" altLang="ko-KR" dirty="0"/>
+          </a:p>
+          <a:p>
+            <a:r>
+              <a:rPr lang="en-US" altLang="ko-KR" dirty="0"/>
               <a:t>=&gt;</a:t>
             </a:r>
           </a:p>
           <a:p>
-            <a:endParaRPr lang="en-US" altLang="ko-KR" dirty="0" smtClean="0"/>
-          </a:p>
-          <a:p>
-            <a:r>
-              <a:rPr lang="en-US" altLang="ko-KR" dirty="0" err="1" smtClean="0"/>
+            <a:endParaRPr lang="en-US" altLang="ko-KR" dirty="0"/>
+          </a:p>
+          <a:p>
+            <a:r>
+              <a:rPr lang="en-US" altLang="ko-KR" dirty="0" err="1"/>
               <a:t>const</a:t>
             </a:r>
             <a:r>
-              <a:rPr lang="en-US" altLang="ko-KR" dirty="0" smtClean="0"/>
+              <a:rPr lang="en-US" altLang="ko-KR" dirty="0"/>
               <a:t> element = </a:t>
             </a:r>
             <a:r>
-              <a:rPr lang="en-US" altLang="ko-KR" dirty="0" err="1" smtClean="0"/>
+              <a:rPr lang="en-US" altLang="ko-KR" dirty="0" err="1"/>
               <a:t>React.createElement</a:t>
             </a:r>
             <a:r>
-              <a:rPr lang="en-US" altLang="ko-KR" dirty="0" smtClean="0"/>
+              <a:rPr lang="en-US" altLang="ko-KR" dirty="0"/>
               <a:t>(</a:t>
             </a:r>
           </a:p>
           <a:p>
             <a:r>
-              <a:rPr lang="en-US" altLang="ko-KR" dirty="0" smtClean="0"/>
+              <a:rPr lang="en-US" altLang="ko-KR" dirty="0"/>
               <a:t> 'h1', {</a:t>
             </a:r>
           </a:p>
           <a:p>
             <a:r>
-              <a:rPr lang="en-US" altLang="ko-KR" dirty="0" smtClean="0"/>
+              <a:rPr lang="en-US" altLang="ko-KR" dirty="0"/>
               <a:t> </a:t>
             </a:r>
             <a:r>
-              <a:rPr lang="en-US" altLang="ko-KR" dirty="0" err="1" smtClean="0"/>
+              <a:rPr lang="en-US" altLang="ko-KR" dirty="0" err="1"/>
               <a:t>className</a:t>
             </a:r>
             <a:r>
-              <a:rPr lang="en-US" altLang="ko-KR" dirty="0" smtClean="0"/>
+              <a:rPr lang="en-US" altLang="ko-KR" dirty="0"/>
               <a:t>: hello' }, </a:t>
             </a:r>
           </a:p>
           <a:p>
             <a:r>
-              <a:rPr lang="en-US" altLang="ko-KR" dirty="0" smtClean="0"/>
+              <a:rPr lang="en-US" altLang="ko-KR" dirty="0"/>
               <a:t>'Hello, world!' </a:t>
             </a:r>
           </a:p>
           <a:p>
             <a:r>
-              <a:rPr lang="en-US" altLang="ko-KR" dirty="0" smtClean="0"/>
+              <a:rPr lang="en-US" altLang="ko-KR" dirty="0"/>
               <a:t>);</a:t>
             </a:r>
             <a:endParaRPr lang="ko-KR" altLang="en-US" dirty="0"/>
@@ -7763,15 +7755,6 @@
             </a:endParaRPr>
           </a:p>
           <a:p>
-            <a:r>
-              <a:rPr lang="en-US" altLang="ko-KR" dirty="0">
-                <a:solidFill>
-                  <a:srgbClr val="BBBBBB"/>
-                </a:solidFill>
-                <a:latin typeface="Consolas" panose="020B0609020204030204" pitchFamily="49" charset="0"/>
-              </a:rPr>
-              <a:t/>
-            </a:r>
             <a:br>
               <a:rPr lang="en-US" altLang="ko-KR" dirty="0">
                 <a:solidFill>
@@ -12858,15 +12841,6 @@
             </a:endParaRPr>
           </a:p>
           <a:p>
-            <a:r>
-              <a:rPr lang="en-US" altLang="ko-KR" sz="1600" dirty="0">
-                <a:solidFill>
-                  <a:srgbClr val="BBBBBB"/>
-                </a:solidFill>
-                <a:latin typeface="Consolas" panose="020B0609020204030204" pitchFamily="49" charset="0"/>
-              </a:rPr>
-              <a:t/>
-            </a:r>
             <a:br>
               <a:rPr lang="en-US" altLang="ko-KR" sz="1600" dirty="0">
                 <a:solidFill>
@@ -17966,7 +17940,7 @@
         </p:spPr>
         <p:txBody>
           <a:bodyPr>
-            <a:normAutofit fontScale="85000" lnSpcReduction="20000"/>
+            <a:normAutofit fontScale="85000" lnSpcReduction="10000"/>
           </a:bodyPr>
           <a:lstStyle/>
           <a:p>
@@ -18069,15 +18043,15 @@
             </a:pPr>
             <a:r>
               <a:rPr lang="ko-KR" altLang="en-US" dirty="0"/>
-              <a:t>어디서 실수 </a:t>
-            </a:r>
-            <a:r>
-              <a:rPr lang="ko-KR" altLang="en-US" dirty="0" err="1"/>
-              <a:t>했는지까지</a:t>
+              <a:t>어디서 </a:t>
+            </a:r>
+            <a:r>
+              <a:rPr lang="ko-KR" altLang="en-US"/>
+              <a:t>실수 했는지까지 </a:t>
             </a:r>
             <a:r>
               <a:rPr lang="ko-KR" altLang="en-US" dirty="0"/>
-              <a:t> 자세히 제공하니 </a:t>
+              <a:t>자세히 제공하니 </a:t>
             </a:r>
             <a:r>
               <a:rPr lang="ko-KR" altLang="en-US" dirty="0">
@@ -20346,16 +20320,6 @@
             </a:r>
           </a:p>
           <a:p>
-            <a:r>
-              <a:rPr lang="en-US" altLang="ko-KR" b="0" dirty="0">
-                <a:solidFill>
-                  <a:srgbClr val="D4D4D4"/>
-                </a:solidFill>
-                <a:effectLst/>
-                <a:latin typeface="Consolas" panose="020B0609020204030204" pitchFamily="49" charset="0"/>
-              </a:rPr>
-              <a:t/>
-            </a:r>
             <a:br>
               <a:rPr lang="en-US" altLang="ko-KR" b="0" dirty="0">
                 <a:solidFill>
@@ -20656,16 +20620,6 @@
             </a:r>
           </a:p>
           <a:p>
-            <a:r>
-              <a:rPr lang="en-US" altLang="ko-KR" b="0" dirty="0">
-                <a:solidFill>
-                  <a:srgbClr val="D4D4D4"/>
-                </a:solidFill>
-                <a:effectLst/>
-                <a:latin typeface="Consolas" panose="020B0609020204030204" pitchFamily="49" charset="0"/>
-              </a:rPr>
-              <a:t/>
-            </a:r>
             <a:br>
               <a:rPr lang="en-US" altLang="ko-KR" b="0" dirty="0">
                 <a:solidFill>

--- a/material/[SeSAC_YDP_6] 23_React_Component_JSX.pptx
+++ b/material/[SeSAC_YDP_6] 23_React_Component_JSX.pptx
@@ -13668,7 +13668,7 @@
         </p:nvSpPr>
         <p:spPr>
           <a:xfrm>
-            <a:off x="296144" y="3836756"/>
+            <a:off x="392787" y="3441398"/>
             <a:ext cx="11590985" cy="923330"/>
           </a:xfrm>
           <a:prstGeom prst="rect">
